--- a/Desenvolvimento de Aplicações/Pedro/Aula 03 - Introdução a Programação Orientada a Objetos/Introdução a POO.pptx
+++ b/Desenvolvimento de Aplicações/Pedro/Aula 03 - Introdução a Programação Orientada a Objetos/Introdução a POO.pptx
@@ -5,49 +5,47 @@
     <p:sldMasterId id="2147483651" r:id="rId1"/>
   </p:sldMasterIdLst>
   <p:notesMasterIdLst>
-    <p:notesMasterId r:id="rId12"/>
+    <p:notesMasterId r:id="rId10"/>
   </p:notesMasterIdLst>
   <p:sldIdLst>
     <p:sldId id="256" r:id="rId2"/>
     <p:sldId id="257" r:id="rId3"/>
     <p:sldId id="258" r:id="rId4"/>
     <p:sldId id="264" r:id="rId5"/>
-    <p:sldId id="259" r:id="rId6"/>
-    <p:sldId id="267" r:id="rId7"/>
-    <p:sldId id="265" r:id="rId8"/>
-    <p:sldId id="260" r:id="rId9"/>
-    <p:sldId id="261" r:id="rId10"/>
-    <p:sldId id="262" r:id="rId11"/>
+    <p:sldId id="267" r:id="rId6"/>
+    <p:sldId id="265" r:id="rId7"/>
+    <p:sldId id="260" r:id="rId8"/>
+    <p:sldId id="261" r:id="rId9"/>
   </p:sldIdLst>
   <p:sldSz cx="12192000" cy="6858000"/>
   <p:notesSz cx="6858000" cy="12192000"/>
   <p:embeddedFontLst>
     <p:embeddedFont>
       <p:font typeface="Calibri" panose="020F0502020204030204" pitchFamily="34" charset="0"/>
-      <p:regular r:id="rId13"/>
-      <p:bold r:id="rId14"/>
-      <p:italic r:id="rId15"/>
-      <p:boldItalic r:id="rId16"/>
+      <p:regular r:id="rId11"/>
+      <p:bold r:id="rId12"/>
+      <p:italic r:id="rId13"/>
+      <p:boldItalic r:id="rId14"/>
     </p:embeddedFont>
     <p:embeddedFont>
       <p:font typeface="Calibri Light" panose="020F0302020204030204" pitchFamily="34" charset="0"/>
-      <p:regular r:id="rId17"/>
-      <p:italic r:id="rId18"/>
+      <p:regular r:id="rId15"/>
+      <p:italic r:id="rId16"/>
     </p:embeddedFont>
     <p:embeddedFont>
       <p:font typeface="Consolas" panose="020B0609020204030204" pitchFamily="49" charset="0"/>
-      <p:regular r:id="rId19"/>
-      <p:bold r:id="rId20"/>
-      <p:italic r:id="rId21"/>
-      <p:boldItalic r:id="rId22"/>
+      <p:regular r:id="rId17"/>
+      <p:bold r:id="rId18"/>
+      <p:italic r:id="rId19"/>
+      <p:boldItalic r:id="rId20"/>
     </p:embeddedFont>
     <p:embeddedFont>
       <p:font typeface="Inter" panose="020B0604020202020204" charset="0"/>
-      <p:regular r:id="rId23"/>
+      <p:regular r:id="rId21"/>
     </p:embeddedFont>
     <p:embeddedFont>
       <p:font typeface="Inter Bold" panose="020B0604020202020204" charset="0"/>
-      <p:regular r:id="rId24"/>
+      <p:regular r:id="rId22"/>
     </p:embeddedFont>
   </p:embeddedFontLst>
   <p:defaultTextStyle>
@@ -679,7 +677,7 @@
           <a:p>
             <a:fld id="{F7021451-1387-4CA6-816F-3879F97B5CBC}" type="slidenum">
               <a:rPr lang="en-US"/>
-              <a:t>5</a:t>
+              <a:t>7</a:t>
             </a:fld>
             <a:endParaRPr lang="en-US"/>
           </a:p>
@@ -764,174 +762,6 @@
             <a:fld id="{F7021451-1387-4CA6-816F-3879F97B5CBC}" type="slidenum">
               <a:rPr lang="en-US"/>
               <a:t>8</a:t>
-            </a:fld>
-            <a:endParaRPr lang="en-US"/>
-          </a:p>
-        </p:txBody>
-      </p:sp>
-    </p:spTree>
-    <p:extLst>
-      <p:ext uri="{BB962C8B-B14F-4D97-AF65-F5344CB8AC3E}">
-        <p14:creationId xmlns:p14="http://schemas.microsoft.com/office/powerpoint/2010/main" val="1024086991"/>
-      </p:ext>
-    </p:extLst>
-  </p:cSld>
-  <p:clrMapOvr>
-    <a:masterClrMapping/>
-  </p:clrMapOvr>
-</p:notes>
-</file>
-
-<file path=ppt/notesSlides/notesSlide7.xml><?xml version="1.0" encoding="utf-8"?>
-<p:notes xmlns:a="http://schemas.openxmlformats.org/drawingml/2006/main" xmlns:r="http://schemas.openxmlformats.org/officeDocument/2006/relationships" xmlns:p="http://schemas.openxmlformats.org/presentationml/2006/main">
-  <p:cSld>
-    <p:spTree>
-      <p:nvGrpSpPr>
-        <p:cNvPr id="1" name=""/>
-        <p:cNvGrpSpPr/>
-        <p:nvPr/>
-      </p:nvGrpSpPr>
-      <p:grpSpPr>
-        <a:xfrm>
-          <a:off x="0" y="0"/>
-          <a:ext cx="0" cy="0"/>
-          <a:chOff x="0" y="0"/>
-          <a:chExt cx="0" cy="0"/>
-        </a:xfrm>
-      </p:grpSpPr>
-      <p:sp>
-        <p:nvSpPr>
-          <p:cNvPr id="2" name="Slide Image Placeholder 1"/>
-          <p:cNvSpPr>
-            <a:spLocks noGrp="1" noRot="1" noChangeAspect="1"/>
-          </p:cNvSpPr>
-          <p:nvPr>
-            <p:ph type="sldImg"/>
-          </p:nvPr>
-        </p:nvSpPr>
-        <p:spPr/>
-      </p:sp>
-      <p:sp>
-        <p:nvSpPr>
-          <p:cNvPr id="3" name="Notes Placeholder 2"/>
-          <p:cNvSpPr>
-            <a:spLocks noGrp="1"/>
-          </p:cNvSpPr>
-          <p:nvPr>
-            <p:ph type="body" idx="1"/>
-          </p:nvPr>
-        </p:nvSpPr>
-        <p:spPr/>
-        <p:txBody>
-          <a:bodyPr/>
-          <a:lstStyle/>
-          <a:p>
-            <a:endParaRPr lang="en-US" dirty="0"/>
-          </a:p>
-        </p:txBody>
-      </p:sp>
-      <p:sp>
-        <p:nvSpPr>
-          <p:cNvPr id="4" name="Slide Number Placeholder 3"/>
-          <p:cNvSpPr>
-            <a:spLocks noGrp="1"/>
-          </p:cNvSpPr>
-          <p:nvPr>
-            <p:ph type="sldNum" sz="quarter" idx="10"/>
-          </p:nvPr>
-        </p:nvSpPr>
-        <p:spPr/>
-        <p:txBody>
-          <a:bodyPr/>
-          <a:lstStyle/>
-          <a:p>
-            <a:fld id="{F7021451-1387-4CA6-816F-3879F97B5CBC}" type="slidenum">
-              <a:rPr lang="en-US"/>
-              <a:t>9</a:t>
-            </a:fld>
-            <a:endParaRPr lang="en-US"/>
-          </a:p>
-        </p:txBody>
-      </p:sp>
-    </p:spTree>
-    <p:extLst>
-      <p:ext uri="{BB962C8B-B14F-4D97-AF65-F5344CB8AC3E}">
-        <p14:creationId xmlns:p14="http://schemas.microsoft.com/office/powerpoint/2010/main" val="1024086991"/>
-      </p:ext>
-    </p:extLst>
-  </p:cSld>
-  <p:clrMapOvr>
-    <a:masterClrMapping/>
-  </p:clrMapOvr>
-</p:notes>
-</file>
-
-<file path=ppt/notesSlides/notesSlide8.xml><?xml version="1.0" encoding="utf-8"?>
-<p:notes xmlns:a="http://schemas.openxmlformats.org/drawingml/2006/main" xmlns:r="http://schemas.openxmlformats.org/officeDocument/2006/relationships" xmlns:p="http://schemas.openxmlformats.org/presentationml/2006/main">
-  <p:cSld>
-    <p:spTree>
-      <p:nvGrpSpPr>
-        <p:cNvPr id="1" name=""/>
-        <p:cNvGrpSpPr/>
-        <p:nvPr/>
-      </p:nvGrpSpPr>
-      <p:grpSpPr>
-        <a:xfrm>
-          <a:off x="0" y="0"/>
-          <a:ext cx="0" cy="0"/>
-          <a:chOff x="0" y="0"/>
-          <a:chExt cx="0" cy="0"/>
-        </a:xfrm>
-      </p:grpSpPr>
-      <p:sp>
-        <p:nvSpPr>
-          <p:cNvPr id="2" name="Slide Image Placeholder 1"/>
-          <p:cNvSpPr>
-            <a:spLocks noGrp="1" noRot="1" noChangeAspect="1"/>
-          </p:cNvSpPr>
-          <p:nvPr>
-            <p:ph type="sldImg"/>
-          </p:nvPr>
-        </p:nvSpPr>
-        <p:spPr/>
-      </p:sp>
-      <p:sp>
-        <p:nvSpPr>
-          <p:cNvPr id="3" name="Notes Placeholder 2"/>
-          <p:cNvSpPr>
-            <a:spLocks noGrp="1"/>
-          </p:cNvSpPr>
-          <p:nvPr>
-            <p:ph type="body" idx="1"/>
-          </p:nvPr>
-        </p:nvSpPr>
-        <p:spPr/>
-        <p:txBody>
-          <a:bodyPr/>
-          <a:lstStyle/>
-          <a:p>
-            <a:endParaRPr lang="en-US" dirty="0"/>
-          </a:p>
-        </p:txBody>
-      </p:sp>
-      <p:sp>
-        <p:nvSpPr>
-          <p:cNvPr id="4" name="Slide Number Placeholder 3"/>
-          <p:cNvSpPr>
-            <a:spLocks noGrp="1"/>
-          </p:cNvSpPr>
-          <p:nvPr>
-            <p:ph type="sldNum" sz="quarter" idx="10"/>
-          </p:nvPr>
-        </p:nvSpPr>
-        <p:spPr/>
-        <p:txBody>
-          <a:bodyPr/>
-          <a:lstStyle/>
-          <a:p>
-            <a:fld id="{F7021451-1387-4CA6-816F-3879F97B5CBC}" type="slidenum">
-              <a:rPr lang="en-US"/>
-              <a:t>10</a:t>
             </a:fld>
             <a:endParaRPr lang="en-US"/>
           </a:p>
@@ -4408,558 +4238,6 @@
 </p:sld>
 </file>
 
-<file path=ppt/slides/slide10.xml><?xml version="1.0" encoding="utf-8"?>
-<p:sld xmlns:a="http://schemas.openxmlformats.org/drawingml/2006/main" xmlns:r="http://schemas.openxmlformats.org/officeDocument/2006/relationships" xmlns:p="http://schemas.openxmlformats.org/presentationml/2006/main">
-  <p:cSld name="Slide 7">
-    <p:spTree>
-      <p:nvGrpSpPr>
-        <p:cNvPr id="1" name=""/>
-        <p:cNvGrpSpPr/>
-        <p:nvPr/>
-      </p:nvGrpSpPr>
-      <p:grpSpPr>
-        <a:xfrm>
-          <a:off x="0" y="0"/>
-          <a:ext cx="0" cy="0"/>
-          <a:chOff x="0" y="0"/>
-          <a:chExt cx="0" cy="0"/>
-        </a:xfrm>
-      </p:grpSpPr>
-      <p:pic>
-        <p:nvPicPr>
-          <p:cNvPr id="2" name="Image 0" descr="preencoded.png"/>
-          <p:cNvPicPr>
-            <a:picLocks noChangeAspect="1"/>
-          </p:cNvPicPr>
-          <p:nvPr/>
-        </p:nvPicPr>
-        <p:blipFill>
-          <a:blip r:embed="rId3"/>
-          <a:stretch>
-            <a:fillRect/>
-          </a:stretch>
-        </p:blipFill>
-        <p:spPr>
-          <a:xfrm>
-            <a:off x="0" y="0"/>
-            <a:ext cx="4571886" cy="6858000"/>
-          </a:xfrm>
-          <a:prstGeom prst="rect">
-            <a:avLst/>
-          </a:prstGeom>
-        </p:spPr>
-      </p:pic>
-      <p:sp>
-        <p:nvSpPr>
-          <p:cNvPr id="3" name="Text 0"/>
-          <p:cNvSpPr/>
-          <p:nvPr/>
-        </p:nvSpPr>
-        <p:spPr>
-          <a:xfrm>
-            <a:off x="5233360" y="1222474"/>
-            <a:ext cx="6296860" cy="413445"/>
-          </a:xfrm>
-          <a:prstGeom prst="rect">
-            <a:avLst/>
-          </a:prstGeom>
-          <a:noFill/>
-          <a:ln/>
-        </p:spPr>
-        <p:txBody>
-          <a:bodyPr wrap="none" lIns="0" tIns="0" rIns="0" bIns="0" rtlCol="0" anchor="t"/>
-          <a:lstStyle/>
-          <a:p>
-            <a:pPr marL="0" indent="0" algn="l">
-              <a:lnSpc>
-                <a:spcPct val="104000"/>
-              </a:lnSpc>
-              <a:buNone/>
-            </a:pPr>
-            <a:r>
-              <a:rPr lang="en-US" sz="2600" b="1" kern="0" spc="-78" dirty="0">
-                <a:solidFill>
-                  <a:srgbClr val="000000"/>
-                </a:solidFill>
-                <a:latin typeface="Inter Bold" pitchFamily="34" charset="0"/>
-                <a:ea typeface="Inter Bold" pitchFamily="34" charset="-122"/>
-                <a:cs typeface="Inter Bold" pitchFamily="34" charset="-120"/>
-              </a:rPr>
-              <a:t>Abstração: Escondendo a Complexidade</a:t>
-            </a:r>
-            <a:endParaRPr lang="en-US" sz="2600" dirty="0"/>
-          </a:p>
-        </p:txBody>
-      </p:sp>
-      <p:sp>
-        <p:nvSpPr>
-          <p:cNvPr id="4" name="Text 1"/>
-          <p:cNvSpPr/>
-          <p:nvPr/>
-        </p:nvSpPr>
-        <p:spPr>
-          <a:xfrm>
-            <a:off x="5233360" y="1858169"/>
-            <a:ext cx="2987104" cy="1349573"/>
-          </a:xfrm>
-          <a:prstGeom prst="rect">
-            <a:avLst/>
-          </a:prstGeom>
-          <a:noFill/>
-          <a:ln/>
-        </p:spPr>
-        <p:txBody>
-          <a:bodyPr wrap="square" lIns="0" tIns="0" rIns="0" bIns="0" rtlCol="0" anchor="t">
-            <a:normAutofit/>
-          </a:bodyPr>
-          <a:lstStyle/>
-          <a:p>
-            <a:pPr marL="0" indent="0" algn="l">
-              <a:lnSpc>
-                <a:spcPct val="113000"/>
-              </a:lnSpc>
-              <a:spcAft>
-                <a:spcPts val="650"/>
-              </a:spcAft>
-              <a:buNone/>
-            </a:pPr>
-            <a:r>
-              <a:rPr lang="en-US" sz="1000" kern="0" spc="-21" dirty="0">
-                <a:solidFill>
-                  <a:srgbClr val="272525"/>
-                </a:solidFill>
-                <a:latin typeface="Inter" pitchFamily="34" charset="0"/>
-                <a:ea typeface="Inter" pitchFamily="34" charset="-122"/>
-                <a:cs typeface="Inter" pitchFamily="34" charset="-120"/>
-              </a:rPr>
-              <a:t>Você liga para alguém no celular sem saber como o sinal é transmitido. Isso é </a:t>
-            </a:r>
-            <a:r>
-              <a:rPr lang="en-US" sz="1000" b="1" kern="0" spc="-21" dirty="0">
-                <a:solidFill>
-                  <a:srgbClr val="272525"/>
-                </a:solidFill>
-                <a:latin typeface="Inter Bold" pitchFamily="34" charset="0"/>
-                <a:ea typeface="Inter Bold" pitchFamily="34" charset="-122"/>
-                <a:cs typeface="Inter Bold" pitchFamily="34" charset="-120"/>
-              </a:rPr>
-              <a:t>abstração</a:t>
-            </a:r>
-            <a:r>
-              <a:rPr lang="en-US" sz="1000" kern="0" spc="-21" dirty="0">
-                <a:solidFill>
-                  <a:srgbClr val="272525"/>
-                </a:solidFill>
-                <a:latin typeface="Inter" pitchFamily="34" charset="0"/>
-                <a:ea typeface="Inter" pitchFamily="34" charset="-122"/>
-                <a:cs typeface="Inter" pitchFamily="34" charset="-120"/>
-              </a:rPr>
-              <a:t>: expor apenas o que o usuário precisa usar, ocultando a complexidade interna.</a:t>
-            </a:r>
-            <a:endParaRPr lang="en-US" sz="1000" dirty="0"/>
-          </a:p>
-          <a:p>
-            <a:pPr marL="0" indent="0" algn="l">
-              <a:lnSpc>
-                <a:spcPct val="113000"/>
-              </a:lnSpc>
-              <a:buNone/>
-            </a:pPr>
-            <a:r>
-              <a:rPr lang="en-US" sz="1000" kern="0" spc="-21" dirty="0">
-                <a:solidFill>
-                  <a:srgbClr val="272525"/>
-                </a:solidFill>
-                <a:latin typeface="Inter" pitchFamily="34" charset="0"/>
-                <a:ea typeface="Inter" pitchFamily="34" charset="-122"/>
-                <a:cs typeface="Inter" pitchFamily="34" charset="-120"/>
-              </a:rPr>
-              <a:t>Na classe </a:t>
-            </a:r>
-            <a:r>
-              <a:rPr lang="en-US" sz="1000" kern="0" spc="-21" dirty="0">
-                <a:solidFill>
-                  <a:srgbClr val="272525"/>
-                </a:solidFill>
-                <a:highlight>
-                  <a:srgbClr val="F2F2F2"/>
-                </a:highlight>
-                <a:latin typeface="Consolas" pitchFamily="34" charset="0"/>
-                <a:ea typeface="Consolas" pitchFamily="34" charset="-122"/>
-                <a:cs typeface="Consolas" pitchFamily="34" charset="-120"/>
-              </a:rPr>
-              <a:t>Celular</a:t>
-            </a:r>
-            <a:r>
-              <a:rPr lang="en-US" sz="1000" kern="0" spc="-21" dirty="0">
-                <a:solidFill>
-                  <a:srgbClr val="272525"/>
-                </a:solidFill>
-                <a:latin typeface="Inter" pitchFamily="34" charset="0"/>
-                <a:ea typeface="Inter" pitchFamily="34" charset="-122"/>
-                <a:cs typeface="Inter" pitchFamily="34" charset="-120"/>
-              </a:rPr>
-              <a:t>, o método </a:t>
-            </a:r>
-            <a:r>
-              <a:rPr lang="en-US" sz="1000" kern="0" spc="-21" dirty="0">
-                <a:solidFill>
-                  <a:srgbClr val="272525"/>
-                </a:solidFill>
-                <a:highlight>
-                  <a:srgbClr val="F2F2F2"/>
-                </a:highlight>
-                <a:latin typeface="Consolas" pitchFamily="34" charset="0"/>
-                <a:ea typeface="Consolas" pitchFamily="34" charset="-122"/>
-                <a:cs typeface="Consolas" pitchFamily="34" charset="-120"/>
-              </a:rPr>
-              <a:t>fazerLigacao()</a:t>
-            </a:r>
-            <a:r>
-              <a:rPr lang="en-US" sz="1000" kern="0" spc="-21" dirty="0">
-                <a:solidFill>
-                  <a:srgbClr val="272525"/>
-                </a:solidFill>
-                <a:latin typeface="Inter" pitchFamily="34" charset="0"/>
-                <a:ea typeface="Inter" pitchFamily="34" charset="-122"/>
-                <a:cs typeface="Inter" pitchFamily="34" charset="-120"/>
-              </a:rPr>
-              <a:t> expõe uma ação simples. O que acontece "por baixo" não interessa a quem usa.</a:t>
-            </a:r>
-            <a:endParaRPr lang="en-US" sz="1000" dirty="0"/>
-          </a:p>
-        </p:txBody>
-      </p:sp>
-      <p:sp>
-        <p:nvSpPr>
-          <p:cNvPr id="5" name="Shape 2"/>
-          <p:cNvSpPr/>
-          <p:nvPr/>
-        </p:nvSpPr>
-        <p:spPr>
-          <a:xfrm>
-            <a:off x="8549466" y="1879005"/>
-            <a:ext cx="2987104" cy="3652242"/>
-          </a:xfrm>
-          <a:prstGeom prst="roundRect">
-            <a:avLst>
-              <a:gd name="adj" fmla="val 1860"/>
-            </a:avLst>
-          </a:prstGeom>
-          <a:solidFill>
-            <a:srgbClr val="F2F2F2"/>
-          </a:solidFill>
-          <a:ln/>
-        </p:spPr>
-      </p:sp>
-      <p:sp>
-        <p:nvSpPr>
-          <p:cNvPr id="6" name="Text 3"/>
-          <p:cNvSpPr/>
-          <p:nvPr/>
-        </p:nvSpPr>
-        <p:spPr>
-          <a:xfrm>
-            <a:off x="8708212" y="2011263"/>
-            <a:ext cx="2669612" cy="3387725"/>
-          </a:xfrm>
-          <a:prstGeom prst="rect">
-            <a:avLst/>
-          </a:prstGeom>
-          <a:noFill/>
-          <a:ln/>
-        </p:spPr>
-        <p:txBody>
-          <a:bodyPr wrap="square" lIns="0" tIns="0" rIns="0" bIns="0" rtlCol="0" anchor="t">
-            <a:normAutofit/>
-          </a:bodyPr>
-          <a:lstStyle/>
-          <a:p>
-            <a:pPr marL="0" indent="0" algn="l">
-              <a:lnSpc>
-                <a:spcPct val="133000"/>
-              </a:lnSpc>
-              <a:buNone/>
-            </a:pPr>
-            <a:r>
-              <a:rPr lang="en-US" sz="1000" kern="0" spc="-21" dirty="0">
-                <a:solidFill>
-                  <a:srgbClr val="D73A49"/>
-                </a:solidFill>
-                <a:latin typeface="Consolas" pitchFamily="34" charset="0"/>
-                <a:ea typeface="Consolas" pitchFamily="34" charset="-122"/>
-                <a:cs typeface="Consolas" pitchFamily="34" charset="-120"/>
-              </a:rPr>
-              <a:t>class Celular {</a:t>
-            </a:r>
-            <a:endParaRPr lang="en-US" sz="1000" dirty="0"/>
-          </a:p>
-          <a:p>
-            <a:pPr marL="0" indent="0" algn="l">
-              <a:lnSpc>
-                <a:spcPct val="133000"/>
-              </a:lnSpc>
-              <a:buNone/>
-            </a:pPr>
-            <a:r>
-              <a:rPr lang="en-US" sz="1000" kern="0" spc="-21" dirty="0">
-                <a:solidFill>
-                  <a:srgbClr val="D73A49"/>
-                </a:solidFill>
-                <a:latin typeface="Consolas" pitchFamily="34" charset="0"/>
-                <a:ea typeface="Consolas" pitchFamily="34" charset="-122"/>
-                <a:cs typeface="Consolas" pitchFamily="34" charset="-120"/>
-              </a:rPr>
-              <a:t>  String modelo;</a:t>
-            </a:r>
-            <a:endParaRPr lang="en-US" sz="1000" dirty="0"/>
-          </a:p>
-          <a:p>
-            <a:pPr marL="0" indent="0" algn="l">
-              <a:lnSpc>
-                <a:spcPct val="133000"/>
-              </a:lnSpc>
-              <a:buNone/>
-            </a:pPr>
-            <a:endParaRPr lang="en-US" sz="1000" dirty="0"/>
-          </a:p>
-          <a:p>
-            <a:pPr marL="0" indent="0" algn="l">
-              <a:lnSpc>
-                <a:spcPct val="133000"/>
-              </a:lnSpc>
-              <a:buNone/>
-            </a:pPr>
-            <a:r>
-              <a:rPr lang="en-US" sz="1000" kern="0" spc="-21" dirty="0">
-                <a:solidFill>
-                  <a:srgbClr val="D73A49"/>
-                </a:solidFill>
-                <a:latin typeface="Consolas" pitchFamily="34" charset="0"/>
-                <a:ea typeface="Consolas" pitchFamily="34" charset="-122"/>
-                <a:cs typeface="Consolas" pitchFamily="34" charset="-120"/>
-              </a:rPr>
-              <a:t>  Celular(this.modelo);</a:t>
-            </a:r>
-            <a:endParaRPr lang="en-US" sz="1000" dirty="0"/>
-          </a:p>
-          <a:p>
-            <a:pPr marL="0" indent="0" algn="l">
-              <a:lnSpc>
-                <a:spcPct val="133000"/>
-              </a:lnSpc>
-              <a:buNone/>
-            </a:pPr>
-            <a:endParaRPr lang="en-US" sz="1000" dirty="0"/>
-          </a:p>
-          <a:p>
-            <a:pPr marL="0" indent="0" algn="l">
-              <a:lnSpc>
-                <a:spcPct val="133000"/>
-              </a:lnSpc>
-              <a:buNone/>
-            </a:pPr>
-            <a:r>
-              <a:rPr lang="en-US" sz="1000" kern="0" spc="-21" dirty="0">
-                <a:solidFill>
-                  <a:srgbClr val="D73A49"/>
-                </a:solidFill>
-                <a:latin typeface="Consolas" pitchFamily="34" charset="0"/>
-                <a:ea typeface="Consolas" pitchFamily="34" charset="-122"/>
-                <a:cs typeface="Consolas" pitchFamily="34" charset="-120"/>
-              </a:rPr>
-              <a:t>  void fazerLigacao() {</a:t>
-            </a:r>
-            <a:endParaRPr lang="en-US" sz="1000" dirty="0"/>
-          </a:p>
-          <a:p>
-            <a:pPr marL="0" indent="0" algn="l">
-              <a:lnSpc>
-                <a:spcPct val="133000"/>
-              </a:lnSpc>
-              <a:buNone/>
-            </a:pPr>
-            <a:r>
-              <a:rPr lang="en-US" sz="1000" kern="0" spc="-21" dirty="0">
-                <a:solidFill>
-                  <a:srgbClr val="D73A49"/>
-                </a:solidFill>
-                <a:latin typeface="Consolas" pitchFamily="34" charset="0"/>
-                <a:ea typeface="Consolas" pitchFamily="34" charset="-122"/>
-                <a:cs typeface="Consolas" pitchFamily="34" charset="-120"/>
-              </a:rPr>
-              <a:t>    print('Realizando ligação...');</a:t>
-            </a:r>
-            <a:endParaRPr lang="en-US" sz="1000" dirty="0"/>
-          </a:p>
-          <a:p>
-            <a:pPr marL="0" indent="0" algn="l">
-              <a:lnSpc>
-                <a:spcPct val="133000"/>
-              </a:lnSpc>
-              <a:buNone/>
-            </a:pPr>
-            <a:r>
-              <a:rPr lang="en-US" sz="1000" kern="0" spc="-21" dirty="0">
-                <a:solidFill>
-                  <a:srgbClr val="D73A49"/>
-                </a:solidFill>
-                <a:latin typeface="Consolas" pitchFamily="34" charset="0"/>
-                <a:ea typeface="Consolas" pitchFamily="34" charset="-122"/>
-                <a:cs typeface="Consolas" pitchFamily="34" charset="-120"/>
-              </a:rPr>
-              <a:t>  }</a:t>
-            </a:r>
-            <a:endParaRPr lang="en-US" sz="1000" dirty="0"/>
-          </a:p>
-          <a:p>
-            <a:pPr marL="0" indent="0" algn="l">
-              <a:lnSpc>
-                <a:spcPct val="133000"/>
-              </a:lnSpc>
-              <a:buNone/>
-            </a:pPr>
-            <a:endParaRPr lang="en-US" sz="1000" dirty="0"/>
-          </a:p>
-          <a:p>
-            <a:pPr marL="0" indent="0" algn="l">
-              <a:lnSpc>
-                <a:spcPct val="133000"/>
-              </a:lnSpc>
-              <a:buNone/>
-            </a:pPr>
-            <a:r>
-              <a:rPr lang="en-US" sz="1000" kern="0" spc="-21" dirty="0">
-                <a:solidFill>
-                  <a:srgbClr val="D73A49"/>
-                </a:solidFill>
-                <a:latin typeface="Consolas" pitchFamily="34" charset="0"/>
-                <a:ea typeface="Consolas" pitchFamily="34" charset="-122"/>
-                <a:cs typeface="Consolas" pitchFamily="34" charset="-120"/>
-              </a:rPr>
-              <a:t>  void enviarMensagem(String texto) {</a:t>
-            </a:r>
-            <a:endParaRPr lang="en-US" sz="1000" dirty="0"/>
-          </a:p>
-          <a:p>
-            <a:pPr marL="0" indent="0" algn="l">
-              <a:lnSpc>
-                <a:spcPct val="133000"/>
-              </a:lnSpc>
-              <a:buNone/>
-            </a:pPr>
-            <a:r>
-              <a:rPr lang="en-US" sz="1000" kern="0" spc="-21" dirty="0">
-                <a:solidFill>
-                  <a:srgbClr val="D73A49"/>
-                </a:solidFill>
-                <a:latin typeface="Consolas" pitchFamily="34" charset="0"/>
-                <a:ea typeface="Consolas" pitchFamily="34" charset="-122"/>
-                <a:cs typeface="Consolas" pitchFamily="34" charset="-120"/>
-              </a:rPr>
-              <a:t>    print('Enviando: $texto');</a:t>
-            </a:r>
-            <a:endParaRPr lang="en-US" sz="1000" dirty="0"/>
-          </a:p>
-          <a:p>
-            <a:pPr marL="0" indent="0" algn="l">
-              <a:lnSpc>
-                <a:spcPct val="133000"/>
-              </a:lnSpc>
-              <a:buNone/>
-            </a:pPr>
-            <a:r>
-              <a:rPr lang="en-US" sz="1000" kern="0" spc="-21" dirty="0">
-                <a:solidFill>
-                  <a:srgbClr val="D73A49"/>
-                </a:solidFill>
-                <a:latin typeface="Consolas" pitchFamily="34" charset="0"/>
-                <a:ea typeface="Consolas" pitchFamily="34" charset="-122"/>
-                <a:cs typeface="Consolas" pitchFamily="34" charset="-120"/>
-              </a:rPr>
-              <a:t>  }</a:t>
-            </a:r>
-            <a:endParaRPr lang="en-US" sz="1000" dirty="0"/>
-          </a:p>
-          <a:p>
-            <a:pPr marL="0" indent="0" algn="l">
-              <a:lnSpc>
-                <a:spcPct val="133000"/>
-              </a:lnSpc>
-              <a:buNone/>
-            </a:pPr>
-            <a:r>
-              <a:rPr lang="en-US" sz="1000" kern="0" spc="-21" dirty="0">
-                <a:solidFill>
-                  <a:srgbClr val="D73A49"/>
-                </a:solidFill>
-                <a:latin typeface="Consolas" pitchFamily="34" charset="0"/>
-                <a:ea typeface="Consolas" pitchFamily="34" charset="-122"/>
-                <a:cs typeface="Consolas" pitchFamily="34" charset="-120"/>
-              </a:rPr>
-              <a:t>}</a:t>
-            </a:r>
-            <a:endParaRPr lang="en-US" sz="1000" dirty="0"/>
-          </a:p>
-          <a:p>
-            <a:pPr marL="0" indent="0" algn="l">
-              <a:lnSpc>
-                <a:spcPct val="133000"/>
-              </a:lnSpc>
-              <a:buNone/>
-            </a:pPr>
-            <a:endParaRPr lang="en-US" sz="1000" dirty="0"/>
-          </a:p>
-          <a:p>
-            <a:pPr marL="0" indent="0" algn="l">
-              <a:lnSpc>
-                <a:spcPct val="133000"/>
-              </a:lnSpc>
-              <a:buNone/>
-            </a:pPr>
-            <a:r>
-              <a:rPr lang="en-US" sz="1000" kern="0" spc="-21" dirty="0">
-                <a:solidFill>
-                  <a:srgbClr val="D73A49"/>
-                </a:solidFill>
-                <a:latin typeface="Consolas" pitchFamily="34" charset="0"/>
-                <a:ea typeface="Consolas" pitchFamily="34" charset="-122"/>
-                <a:cs typeface="Consolas" pitchFamily="34" charset="-120"/>
-              </a:rPr>
-              <a:t>var meuCelular = Celular('Galaxy S24');</a:t>
-            </a:r>
-            <a:endParaRPr lang="en-US" sz="1000" dirty="0"/>
-          </a:p>
-          <a:p>
-            <a:pPr marL="0" indent="0" algn="l">
-              <a:lnSpc>
-                <a:spcPct val="133000"/>
-              </a:lnSpc>
-              <a:buNone/>
-            </a:pPr>
-            <a:r>
-              <a:rPr lang="en-US" sz="1000" kern="0" spc="-21" dirty="0">
-                <a:solidFill>
-                  <a:srgbClr val="D73A49"/>
-                </a:solidFill>
-                <a:latin typeface="Consolas" pitchFamily="34" charset="0"/>
-                <a:ea typeface="Consolas" pitchFamily="34" charset="-122"/>
-                <a:cs typeface="Consolas" pitchFamily="34" charset="-120"/>
-              </a:rPr>
-              <a:t>meuCelular.fazerLigacao();</a:t>
-            </a:r>
-            <a:endParaRPr lang="en-US" sz="1000" dirty="0"/>
-          </a:p>
-        </p:txBody>
-      </p:sp>
-    </p:spTree>
-  </p:cSld>
-  <p:clrMapOvr>
-    <a:masterClrMapping/>
-  </p:clrMapOvr>
-</p:sld>
-</file>
-
 <file path=ppt/slides/slide2.xml><?xml version="1.0" encoding="utf-8"?>
 <p:sld xmlns:a="http://schemas.openxmlformats.org/drawingml/2006/main" xmlns:r="http://schemas.openxmlformats.org/officeDocument/2006/relationships" xmlns:p="http://schemas.openxmlformats.org/presentationml/2006/main">
   <p:cSld name="Slide 2">
@@ -7642,697 +6920,6 @@
 
 <file path=ppt/slides/slide5.xml><?xml version="1.0" encoding="utf-8"?>
 <p:sld xmlns:a="http://schemas.openxmlformats.org/drawingml/2006/main" xmlns:r="http://schemas.openxmlformats.org/officeDocument/2006/relationships" xmlns:p="http://schemas.openxmlformats.org/presentationml/2006/main">
-  <p:cSld name="Slide 4">
-    <p:spTree>
-      <p:nvGrpSpPr>
-        <p:cNvPr id="1" name=""/>
-        <p:cNvGrpSpPr/>
-        <p:nvPr/>
-      </p:nvGrpSpPr>
-      <p:grpSpPr>
-        <a:xfrm>
-          <a:off x="0" y="0"/>
-          <a:ext cx="0" cy="0"/>
-          <a:chOff x="0" y="0"/>
-          <a:chExt cx="0" cy="0"/>
-        </a:xfrm>
-      </p:grpSpPr>
-      <p:sp>
-        <p:nvSpPr>
-          <p:cNvPr id="2" name="Text 0"/>
-          <p:cNvSpPr/>
-          <p:nvPr/>
-        </p:nvSpPr>
-        <p:spPr>
-          <a:xfrm>
-            <a:off x="771705" y="990632"/>
-            <a:ext cx="10868745" cy="324941"/>
-          </a:xfrm>
-          <a:prstGeom prst="rect">
-            <a:avLst/>
-          </a:prstGeom>
-          <a:noFill/>
-          <a:ln/>
-        </p:spPr>
-        <p:txBody>
-          <a:bodyPr wrap="none" lIns="0" tIns="0" rIns="0" bIns="0" rtlCol="0" anchor="t"/>
-          <a:lstStyle/>
-          <a:p>
-            <a:pPr marL="0" indent="0" algn="l">
-              <a:lnSpc>
-                <a:spcPct val="104000"/>
-              </a:lnSpc>
-              <a:buNone/>
-            </a:pPr>
-            <a:r>
-              <a:rPr lang="en-US" sz="2000" b="1" kern="0" spc="-61" dirty="0">
-                <a:solidFill>
-                  <a:srgbClr val="000000"/>
-                </a:solidFill>
-                <a:latin typeface="Inter Bold" pitchFamily="34" charset="0"/>
-                <a:ea typeface="Inter Bold" pitchFamily="34" charset="-122"/>
-                <a:cs typeface="Inter Bold" pitchFamily="34" charset="-120"/>
-              </a:rPr>
-              <a:t>Atributos, Estado e Métodos</a:t>
-            </a:r>
-            <a:endParaRPr lang="en-US" sz="2000" dirty="0"/>
-          </a:p>
-        </p:txBody>
-      </p:sp>
-      <p:sp>
-        <p:nvSpPr>
-          <p:cNvPr id="3" name="Shape 1"/>
-          <p:cNvSpPr/>
-          <p:nvPr/>
-        </p:nvSpPr>
-        <p:spPr>
-          <a:xfrm>
-            <a:off x="771804" y="1903028"/>
-            <a:ext cx="3584783" cy="681236"/>
-          </a:xfrm>
-          <a:prstGeom prst="roundRect">
-            <a:avLst>
-              <a:gd name="adj" fmla="val 6409"/>
-            </a:avLst>
-          </a:prstGeom>
-          <a:solidFill>
-            <a:srgbClr val="DADBF1"/>
-          </a:solidFill>
-          <a:ln w="6350">
-            <a:solidFill>
-              <a:srgbClr val="C0C1D7"/>
-            </a:solidFill>
-            <a:prstDash val="solid"/>
-          </a:ln>
-        </p:spPr>
-      </p:sp>
-      <p:sp>
-        <p:nvSpPr>
-          <p:cNvPr id="4" name="Text 2"/>
-          <p:cNvSpPr/>
-          <p:nvPr/>
-        </p:nvSpPr>
-        <p:spPr>
-          <a:xfrm>
-            <a:off x="882033" y="2013260"/>
-            <a:ext cx="3364324" cy="168771"/>
-          </a:xfrm>
-          <a:prstGeom prst="rect">
-            <a:avLst/>
-          </a:prstGeom>
-          <a:noFill/>
-          <a:ln/>
-        </p:spPr>
-        <p:txBody>
-          <a:bodyPr wrap="none" lIns="0" tIns="0" rIns="0" bIns="0" rtlCol="0" anchor="t"/>
-          <a:lstStyle/>
-          <a:p>
-            <a:pPr marL="0" indent="0" algn="l">
-              <a:lnSpc>
-                <a:spcPct val="104000"/>
-              </a:lnSpc>
-              <a:buNone/>
-            </a:pPr>
-            <a:r>
-              <a:rPr lang="en-US" sz="1000" b="1" kern="0" spc="-31" dirty="0">
-                <a:solidFill>
-                  <a:srgbClr val="000000"/>
-                </a:solidFill>
-                <a:latin typeface="Twemoji Mozilla" pitchFamily="34" charset="0"/>
-                <a:ea typeface="Twemoji Mozilla" pitchFamily="34" charset="-122"/>
-                <a:cs typeface="Twemoji Mozilla" pitchFamily="34" charset="-120"/>
-              </a:rPr>
-              <a:t>🗂</a:t>
-            </a:r>
-            <a:r>
-              <a:rPr lang="en-US" sz="1000" b="1" kern="0" spc="-31" dirty="0">
-                <a:solidFill>
-                  <a:srgbClr val="272525"/>
-                </a:solidFill>
-                <a:latin typeface="Inter Bold" pitchFamily="34" charset="0"/>
-                <a:ea typeface="Inter Bold" pitchFamily="34" charset="-122"/>
-                <a:cs typeface="Inter Bold" pitchFamily="34" charset="-120"/>
-              </a:rPr>
-              <a:t> Atributos</a:t>
-            </a:r>
-            <a:endParaRPr lang="en-US" sz="1000" dirty="0"/>
-          </a:p>
-        </p:txBody>
-      </p:sp>
-      <p:sp>
-        <p:nvSpPr>
-          <p:cNvPr id="5" name="Text 3"/>
-          <p:cNvSpPr/>
-          <p:nvPr/>
-        </p:nvSpPr>
-        <p:spPr>
-          <a:xfrm>
-            <a:off x="882033" y="2216262"/>
-            <a:ext cx="3364324" cy="257770"/>
-          </a:xfrm>
-          <a:prstGeom prst="rect">
-            <a:avLst/>
-          </a:prstGeom>
-          <a:noFill/>
-          <a:ln/>
-        </p:spPr>
-        <p:txBody>
-          <a:bodyPr wrap="square" lIns="0" tIns="0" rIns="0" bIns="0" rtlCol="0" anchor="t">
-            <a:normAutofit/>
-          </a:bodyPr>
-          <a:lstStyle/>
-          <a:p>
-            <a:pPr marL="0" indent="0" algn="l">
-              <a:lnSpc>
-                <a:spcPct val="103000"/>
-              </a:lnSpc>
-              <a:buNone/>
-            </a:pPr>
-            <a:r>
-              <a:rPr lang="en-US" sz="800" kern="0" spc="-16" dirty="0">
-                <a:solidFill>
-                  <a:srgbClr val="272525"/>
-                </a:solidFill>
-                <a:latin typeface="Inter" pitchFamily="34" charset="0"/>
-                <a:ea typeface="Inter" pitchFamily="34" charset="-122"/>
-                <a:cs typeface="Inter" pitchFamily="34" charset="-120"/>
-              </a:rPr>
-              <a:t>São as </a:t>
-            </a:r>
-            <a:r>
-              <a:rPr lang="en-US" sz="800" b="1" kern="0" spc="-16" dirty="0">
-                <a:solidFill>
-                  <a:srgbClr val="272525"/>
-                </a:solidFill>
-                <a:latin typeface="Inter Bold" pitchFamily="34" charset="0"/>
-                <a:ea typeface="Inter Bold" pitchFamily="34" charset="-122"/>
-                <a:cs typeface="Inter Bold" pitchFamily="34" charset="-120"/>
-              </a:rPr>
-              <a:t>características</a:t>
-            </a:r>
-            <a:r>
-              <a:rPr lang="en-US" sz="800" kern="0" spc="-16" dirty="0">
-                <a:solidFill>
-                  <a:srgbClr val="272525"/>
-                </a:solidFill>
-                <a:latin typeface="Inter" pitchFamily="34" charset="0"/>
-                <a:ea typeface="Inter" pitchFamily="34" charset="-122"/>
-                <a:cs typeface="Inter" pitchFamily="34" charset="-120"/>
-              </a:rPr>
-              <a:t> do objeto — os dados que ele armazena, como </a:t>
-            </a:r>
-            <a:r>
-              <a:rPr lang="en-US" sz="800" kern="0" spc="-16" dirty="0">
-                <a:solidFill>
-                  <a:srgbClr val="272525"/>
-                </a:solidFill>
-                <a:highlight>
-                  <a:srgbClr val="F2F2F2"/>
-                </a:highlight>
-                <a:latin typeface="Consolas" pitchFamily="34" charset="0"/>
-                <a:ea typeface="Consolas" pitchFamily="34" charset="-122"/>
-                <a:cs typeface="Consolas" pitchFamily="34" charset="-120"/>
-              </a:rPr>
-              <a:t>nome</a:t>
-            </a:r>
-            <a:r>
-              <a:rPr lang="en-US" sz="800" kern="0" spc="-16" dirty="0">
-                <a:solidFill>
-                  <a:srgbClr val="272525"/>
-                </a:solidFill>
-                <a:latin typeface="Inter" pitchFamily="34" charset="0"/>
-                <a:ea typeface="Inter" pitchFamily="34" charset="-122"/>
-                <a:cs typeface="Inter" pitchFamily="34" charset="-120"/>
-              </a:rPr>
-              <a:t>, </a:t>
-            </a:r>
-            <a:r>
-              <a:rPr lang="en-US" sz="800" kern="0" spc="-16" dirty="0">
-                <a:solidFill>
-                  <a:srgbClr val="272525"/>
-                </a:solidFill>
-                <a:highlight>
-                  <a:srgbClr val="F2F2F2"/>
-                </a:highlight>
-                <a:latin typeface="Consolas" pitchFamily="34" charset="0"/>
-                <a:ea typeface="Consolas" pitchFamily="34" charset="-122"/>
-                <a:cs typeface="Consolas" pitchFamily="34" charset="-120"/>
-              </a:rPr>
-              <a:t>idade</a:t>
-            </a:r>
-            <a:r>
-              <a:rPr lang="en-US" sz="800" kern="0" spc="-16" dirty="0">
-                <a:solidFill>
-                  <a:srgbClr val="272525"/>
-                </a:solidFill>
-                <a:latin typeface="Inter" pitchFamily="34" charset="0"/>
-                <a:ea typeface="Inter" pitchFamily="34" charset="-122"/>
-                <a:cs typeface="Inter" pitchFamily="34" charset="-120"/>
-              </a:rPr>
-              <a:t> e </a:t>
-            </a:r>
-            <a:r>
-              <a:rPr lang="en-US" sz="800" kern="0" spc="-16" dirty="0">
-                <a:solidFill>
-                  <a:srgbClr val="272525"/>
-                </a:solidFill>
-                <a:highlight>
-                  <a:srgbClr val="F2F2F2"/>
-                </a:highlight>
-                <a:latin typeface="Consolas" pitchFamily="34" charset="0"/>
-                <a:ea typeface="Consolas" pitchFamily="34" charset="-122"/>
-                <a:cs typeface="Consolas" pitchFamily="34" charset="-120"/>
-              </a:rPr>
-              <a:t>curso</a:t>
-            </a:r>
-            <a:r>
-              <a:rPr lang="en-US" sz="800" kern="0" spc="-16" dirty="0">
-                <a:solidFill>
-                  <a:srgbClr val="272525"/>
-                </a:solidFill>
-                <a:latin typeface="Inter" pitchFamily="34" charset="0"/>
-                <a:ea typeface="Inter" pitchFamily="34" charset="-122"/>
-                <a:cs typeface="Inter" pitchFamily="34" charset="-120"/>
-              </a:rPr>
-              <a:t>.</a:t>
-            </a:r>
-            <a:endParaRPr lang="en-US" sz="800" dirty="0"/>
-          </a:p>
-        </p:txBody>
-      </p:sp>
-      <p:sp>
-        <p:nvSpPr>
-          <p:cNvPr id="6" name="Shape 4"/>
-          <p:cNvSpPr/>
-          <p:nvPr/>
-        </p:nvSpPr>
-        <p:spPr>
-          <a:xfrm>
-            <a:off x="4413735" y="1903028"/>
-            <a:ext cx="3584783" cy="681236"/>
-          </a:xfrm>
-          <a:prstGeom prst="roundRect">
-            <a:avLst>
-              <a:gd name="adj" fmla="val 6409"/>
-            </a:avLst>
-          </a:prstGeom>
-          <a:solidFill>
-            <a:srgbClr val="DADBF1"/>
-          </a:solidFill>
-          <a:ln w="6350">
-            <a:solidFill>
-              <a:srgbClr val="C0C1D7"/>
-            </a:solidFill>
-            <a:prstDash val="solid"/>
-          </a:ln>
-        </p:spPr>
-      </p:sp>
-      <p:sp>
-        <p:nvSpPr>
-          <p:cNvPr id="7" name="Text 5"/>
-          <p:cNvSpPr/>
-          <p:nvPr/>
-        </p:nvSpPr>
-        <p:spPr>
-          <a:xfrm>
-            <a:off x="4523965" y="2013260"/>
-            <a:ext cx="3364324" cy="168771"/>
-          </a:xfrm>
-          <a:prstGeom prst="rect">
-            <a:avLst/>
-          </a:prstGeom>
-          <a:noFill/>
-          <a:ln/>
-        </p:spPr>
-        <p:txBody>
-          <a:bodyPr wrap="none" lIns="0" tIns="0" rIns="0" bIns="0" rtlCol="0" anchor="t"/>
-          <a:lstStyle/>
-          <a:p>
-            <a:pPr marL="0" indent="0" algn="l">
-              <a:lnSpc>
-                <a:spcPct val="104000"/>
-              </a:lnSpc>
-              <a:buNone/>
-            </a:pPr>
-            <a:r>
-              <a:rPr lang="en-US" sz="1000" b="1" kern="0" spc="-31" dirty="0">
-                <a:solidFill>
-                  <a:srgbClr val="000000"/>
-                </a:solidFill>
-                <a:latin typeface="Twemoji Mozilla" pitchFamily="34" charset="0"/>
-                <a:ea typeface="Twemoji Mozilla" pitchFamily="34" charset="-122"/>
-                <a:cs typeface="Twemoji Mozilla" pitchFamily="34" charset="-120"/>
-              </a:rPr>
-              <a:t>📸</a:t>
-            </a:r>
-            <a:r>
-              <a:rPr lang="en-US" sz="1000" b="1" kern="0" spc="-31" dirty="0">
-                <a:solidFill>
-                  <a:srgbClr val="272525"/>
-                </a:solidFill>
-                <a:latin typeface="Inter Bold" pitchFamily="34" charset="0"/>
-                <a:ea typeface="Inter Bold" pitchFamily="34" charset="-122"/>
-                <a:cs typeface="Inter Bold" pitchFamily="34" charset="-120"/>
-              </a:rPr>
-              <a:t> Estado</a:t>
-            </a:r>
-            <a:endParaRPr lang="en-US" sz="1000" dirty="0"/>
-          </a:p>
-        </p:txBody>
-      </p:sp>
-      <p:sp>
-        <p:nvSpPr>
-          <p:cNvPr id="8" name="Text 6"/>
-          <p:cNvSpPr/>
-          <p:nvPr/>
-        </p:nvSpPr>
-        <p:spPr>
-          <a:xfrm>
-            <a:off x="4523965" y="2216262"/>
-            <a:ext cx="3364324" cy="257770"/>
-          </a:xfrm>
-          <a:prstGeom prst="rect">
-            <a:avLst/>
-          </a:prstGeom>
-          <a:noFill/>
-          <a:ln/>
-        </p:spPr>
-        <p:txBody>
-          <a:bodyPr wrap="square" lIns="0" tIns="0" rIns="0" bIns="0" rtlCol="0" anchor="t">
-            <a:normAutofit/>
-          </a:bodyPr>
-          <a:lstStyle/>
-          <a:p>
-            <a:pPr marL="0" indent="0" algn="l">
-              <a:lnSpc>
-                <a:spcPct val="103000"/>
-              </a:lnSpc>
-              <a:buNone/>
-            </a:pPr>
-            <a:r>
-              <a:rPr lang="en-US" sz="800" kern="0" spc="-16" dirty="0">
-                <a:solidFill>
-                  <a:srgbClr val="272525"/>
-                </a:solidFill>
-                <a:latin typeface="Inter" pitchFamily="34" charset="0"/>
-                <a:ea typeface="Inter" pitchFamily="34" charset="-122"/>
-                <a:cs typeface="Inter" pitchFamily="34" charset="-120"/>
-              </a:rPr>
-              <a:t>O </a:t>
-            </a:r>
-            <a:r>
-              <a:rPr lang="en-US" sz="800" b="1" kern="0" spc="-16" dirty="0">
-                <a:solidFill>
-                  <a:srgbClr val="272525"/>
-                </a:solidFill>
-                <a:latin typeface="Inter Bold" pitchFamily="34" charset="0"/>
-                <a:ea typeface="Inter Bold" pitchFamily="34" charset="-122"/>
-                <a:cs typeface="Inter Bold" pitchFamily="34" charset="-120"/>
-              </a:rPr>
-              <a:t>conjunto de valores</a:t>
-            </a:r>
-            <a:r>
-              <a:rPr lang="en-US" sz="800" kern="0" spc="-16" dirty="0">
-                <a:solidFill>
-                  <a:srgbClr val="272525"/>
-                </a:solidFill>
-                <a:latin typeface="Inter" pitchFamily="34" charset="0"/>
-                <a:ea typeface="Inter" pitchFamily="34" charset="-122"/>
-                <a:cs typeface="Inter" pitchFamily="34" charset="-120"/>
-              </a:rPr>
-              <a:t> dos atributos em um dado momento define o estado atual do objeto.</a:t>
-            </a:r>
-            <a:endParaRPr lang="en-US" sz="800" dirty="0"/>
-          </a:p>
-        </p:txBody>
-      </p:sp>
-      <p:sp>
-        <p:nvSpPr>
-          <p:cNvPr id="9" name="Shape 7"/>
-          <p:cNvSpPr/>
-          <p:nvPr/>
-        </p:nvSpPr>
-        <p:spPr>
-          <a:xfrm>
-            <a:off x="8055667" y="1903028"/>
-            <a:ext cx="3584783" cy="681236"/>
-          </a:xfrm>
-          <a:prstGeom prst="roundRect">
-            <a:avLst>
-              <a:gd name="adj" fmla="val 6409"/>
-            </a:avLst>
-          </a:prstGeom>
-          <a:solidFill>
-            <a:srgbClr val="DADBF1"/>
-          </a:solidFill>
-          <a:ln w="6350">
-            <a:solidFill>
-              <a:srgbClr val="C0C1D7"/>
-            </a:solidFill>
-            <a:prstDash val="solid"/>
-          </a:ln>
-        </p:spPr>
-      </p:sp>
-      <p:sp>
-        <p:nvSpPr>
-          <p:cNvPr id="10" name="Text 8"/>
-          <p:cNvSpPr/>
-          <p:nvPr/>
-        </p:nvSpPr>
-        <p:spPr>
-          <a:xfrm>
-            <a:off x="8165896" y="2013260"/>
-            <a:ext cx="3364324" cy="168771"/>
-          </a:xfrm>
-          <a:prstGeom prst="rect">
-            <a:avLst/>
-          </a:prstGeom>
-          <a:noFill/>
-          <a:ln/>
-        </p:spPr>
-        <p:txBody>
-          <a:bodyPr wrap="none" lIns="0" tIns="0" rIns="0" bIns="0" rtlCol="0" anchor="t"/>
-          <a:lstStyle/>
-          <a:p>
-            <a:pPr marL="0" indent="0" algn="l">
-              <a:lnSpc>
-                <a:spcPct val="104000"/>
-              </a:lnSpc>
-              <a:buNone/>
-            </a:pPr>
-            <a:r>
-              <a:rPr lang="en-US" sz="1000" b="1" kern="0" spc="-31" dirty="0">
-                <a:solidFill>
-                  <a:srgbClr val="000000"/>
-                </a:solidFill>
-                <a:latin typeface="Twemoji Mozilla" pitchFamily="34" charset="0"/>
-                <a:ea typeface="Twemoji Mozilla" pitchFamily="34" charset="-122"/>
-                <a:cs typeface="Twemoji Mozilla" pitchFamily="34" charset="-120"/>
-              </a:rPr>
-              <a:t>⚙️</a:t>
-            </a:r>
-            <a:r>
-              <a:rPr lang="en-US" sz="1000" b="1" kern="0" spc="-31" dirty="0">
-                <a:solidFill>
-                  <a:srgbClr val="272525"/>
-                </a:solidFill>
-                <a:latin typeface="Inter Bold" pitchFamily="34" charset="0"/>
-                <a:ea typeface="Inter Bold" pitchFamily="34" charset="-122"/>
-                <a:cs typeface="Inter Bold" pitchFamily="34" charset="-120"/>
-              </a:rPr>
-              <a:t> Métodos</a:t>
-            </a:r>
-            <a:endParaRPr lang="en-US" sz="1000" dirty="0"/>
-          </a:p>
-        </p:txBody>
-      </p:sp>
-      <p:sp>
-        <p:nvSpPr>
-          <p:cNvPr id="11" name="Text 9"/>
-          <p:cNvSpPr/>
-          <p:nvPr/>
-        </p:nvSpPr>
-        <p:spPr>
-          <a:xfrm>
-            <a:off x="8165896" y="2216262"/>
-            <a:ext cx="3364324" cy="257770"/>
-          </a:xfrm>
-          <a:prstGeom prst="rect">
-            <a:avLst/>
-          </a:prstGeom>
-          <a:noFill/>
-          <a:ln/>
-        </p:spPr>
-        <p:txBody>
-          <a:bodyPr wrap="square" lIns="0" tIns="0" rIns="0" bIns="0" rtlCol="0" anchor="t">
-            <a:normAutofit/>
-          </a:bodyPr>
-          <a:lstStyle/>
-          <a:p>
-            <a:pPr marL="0" indent="0" algn="l">
-              <a:lnSpc>
-                <a:spcPct val="103000"/>
-              </a:lnSpc>
-              <a:buNone/>
-            </a:pPr>
-            <a:r>
-              <a:rPr lang="en-US" sz="800" kern="0" spc="-16" dirty="0">
-                <a:solidFill>
-                  <a:srgbClr val="272525"/>
-                </a:solidFill>
-                <a:latin typeface="Inter" pitchFamily="34" charset="0"/>
-                <a:ea typeface="Inter" pitchFamily="34" charset="-122"/>
-                <a:cs typeface="Inter" pitchFamily="34" charset="-120"/>
-              </a:rPr>
-              <a:t>São as </a:t>
-            </a:r>
-            <a:r>
-              <a:rPr lang="en-US" sz="800" b="1" kern="0" spc="-16" dirty="0">
-                <a:solidFill>
-                  <a:srgbClr val="272525"/>
-                </a:solidFill>
-                <a:latin typeface="Inter Bold" pitchFamily="34" charset="0"/>
-                <a:ea typeface="Inter Bold" pitchFamily="34" charset="-122"/>
-                <a:cs typeface="Inter Bold" pitchFamily="34" charset="-120"/>
-              </a:rPr>
-              <a:t>ações</a:t>
-            </a:r>
-            <a:r>
-              <a:rPr lang="en-US" sz="800" kern="0" spc="-16" dirty="0">
-                <a:solidFill>
-                  <a:srgbClr val="272525"/>
-                </a:solidFill>
-                <a:latin typeface="Inter" pitchFamily="34" charset="0"/>
-                <a:ea typeface="Inter" pitchFamily="34" charset="-122"/>
-                <a:cs typeface="Inter" pitchFamily="34" charset="-120"/>
-              </a:rPr>
-              <a:t> que o objeto pode executar, como </a:t>
-            </a:r>
-            <a:r>
-              <a:rPr lang="en-US" sz="800" kern="0" spc="-16" dirty="0">
-                <a:solidFill>
-                  <a:srgbClr val="272525"/>
-                </a:solidFill>
-                <a:highlight>
-                  <a:srgbClr val="F2F2F2"/>
-                </a:highlight>
-                <a:latin typeface="Consolas" pitchFamily="34" charset="0"/>
-                <a:ea typeface="Consolas" pitchFamily="34" charset="-122"/>
-                <a:cs typeface="Consolas" pitchFamily="34" charset="-120"/>
-              </a:rPr>
-              <a:t>estudar()</a:t>
-            </a:r>
-            <a:r>
-              <a:rPr lang="en-US" sz="800" kern="0" spc="-16" dirty="0">
-                <a:solidFill>
-                  <a:srgbClr val="272525"/>
-                </a:solidFill>
-                <a:latin typeface="Inter" pitchFamily="34" charset="0"/>
-                <a:ea typeface="Inter" pitchFamily="34" charset="-122"/>
-                <a:cs typeface="Inter" pitchFamily="34" charset="-120"/>
-              </a:rPr>
-              <a:t>. Eles definem o comportamento.</a:t>
-            </a:r>
-            <a:endParaRPr lang="en-US" sz="800" dirty="0"/>
-          </a:p>
-        </p:txBody>
-      </p:sp>
-      <p:sp>
-        <p:nvSpPr>
-          <p:cNvPr id="17" name="Text 14"/>
-          <p:cNvSpPr/>
-          <p:nvPr/>
-        </p:nvSpPr>
-        <p:spPr>
-          <a:xfrm>
-            <a:off x="6529109" y="4710584"/>
-            <a:ext cx="1558825" cy="244549"/>
-          </a:xfrm>
-          <a:prstGeom prst="rect">
-            <a:avLst/>
-          </a:prstGeom>
-          <a:noFill/>
-          <a:ln/>
-        </p:spPr>
-        <p:txBody>
-          <a:bodyPr wrap="none" lIns="0" tIns="0" rIns="0" bIns="0" rtlCol="0" anchor="t"/>
-          <a:lstStyle/>
-          <a:p>
-            <a:pPr marL="0" indent="0" algn="ctr">
-              <a:lnSpc>
-                <a:spcPct val="104000"/>
-              </a:lnSpc>
-              <a:buNone/>
-            </a:pPr>
-            <a:r>
-              <a:rPr lang="en-US" sz="1500" b="1" kern="0" spc="-46" dirty="0">
-                <a:solidFill>
-                  <a:srgbClr val="FFFFFF"/>
-                </a:solidFill>
-                <a:latin typeface="Inter Bold" pitchFamily="34" charset="0"/>
-                <a:ea typeface="Inter Bold" pitchFamily="34" charset="-122"/>
-                <a:cs typeface="Inter Bold" pitchFamily="34" charset="-120"/>
-              </a:rPr>
-              <a:t>Comportamento</a:t>
-            </a:r>
-            <a:endParaRPr lang="en-US" sz="1500" dirty="0"/>
-          </a:p>
-        </p:txBody>
-      </p:sp>
-      <p:sp>
-        <p:nvSpPr>
-          <p:cNvPr id="18" name="Text 15"/>
-          <p:cNvSpPr/>
-          <p:nvPr/>
-        </p:nvSpPr>
-        <p:spPr>
-          <a:xfrm>
-            <a:off x="6529109" y="5024694"/>
-            <a:ext cx="1558825" cy="454861"/>
-          </a:xfrm>
-          <a:prstGeom prst="rect">
-            <a:avLst/>
-          </a:prstGeom>
-          <a:noFill/>
-          <a:ln/>
-        </p:spPr>
-        <p:txBody>
-          <a:bodyPr wrap="square" lIns="0" tIns="0" rIns="0" bIns="0" rtlCol="0" anchor="t">
-            <a:normAutofit/>
-          </a:bodyPr>
-          <a:lstStyle/>
-          <a:p>
-            <a:pPr marL="0" indent="0" algn="ctr">
-              <a:lnSpc>
-                <a:spcPct val="81000"/>
-              </a:lnSpc>
-              <a:buNone/>
-            </a:pPr>
-            <a:r>
-              <a:rPr lang="en-US" sz="1200" kern="0" spc="-22" dirty="0">
-                <a:solidFill>
-                  <a:srgbClr val="FFFFFF"/>
-                </a:solidFill>
-                <a:latin typeface="Inter" pitchFamily="34" charset="0"/>
-                <a:ea typeface="Inter" pitchFamily="34" charset="-122"/>
-                <a:cs typeface="Inter" pitchFamily="34" charset="-120"/>
-              </a:rPr>
-              <a:t>Ações executadas pelos métodos do objeto.</a:t>
-            </a:r>
-            <a:endParaRPr lang="en-US" sz="1200" dirty="0"/>
-          </a:p>
-        </p:txBody>
-      </p:sp>
-    </p:spTree>
-  </p:cSld>
-  <p:clrMapOvr>
-    <a:masterClrMapping/>
-  </p:clrMapOvr>
-</p:sld>
-</file>
-
-<file path=ppt/slides/slide6.xml><?xml version="1.0" encoding="utf-8"?>
-<p:sld xmlns:a="http://schemas.openxmlformats.org/drawingml/2006/main" xmlns:r="http://schemas.openxmlformats.org/officeDocument/2006/relationships" xmlns:p="http://schemas.openxmlformats.org/presentationml/2006/main">
   <p:cSld>
     <p:spTree>
       <p:nvGrpSpPr>
@@ -8370,14 +6957,32 @@
           <a:lstStyle/>
           <a:p>
             <a:r>
-              <a:rPr lang="pt-BR" dirty="0"/>
+              <a:rPr lang="pt-BR" sz="3300" b="1" kern="0" spc="-100" dirty="0">
+                <a:solidFill>
+                  <a:srgbClr val="000000"/>
+                </a:solidFill>
+                <a:latin typeface="Inter Bold" pitchFamily="34" charset="0"/>
+                <a:ea typeface="Inter Bold" pitchFamily="34" charset="-122"/>
+              </a:rPr>
               <a:t>Criando nosso ambiente </a:t>
             </a:r>
             <a:r>
-              <a:rPr lang="pt-BR" dirty="0" err="1"/>
+              <a:rPr lang="pt-BR" sz="3300" b="1" kern="0" spc="-100" dirty="0" err="1">
+                <a:solidFill>
+                  <a:srgbClr val="000000"/>
+                </a:solidFill>
+                <a:latin typeface="Inter Bold" pitchFamily="34" charset="0"/>
+                <a:ea typeface="Inter Bold" pitchFamily="34" charset="-122"/>
+              </a:rPr>
               <a:t>Dart</a:t>
             </a:r>
-            <a:endParaRPr lang="pt-BR" dirty="0"/>
+            <a:endParaRPr lang="pt-BR" sz="3300" b="1" kern="0" spc="-100" dirty="0">
+              <a:solidFill>
+                <a:srgbClr val="000000"/>
+              </a:solidFill>
+              <a:latin typeface="Inter Bold" pitchFamily="34" charset="0"/>
+              <a:ea typeface="Inter Bold" pitchFamily="34" charset="-122"/>
+            </a:endParaRPr>
           </a:p>
         </p:txBody>
       </p:sp>
@@ -8796,7 +7401,7 @@
 </p:sld>
 </file>
 
-<file path=ppt/slides/slide7.xml><?xml version="1.0" encoding="utf-8"?>
+<file path=ppt/slides/slide6.xml><?xml version="1.0" encoding="utf-8"?>
 <p:sld xmlns:a="http://schemas.openxmlformats.org/drawingml/2006/main" xmlns:r="http://schemas.openxmlformats.org/officeDocument/2006/relationships" xmlns:p="http://schemas.openxmlformats.org/presentationml/2006/main">
   <p:cSld>
     <p:spTree>
@@ -8835,7 +7440,13 @@
           <a:lstStyle/>
           <a:p>
             <a:r>
-              <a:rPr lang="pt-BR" dirty="0"/>
+              <a:rPr lang="pt-BR" sz="3300" b="1" kern="0" spc="-100" dirty="0">
+                <a:solidFill>
+                  <a:srgbClr val="000000"/>
+                </a:solidFill>
+                <a:latin typeface="Inter Bold" pitchFamily="34" charset="0"/>
+                <a:ea typeface="Inter Bold" pitchFamily="34" charset="-122"/>
+              </a:rPr>
               <a:t>Criando nossa primeira classe e objeto</a:t>
             </a:r>
           </a:p>
@@ -10135,7 +8746,7 @@
 </p:sld>
 </file>
 
-<file path=ppt/slides/slide8.xml><?xml version="1.0" encoding="utf-8"?>
+<file path=ppt/slides/slide7.xml><?xml version="1.0" encoding="utf-8"?>
 <p:sld xmlns:a="http://schemas.openxmlformats.org/drawingml/2006/main" xmlns:r="http://schemas.openxmlformats.org/officeDocument/2006/relationships" xmlns:p="http://schemas.openxmlformats.org/presentationml/2006/main">
   <p:cSld name="Slide 5">
     <p:spTree>
@@ -10202,8 +8813,8 @@
         </p:nvSpPr>
         <p:spPr>
           <a:xfrm>
-            <a:off x="655430" y="1860087"/>
-            <a:ext cx="5104325" cy="4803180"/>
+            <a:off x="655431" y="1860087"/>
+            <a:ext cx="4500770" cy="4803180"/>
           </a:xfrm>
           <a:prstGeom prst="rect">
             <a:avLst/>
@@ -10482,8 +9093,8 @@
         </p:nvGrpSpPr>
         <p:grpSpPr>
           <a:xfrm>
-            <a:off x="6309659" y="2049694"/>
-            <a:ext cx="5226911" cy="4423966"/>
+            <a:off x="5503333" y="2049694"/>
+            <a:ext cx="6033237" cy="4423966"/>
             <a:chOff x="6309659" y="1597620"/>
             <a:chExt cx="5226911" cy="4423966"/>
           </a:xfrm>
@@ -10533,271 +9144,596 @@
             </a:bodyPr>
             <a:lstStyle/>
             <a:p>
-              <a:pPr marL="0" indent="0" algn="l">
+              <a:pPr>
                 <a:lnSpc>
                   <a:spcPct val="133000"/>
                 </a:lnSpc>
-                <a:buNone/>
               </a:pPr>
               <a:r>
-                <a:rPr lang="en-US" sz="1300" kern="0" spc="-27" dirty="0">
-                  <a:solidFill>
-                    <a:srgbClr val="D73A49"/>
-                  </a:solidFill>
-                  <a:latin typeface="Consolas" pitchFamily="34" charset="0"/>
-                  <a:ea typeface="Consolas" pitchFamily="34" charset="-122"/>
-                  <a:cs typeface="Consolas" pitchFamily="34" charset="-120"/>
-                </a:rPr>
-                <a:t>class Aluno {</a:t>
-              </a:r>
-              <a:endParaRPr lang="en-US" sz="1300" dirty="0"/>
+                <a:rPr lang="en-US" sz="1200" kern="0" spc="-27" dirty="0">
+                  <a:solidFill>
+                    <a:srgbClr val="D73A49"/>
+                  </a:solidFill>
+                  <a:latin typeface="Consolas" pitchFamily="34" charset="0"/>
+                  <a:ea typeface="Consolas" pitchFamily="34" charset="-122"/>
+                  <a:cs typeface="Consolas" pitchFamily="34" charset="-120"/>
+                </a:rPr>
+                <a:t>void main() {</a:t>
+              </a:r>
             </a:p>
             <a:p>
-              <a:pPr marL="0" indent="0" algn="l">
+              <a:pPr>
                 <a:lnSpc>
                   <a:spcPct val="133000"/>
                 </a:lnSpc>
-                <a:buNone/>
               </a:pPr>
               <a:r>
-                <a:rPr lang="en-US" sz="1300" kern="0" spc="-27" dirty="0">
-                  <a:solidFill>
-                    <a:srgbClr val="D73A49"/>
-                  </a:solidFill>
-                  <a:latin typeface="Consolas" pitchFamily="34" charset="0"/>
-                  <a:ea typeface="Consolas" pitchFamily="34" charset="-122"/>
-                  <a:cs typeface="Consolas" pitchFamily="34" charset="-120"/>
-                </a:rPr>
-                <a:t>  String nome;</a:t>
-              </a:r>
-              <a:endParaRPr lang="en-US" sz="1300" dirty="0"/>
+                <a:rPr lang="en-US" sz="1200" kern="0" spc="-27" dirty="0">
+                  <a:solidFill>
+                    <a:srgbClr val="D73A49"/>
+                  </a:solidFill>
+                  <a:latin typeface="Consolas" pitchFamily="34" charset="0"/>
+                  <a:ea typeface="Consolas" pitchFamily="34" charset="-122"/>
+                  <a:cs typeface="Consolas" pitchFamily="34" charset="-120"/>
+                </a:rPr>
+                <a:t>  </a:t>
+              </a:r>
+              <a:r>
+                <a:rPr lang="en-US" sz="1200" kern="0" spc="-27" dirty="0" err="1">
+                  <a:solidFill>
+                    <a:srgbClr val="D73A49"/>
+                  </a:solidFill>
+                  <a:latin typeface="Consolas" pitchFamily="34" charset="0"/>
+                  <a:ea typeface="Consolas" pitchFamily="34" charset="-122"/>
+                  <a:cs typeface="Consolas" pitchFamily="34" charset="-120"/>
+                </a:rPr>
+                <a:t>Filme</a:t>
+              </a:r>
+              <a:r>
+                <a:rPr lang="en-US" sz="1200" kern="0" spc="-27" dirty="0">
+                  <a:solidFill>
+                    <a:srgbClr val="D73A49"/>
+                  </a:solidFill>
+                  <a:latin typeface="Consolas" pitchFamily="34" charset="0"/>
+                  <a:ea typeface="Consolas" pitchFamily="34" charset="-122"/>
+                  <a:cs typeface="Consolas" pitchFamily="34" charset="-120"/>
+                </a:rPr>
+                <a:t> </a:t>
+              </a:r>
+              <a:r>
+                <a:rPr lang="en-US" sz="1200" kern="0" spc="-27" dirty="0" err="1">
+                  <a:solidFill>
+                    <a:srgbClr val="D73A49"/>
+                  </a:solidFill>
+                  <a:latin typeface="Consolas" pitchFamily="34" charset="0"/>
+                  <a:ea typeface="Consolas" pitchFamily="34" charset="-122"/>
+                  <a:cs typeface="Consolas" pitchFamily="34" charset="-120"/>
+                </a:rPr>
+                <a:t>filme</a:t>
+              </a:r>
+              <a:r>
+                <a:rPr lang="en-US" sz="1200" kern="0" spc="-27" dirty="0">
+                  <a:solidFill>
+                    <a:srgbClr val="D73A49"/>
+                  </a:solidFill>
+                  <a:latin typeface="Consolas" pitchFamily="34" charset="0"/>
+                  <a:ea typeface="Consolas" pitchFamily="34" charset="-122"/>
+                  <a:cs typeface="Consolas" pitchFamily="34" charset="-120"/>
+                </a:rPr>
+                <a:t> = </a:t>
+              </a:r>
+              <a:r>
+                <a:rPr lang="en-US" sz="1200" kern="0" spc="-27" dirty="0" err="1">
+                  <a:solidFill>
+                    <a:srgbClr val="D73A49"/>
+                  </a:solidFill>
+                  <a:latin typeface="Consolas" pitchFamily="34" charset="0"/>
+                  <a:ea typeface="Consolas" pitchFamily="34" charset="-122"/>
+                  <a:cs typeface="Consolas" pitchFamily="34" charset="-120"/>
+                </a:rPr>
+                <a:t>Filme</a:t>
+              </a:r>
+              <a:r>
+                <a:rPr lang="en-US" sz="1200" kern="0" spc="-27" dirty="0">
+                  <a:solidFill>
+                    <a:srgbClr val="D73A49"/>
+                  </a:solidFill>
+                  <a:latin typeface="Consolas" pitchFamily="34" charset="0"/>
+                  <a:ea typeface="Consolas" pitchFamily="34" charset="-122"/>
+                  <a:cs typeface="Consolas" pitchFamily="34" charset="-120"/>
+                </a:rPr>
+                <a:t>("</a:t>
+              </a:r>
+              <a:r>
+                <a:rPr lang="en-US" sz="1200" kern="0" spc="-27" dirty="0" err="1">
+                  <a:solidFill>
+                    <a:srgbClr val="D73A49"/>
+                  </a:solidFill>
+                  <a:latin typeface="Consolas" pitchFamily="34" charset="0"/>
+                  <a:ea typeface="Consolas" pitchFamily="34" charset="-122"/>
+                  <a:cs typeface="Consolas" pitchFamily="34" charset="-120"/>
+                </a:rPr>
+                <a:t>Homem-Aranha</a:t>
+              </a:r>
+              <a:r>
+                <a:rPr lang="en-US" sz="1200" kern="0" spc="-27" dirty="0">
+                  <a:solidFill>
+                    <a:srgbClr val="D73A49"/>
+                  </a:solidFill>
+                  <a:latin typeface="Consolas" pitchFamily="34" charset="0"/>
+                  <a:ea typeface="Consolas" pitchFamily="34" charset="-122"/>
+                  <a:cs typeface="Consolas" pitchFamily="34" charset="-120"/>
+                </a:rPr>
+                <a:t>: Um novo </a:t>
+              </a:r>
+              <a:r>
+                <a:rPr lang="en-US" sz="1200" kern="0" spc="-27" dirty="0" err="1">
+                  <a:solidFill>
+                    <a:srgbClr val="D73A49"/>
+                  </a:solidFill>
+                  <a:latin typeface="Consolas" pitchFamily="34" charset="0"/>
+                  <a:ea typeface="Consolas" pitchFamily="34" charset="-122"/>
+                  <a:cs typeface="Consolas" pitchFamily="34" charset="-120"/>
+                </a:rPr>
+                <a:t>dia</a:t>
+              </a:r>
+              <a:r>
+                <a:rPr lang="en-US" sz="1200" kern="0" spc="-27" dirty="0">
+                  <a:solidFill>
+                    <a:srgbClr val="D73A49"/>
+                  </a:solidFill>
+                  <a:latin typeface="Consolas" pitchFamily="34" charset="0"/>
+                  <a:ea typeface="Consolas" pitchFamily="34" charset="-122"/>
+                  <a:cs typeface="Consolas" pitchFamily="34" charset="-120"/>
+                </a:rPr>
+                <a:t>", 12, 145, "</a:t>
+              </a:r>
+              <a:r>
+                <a:rPr lang="en-US" sz="1200" kern="0" spc="-27" dirty="0" err="1">
+                  <a:solidFill>
+                    <a:srgbClr val="D73A49"/>
+                  </a:solidFill>
+                  <a:latin typeface="Consolas" pitchFamily="34" charset="0"/>
+                  <a:ea typeface="Consolas" pitchFamily="34" charset="-122"/>
+                  <a:cs typeface="Consolas" pitchFamily="34" charset="-120"/>
+                </a:rPr>
+                <a:t>Ação</a:t>
+              </a:r>
+              <a:r>
+                <a:rPr lang="en-US" sz="1200" kern="0" spc="-27" dirty="0">
+                  <a:solidFill>
+                    <a:srgbClr val="D73A49"/>
+                  </a:solidFill>
+                  <a:latin typeface="Consolas" pitchFamily="34" charset="0"/>
+                  <a:ea typeface="Consolas" pitchFamily="34" charset="-122"/>
+                  <a:cs typeface="Consolas" pitchFamily="34" charset="-120"/>
+                </a:rPr>
+                <a:t>");</a:t>
+              </a:r>
             </a:p>
             <a:p>
-              <a:pPr marL="0" indent="0" algn="l">
+              <a:pPr>
                 <a:lnSpc>
                   <a:spcPct val="133000"/>
                 </a:lnSpc>
-                <a:buNone/>
               </a:pPr>
               <a:r>
-                <a:rPr lang="en-US" sz="1300" kern="0" spc="-27" dirty="0">
-                  <a:solidFill>
-                    <a:srgbClr val="D73A49"/>
-                  </a:solidFill>
-                  <a:latin typeface="Consolas" pitchFamily="34" charset="0"/>
-                  <a:ea typeface="Consolas" pitchFamily="34" charset="-122"/>
-                  <a:cs typeface="Consolas" pitchFamily="34" charset="-120"/>
-                </a:rPr>
-                <a:t>  int idade;</a:t>
-              </a:r>
-              <a:endParaRPr lang="en-US" sz="1300" dirty="0"/>
+                <a:rPr lang="en-US" sz="1200" kern="0" spc="-27" dirty="0">
+                  <a:solidFill>
+                    <a:srgbClr val="D73A49"/>
+                  </a:solidFill>
+                  <a:latin typeface="Consolas" pitchFamily="34" charset="0"/>
+                  <a:ea typeface="Consolas" pitchFamily="34" charset="-122"/>
+                  <a:cs typeface="Consolas" pitchFamily="34" charset="-120"/>
+                </a:rPr>
+                <a:t>}</a:t>
+              </a:r>
             </a:p>
             <a:p>
-              <a:pPr marL="0" indent="0" algn="l">
+              <a:pPr>
                 <a:lnSpc>
                   <a:spcPct val="133000"/>
                 </a:lnSpc>
-                <a:buNone/>
               </a:pPr>
-              <a:r>
-                <a:rPr lang="en-US" sz="1300" kern="0" spc="-27" dirty="0">
-                  <a:solidFill>
-                    <a:srgbClr val="D73A49"/>
-                  </a:solidFill>
-                  <a:latin typeface="Consolas" pitchFamily="34" charset="0"/>
-                  <a:ea typeface="Consolas" pitchFamily="34" charset="-122"/>
-                  <a:cs typeface="Consolas" pitchFamily="34" charset="-120"/>
-                </a:rPr>
-                <a:t>  double nota;</a:t>
-              </a:r>
-              <a:endParaRPr lang="en-US" sz="1300" dirty="0"/>
+              <a:endParaRPr lang="en-US" sz="1200" kern="0" spc="-27" dirty="0">
+                <a:solidFill>
+                  <a:srgbClr val="D73A49"/>
+                </a:solidFill>
+                <a:latin typeface="Consolas" pitchFamily="34" charset="0"/>
+                <a:ea typeface="Consolas" pitchFamily="34" charset="-122"/>
+                <a:cs typeface="Consolas" pitchFamily="34" charset="-120"/>
+              </a:endParaRPr>
             </a:p>
             <a:p>
-              <a:pPr marL="0" indent="0" algn="l">
+              <a:pPr>
                 <a:lnSpc>
                   <a:spcPct val="133000"/>
                 </a:lnSpc>
-                <a:buNone/>
               </a:pPr>
-              <a:endParaRPr lang="en-US" sz="1300" dirty="0"/>
+              <a:endParaRPr lang="en-US" sz="1200" kern="0" spc="-27" dirty="0">
+                <a:solidFill>
+                  <a:srgbClr val="D73A49"/>
+                </a:solidFill>
+                <a:latin typeface="Consolas" pitchFamily="34" charset="0"/>
+                <a:ea typeface="Consolas" pitchFamily="34" charset="-122"/>
+                <a:cs typeface="Consolas" pitchFamily="34" charset="-120"/>
+              </a:endParaRPr>
             </a:p>
             <a:p>
-              <a:pPr marL="0" indent="0" algn="l">
+              <a:pPr>
                 <a:lnSpc>
                   <a:spcPct val="133000"/>
                 </a:lnSpc>
-                <a:buNone/>
               </a:pPr>
               <a:r>
-                <a:rPr lang="en-US" sz="1300" kern="0" spc="-27" dirty="0">
-                  <a:solidFill>
-                    <a:srgbClr val="D73A49"/>
-                  </a:solidFill>
-                  <a:latin typeface="Consolas" pitchFamily="34" charset="0"/>
-                  <a:ea typeface="Consolas" pitchFamily="34" charset="-122"/>
-                  <a:cs typeface="Consolas" pitchFamily="34" charset="-120"/>
-                </a:rPr>
-                <a:t>  // Construtor posicional</a:t>
-              </a:r>
-              <a:endParaRPr lang="en-US" sz="1300" dirty="0"/>
+                <a:rPr lang="en-US" sz="1200" kern="0" spc="-27" dirty="0">
+                  <a:solidFill>
+                    <a:srgbClr val="D73A49"/>
+                  </a:solidFill>
+                  <a:latin typeface="Consolas" pitchFamily="34" charset="0"/>
+                  <a:ea typeface="Consolas" pitchFamily="34" charset="-122"/>
+                  <a:cs typeface="Consolas" pitchFamily="34" charset="-120"/>
+                </a:rPr>
+                <a:t>class </a:t>
+              </a:r>
+              <a:r>
+                <a:rPr lang="en-US" sz="1200" kern="0" spc="-27" dirty="0" err="1">
+                  <a:solidFill>
+                    <a:srgbClr val="D73A49"/>
+                  </a:solidFill>
+                  <a:latin typeface="Consolas" pitchFamily="34" charset="0"/>
+                  <a:ea typeface="Consolas" pitchFamily="34" charset="-122"/>
+                  <a:cs typeface="Consolas" pitchFamily="34" charset="-120"/>
+                </a:rPr>
+                <a:t>Filme</a:t>
+              </a:r>
+              <a:r>
+                <a:rPr lang="en-US" sz="1200" kern="0" spc="-27" dirty="0">
+                  <a:solidFill>
+                    <a:srgbClr val="D73A49"/>
+                  </a:solidFill>
+                  <a:latin typeface="Consolas" pitchFamily="34" charset="0"/>
+                  <a:ea typeface="Consolas" pitchFamily="34" charset="-122"/>
+                  <a:cs typeface="Consolas" pitchFamily="34" charset="-120"/>
+                </a:rPr>
+                <a:t> {</a:t>
+              </a:r>
             </a:p>
             <a:p>
-              <a:pPr marL="0" indent="0" algn="l">
+              <a:pPr>
                 <a:lnSpc>
                   <a:spcPct val="133000"/>
                 </a:lnSpc>
-                <a:buNone/>
               </a:pPr>
               <a:r>
-                <a:rPr lang="en-US" sz="1300" kern="0" spc="-27" dirty="0">
-                  <a:solidFill>
-                    <a:srgbClr val="D73A49"/>
-                  </a:solidFill>
-                  <a:latin typeface="Consolas" pitchFamily="34" charset="0"/>
-                  <a:ea typeface="Consolas" pitchFamily="34" charset="-122"/>
-                  <a:cs typeface="Consolas" pitchFamily="34" charset="-120"/>
-                </a:rPr>
-                <a:t>  Aluno(this.nome, this.idade, this.nota);</a:t>
-              </a:r>
-              <a:endParaRPr lang="en-US" sz="1300" dirty="0"/>
+                <a:rPr lang="en-US" sz="1200" kern="0" spc="-27" dirty="0">
+                  <a:solidFill>
+                    <a:srgbClr val="D73A49"/>
+                  </a:solidFill>
+                  <a:latin typeface="Consolas" pitchFamily="34" charset="0"/>
+                  <a:ea typeface="Consolas" pitchFamily="34" charset="-122"/>
+                  <a:cs typeface="Consolas" pitchFamily="34" charset="-120"/>
+                </a:rPr>
+                <a:t>  String </a:t>
+              </a:r>
+              <a:r>
+                <a:rPr lang="en-US" sz="1200" kern="0" spc="-27" dirty="0" err="1">
+                  <a:solidFill>
+                    <a:srgbClr val="D73A49"/>
+                  </a:solidFill>
+                  <a:latin typeface="Consolas" pitchFamily="34" charset="0"/>
+                  <a:ea typeface="Consolas" pitchFamily="34" charset="-122"/>
+                  <a:cs typeface="Consolas" pitchFamily="34" charset="-120"/>
+                </a:rPr>
+                <a:t>titulo</a:t>
+              </a:r>
+              <a:r>
+                <a:rPr lang="en-US" sz="1200" kern="0" spc="-27" dirty="0">
+                  <a:solidFill>
+                    <a:srgbClr val="D73A49"/>
+                  </a:solidFill>
+                  <a:latin typeface="Consolas" pitchFamily="34" charset="0"/>
+                  <a:ea typeface="Consolas" pitchFamily="34" charset="-122"/>
+                  <a:cs typeface="Consolas" pitchFamily="34" charset="-120"/>
+                </a:rPr>
+                <a:t>;</a:t>
+              </a:r>
             </a:p>
             <a:p>
-              <a:pPr marL="0" indent="0" algn="l">
+              <a:pPr>
                 <a:lnSpc>
                   <a:spcPct val="133000"/>
                 </a:lnSpc>
-                <a:buNone/>
               </a:pPr>
-              <a:endParaRPr lang="en-US" sz="1300" dirty="0"/>
+              <a:r>
+                <a:rPr lang="en-US" sz="1200" kern="0" spc="-27" dirty="0">
+                  <a:solidFill>
+                    <a:srgbClr val="D73A49"/>
+                  </a:solidFill>
+                  <a:latin typeface="Consolas" pitchFamily="34" charset="0"/>
+                  <a:ea typeface="Consolas" pitchFamily="34" charset="-122"/>
+                  <a:cs typeface="Consolas" pitchFamily="34" charset="-120"/>
+                </a:rPr>
+                <a:t>  String </a:t>
+              </a:r>
+              <a:r>
+                <a:rPr lang="en-US" sz="1200" kern="0" spc="-27" dirty="0" err="1">
+                  <a:solidFill>
+                    <a:srgbClr val="D73A49"/>
+                  </a:solidFill>
+                  <a:latin typeface="Consolas" pitchFamily="34" charset="0"/>
+                  <a:ea typeface="Consolas" pitchFamily="34" charset="-122"/>
+                  <a:cs typeface="Consolas" pitchFamily="34" charset="-120"/>
+                </a:rPr>
+                <a:t>genero</a:t>
+              </a:r>
+              <a:r>
+                <a:rPr lang="en-US" sz="1200" kern="0" spc="-27" dirty="0">
+                  <a:solidFill>
+                    <a:srgbClr val="D73A49"/>
+                  </a:solidFill>
+                  <a:latin typeface="Consolas" pitchFamily="34" charset="0"/>
+                  <a:ea typeface="Consolas" pitchFamily="34" charset="-122"/>
+                  <a:cs typeface="Consolas" pitchFamily="34" charset="-120"/>
+                </a:rPr>
+                <a:t>;</a:t>
+              </a:r>
             </a:p>
             <a:p>
-              <a:pPr marL="0" indent="0" algn="l">
+              <a:pPr>
                 <a:lnSpc>
                   <a:spcPct val="133000"/>
                 </a:lnSpc>
-                <a:buNone/>
               </a:pPr>
               <a:r>
-                <a:rPr lang="en-US" sz="1300" kern="0" spc="-27" dirty="0">
-                  <a:solidFill>
-                    <a:srgbClr val="D73A49"/>
-                  </a:solidFill>
-                  <a:latin typeface="Consolas" pitchFamily="34" charset="0"/>
-                  <a:ea typeface="Consolas" pitchFamily="34" charset="-122"/>
-                  <a:cs typeface="Consolas" pitchFamily="34" charset="-120"/>
-                </a:rPr>
-                <a:t>  void estudar() {</a:t>
-              </a:r>
-              <a:endParaRPr lang="en-US" sz="1300" dirty="0"/>
+                <a:rPr lang="en-US" sz="1200" kern="0" spc="-27" dirty="0">
+                  <a:solidFill>
+                    <a:srgbClr val="D73A49"/>
+                  </a:solidFill>
+                  <a:latin typeface="Consolas" pitchFamily="34" charset="0"/>
+                  <a:ea typeface="Consolas" pitchFamily="34" charset="-122"/>
+                  <a:cs typeface="Consolas" pitchFamily="34" charset="-120"/>
+                </a:rPr>
+                <a:t>  int </a:t>
+              </a:r>
+              <a:r>
+                <a:rPr lang="en-US" sz="1200" kern="0" spc="-27" dirty="0" err="1">
+                  <a:solidFill>
+                    <a:srgbClr val="D73A49"/>
+                  </a:solidFill>
+                  <a:latin typeface="Consolas" pitchFamily="34" charset="0"/>
+                  <a:ea typeface="Consolas" pitchFamily="34" charset="-122"/>
+                  <a:cs typeface="Consolas" pitchFamily="34" charset="-120"/>
+                </a:rPr>
+                <a:t>classificacao</a:t>
+              </a:r>
+              <a:r>
+                <a:rPr lang="en-US" sz="1200" kern="0" spc="-27" dirty="0">
+                  <a:solidFill>
+                    <a:srgbClr val="D73A49"/>
+                  </a:solidFill>
+                  <a:latin typeface="Consolas" pitchFamily="34" charset="0"/>
+                  <a:ea typeface="Consolas" pitchFamily="34" charset="-122"/>
+                  <a:cs typeface="Consolas" pitchFamily="34" charset="-120"/>
+                </a:rPr>
+                <a:t>;</a:t>
+              </a:r>
             </a:p>
             <a:p>
-              <a:pPr marL="0" indent="0" algn="l">
+              <a:pPr>
                 <a:lnSpc>
                   <a:spcPct val="133000"/>
                 </a:lnSpc>
-                <a:buNone/>
               </a:pPr>
               <a:r>
-                <a:rPr lang="en-US" sz="1300" kern="0" spc="-27" dirty="0">
-                  <a:solidFill>
-                    <a:srgbClr val="D73A49"/>
-                  </a:solidFill>
-                  <a:latin typeface="Consolas" pitchFamily="34" charset="0"/>
-                  <a:ea typeface="Consolas" pitchFamily="34" charset="-122"/>
-                  <a:cs typeface="Consolas" pitchFamily="34" charset="-120"/>
-                </a:rPr>
-                <a:t>    print('$nome está estudando.');</a:t>
-              </a:r>
-              <a:endParaRPr lang="en-US" sz="1300" dirty="0"/>
+                <a:rPr lang="en-US" sz="1200" kern="0" spc="-27" dirty="0">
+                  <a:solidFill>
+                    <a:srgbClr val="D73A49"/>
+                  </a:solidFill>
+                  <a:latin typeface="Consolas" pitchFamily="34" charset="0"/>
+                  <a:ea typeface="Consolas" pitchFamily="34" charset="-122"/>
+                  <a:cs typeface="Consolas" pitchFamily="34" charset="-120"/>
+                </a:rPr>
+                <a:t>  int </a:t>
+              </a:r>
+              <a:r>
+                <a:rPr lang="en-US" sz="1200" kern="0" spc="-27" dirty="0" err="1">
+                  <a:solidFill>
+                    <a:srgbClr val="D73A49"/>
+                  </a:solidFill>
+                  <a:latin typeface="Consolas" pitchFamily="34" charset="0"/>
+                  <a:ea typeface="Consolas" pitchFamily="34" charset="-122"/>
+                  <a:cs typeface="Consolas" pitchFamily="34" charset="-120"/>
+                </a:rPr>
+                <a:t>duracao</a:t>
+              </a:r>
+              <a:r>
+                <a:rPr lang="en-US" sz="1200" kern="0" spc="-27" dirty="0">
+                  <a:solidFill>
+                    <a:srgbClr val="D73A49"/>
+                  </a:solidFill>
+                  <a:latin typeface="Consolas" pitchFamily="34" charset="0"/>
+                  <a:ea typeface="Consolas" pitchFamily="34" charset="-122"/>
+                  <a:cs typeface="Consolas" pitchFamily="34" charset="-120"/>
+                </a:rPr>
+                <a:t>;</a:t>
+              </a:r>
             </a:p>
             <a:p>
-              <a:pPr marL="0" indent="0" algn="l">
+              <a:pPr>
                 <a:lnSpc>
                   <a:spcPct val="133000"/>
                 </a:lnSpc>
-                <a:buNone/>
               </a:pPr>
-              <a:r>
-                <a:rPr lang="en-US" sz="1300" kern="0" spc="-27" dirty="0">
-                  <a:solidFill>
-                    <a:srgbClr val="D73A49"/>
-                  </a:solidFill>
-                  <a:latin typeface="Consolas" pitchFamily="34" charset="0"/>
-                  <a:ea typeface="Consolas" pitchFamily="34" charset="-122"/>
-                  <a:cs typeface="Consolas" pitchFamily="34" charset="-120"/>
-                </a:rPr>
-                <a:t>  }</a:t>
-              </a:r>
-              <a:endParaRPr lang="en-US" sz="1300" dirty="0"/>
+              <a:endParaRPr lang="en-US" sz="1200" kern="0" spc="-27" dirty="0">
+                <a:solidFill>
+                  <a:srgbClr val="D73A49"/>
+                </a:solidFill>
+                <a:latin typeface="Consolas" pitchFamily="34" charset="0"/>
+                <a:ea typeface="Consolas" pitchFamily="34" charset="-122"/>
+                <a:cs typeface="Consolas" pitchFamily="34" charset="-120"/>
+              </a:endParaRPr>
             </a:p>
             <a:p>
-              <a:pPr marL="0" indent="0" algn="l">
+              <a:pPr>
                 <a:lnSpc>
                   <a:spcPct val="133000"/>
                 </a:lnSpc>
-                <a:buNone/>
               </a:pPr>
               <a:r>
-                <a:rPr lang="en-US" sz="1300" kern="0" spc="-27" dirty="0">
-                  <a:solidFill>
-                    <a:srgbClr val="D73A49"/>
-                  </a:solidFill>
-                  <a:latin typeface="Consolas" pitchFamily="34" charset="0"/>
-                  <a:ea typeface="Consolas" pitchFamily="34" charset="-122"/>
-                  <a:cs typeface="Consolas" pitchFamily="34" charset="-120"/>
-                </a:rPr>
-                <a:t>}</a:t>
-              </a:r>
-              <a:endParaRPr lang="en-US" sz="1300" dirty="0"/>
+                <a:rPr lang="en-US" sz="1200" kern="0" spc="-27" dirty="0">
+                  <a:solidFill>
+                    <a:srgbClr val="D73A49"/>
+                  </a:solidFill>
+                  <a:latin typeface="Consolas" pitchFamily="34" charset="0"/>
+                  <a:ea typeface="Consolas" pitchFamily="34" charset="-122"/>
+                  <a:cs typeface="Consolas" pitchFamily="34" charset="-120"/>
+                </a:rPr>
+                <a:t>  </a:t>
+              </a:r>
+              <a:r>
+                <a:rPr lang="en-US" sz="1200" kern="0" spc="-27" dirty="0" err="1">
+                  <a:solidFill>
+                    <a:srgbClr val="D73A49"/>
+                  </a:solidFill>
+                  <a:latin typeface="Consolas" pitchFamily="34" charset="0"/>
+                  <a:ea typeface="Consolas" pitchFamily="34" charset="-122"/>
+                  <a:cs typeface="Consolas" pitchFamily="34" charset="-120"/>
+                </a:rPr>
+                <a:t>Filme</a:t>
+              </a:r>
+              <a:r>
+                <a:rPr lang="en-US" sz="1200" kern="0" spc="-27" dirty="0">
+                  <a:solidFill>
+                    <a:srgbClr val="D73A49"/>
+                  </a:solidFill>
+                  <a:latin typeface="Consolas" pitchFamily="34" charset="0"/>
+                  <a:ea typeface="Consolas" pitchFamily="34" charset="-122"/>
+                  <a:cs typeface="Consolas" pitchFamily="34" charset="-120"/>
+                </a:rPr>
+                <a:t>(</a:t>
+              </a:r>
+              <a:r>
+                <a:rPr lang="en-US" sz="1200" kern="0" spc="-27" dirty="0" err="1">
+                  <a:solidFill>
+                    <a:srgbClr val="D73A49"/>
+                  </a:solidFill>
+                  <a:latin typeface="Consolas" pitchFamily="34" charset="0"/>
+                  <a:ea typeface="Consolas" pitchFamily="34" charset="-122"/>
+                  <a:cs typeface="Consolas" pitchFamily="34" charset="-120"/>
+                </a:rPr>
+                <a:t>this.titulo</a:t>
+              </a:r>
+              <a:r>
+                <a:rPr lang="en-US" sz="1200" kern="0" spc="-27" dirty="0">
+                  <a:solidFill>
+                    <a:srgbClr val="D73A49"/>
+                  </a:solidFill>
+                  <a:latin typeface="Consolas" pitchFamily="34" charset="0"/>
+                  <a:ea typeface="Consolas" pitchFamily="34" charset="-122"/>
+                  <a:cs typeface="Consolas" pitchFamily="34" charset="-120"/>
+                </a:rPr>
+                <a:t>, </a:t>
+              </a:r>
+              <a:r>
+                <a:rPr lang="en-US" sz="1200" kern="0" spc="-27" dirty="0" err="1">
+                  <a:solidFill>
+                    <a:srgbClr val="D73A49"/>
+                  </a:solidFill>
+                  <a:latin typeface="Consolas" pitchFamily="34" charset="0"/>
+                  <a:ea typeface="Consolas" pitchFamily="34" charset="-122"/>
+                  <a:cs typeface="Consolas" pitchFamily="34" charset="-120"/>
+                </a:rPr>
+                <a:t>this.classificacao</a:t>
+              </a:r>
+              <a:r>
+                <a:rPr lang="en-US" sz="1200" kern="0" spc="-27" dirty="0">
+                  <a:solidFill>
+                    <a:srgbClr val="D73A49"/>
+                  </a:solidFill>
+                  <a:latin typeface="Consolas" pitchFamily="34" charset="0"/>
+                  <a:ea typeface="Consolas" pitchFamily="34" charset="-122"/>
+                  <a:cs typeface="Consolas" pitchFamily="34" charset="-120"/>
+                </a:rPr>
+                <a:t>, </a:t>
+              </a:r>
+              <a:r>
+                <a:rPr lang="en-US" sz="1200" kern="0" spc="-27" dirty="0" err="1">
+                  <a:solidFill>
+                    <a:srgbClr val="D73A49"/>
+                  </a:solidFill>
+                  <a:latin typeface="Consolas" pitchFamily="34" charset="0"/>
+                  <a:ea typeface="Consolas" pitchFamily="34" charset="-122"/>
+                  <a:cs typeface="Consolas" pitchFamily="34" charset="-120"/>
+                </a:rPr>
+                <a:t>this.duracao</a:t>
+              </a:r>
+              <a:r>
+                <a:rPr lang="en-US" sz="1200" kern="0" spc="-27" dirty="0">
+                  <a:solidFill>
+                    <a:srgbClr val="D73A49"/>
+                  </a:solidFill>
+                  <a:latin typeface="Consolas" pitchFamily="34" charset="0"/>
+                  <a:ea typeface="Consolas" pitchFamily="34" charset="-122"/>
+                  <a:cs typeface="Consolas" pitchFamily="34" charset="-120"/>
+                </a:rPr>
+                <a:t>, </a:t>
+              </a:r>
+              <a:r>
+                <a:rPr lang="en-US" sz="1200" kern="0" spc="-27" dirty="0" err="1">
+                  <a:solidFill>
+                    <a:srgbClr val="D73A49"/>
+                  </a:solidFill>
+                  <a:latin typeface="Consolas" pitchFamily="34" charset="0"/>
+                  <a:ea typeface="Consolas" pitchFamily="34" charset="-122"/>
+                  <a:cs typeface="Consolas" pitchFamily="34" charset="-120"/>
+                </a:rPr>
+                <a:t>this.genero</a:t>
+              </a:r>
+              <a:r>
+                <a:rPr lang="en-US" sz="1200" kern="0" spc="-27" dirty="0">
+                  <a:solidFill>
+                    <a:srgbClr val="D73A49"/>
+                  </a:solidFill>
+                  <a:latin typeface="Consolas" pitchFamily="34" charset="0"/>
+                  <a:ea typeface="Consolas" pitchFamily="34" charset="-122"/>
+                  <a:cs typeface="Consolas" pitchFamily="34" charset="-120"/>
+                </a:rPr>
+                <a:t>);</a:t>
+              </a:r>
             </a:p>
             <a:p>
-              <a:pPr marL="0" indent="0" algn="l">
+              <a:pPr>
                 <a:lnSpc>
                   <a:spcPct val="133000"/>
                 </a:lnSpc>
-                <a:buNone/>
               </a:pPr>
-              <a:endParaRPr lang="en-US" sz="1300" dirty="0"/>
+              <a:endParaRPr lang="en-US" sz="1200" kern="0" spc="-27" dirty="0">
+                <a:solidFill>
+                  <a:srgbClr val="D73A49"/>
+                </a:solidFill>
+                <a:latin typeface="Consolas" pitchFamily="34" charset="0"/>
+                <a:ea typeface="Consolas" pitchFamily="34" charset="-122"/>
+                <a:cs typeface="Consolas" pitchFamily="34" charset="-120"/>
+              </a:endParaRPr>
             </a:p>
             <a:p>
-              <a:pPr marL="0" indent="0" algn="l">
+              <a:pPr>
                 <a:lnSpc>
                   <a:spcPct val="133000"/>
                 </a:lnSpc>
-                <a:buNone/>
               </a:pPr>
               <a:r>
-                <a:rPr lang="en-US" sz="1300" kern="0" spc="-27" dirty="0">
-                  <a:solidFill>
-                    <a:srgbClr val="D73A49"/>
-                  </a:solidFill>
-                  <a:latin typeface="Consolas" pitchFamily="34" charset="0"/>
-                  <a:ea typeface="Consolas" pitchFamily="34" charset="-122"/>
-                  <a:cs typeface="Consolas" pitchFamily="34" charset="-120"/>
-                </a:rPr>
-                <a:t>// Criação direta e limpa</a:t>
-              </a:r>
-              <a:endParaRPr lang="en-US" sz="1300" dirty="0"/>
-            </a:p>
-            <a:p>
-              <a:pPr marL="0" indent="0" algn="l">
-                <a:lnSpc>
-                  <a:spcPct val="133000"/>
-                </a:lnSpc>
-                <a:buNone/>
-              </a:pPr>
-              <a:r>
-                <a:rPr lang="en-US" sz="1300" kern="0" spc="-27" dirty="0">
-                  <a:solidFill>
-                    <a:srgbClr val="D73A49"/>
-                  </a:solidFill>
-                  <a:latin typeface="Consolas" pitchFamily="34" charset="0"/>
-                  <a:ea typeface="Consolas" pitchFamily="34" charset="-122"/>
-                  <a:cs typeface="Consolas" pitchFamily="34" charset="-120"/>
-                </a:rPr>
-                <a:t>var aluno = Aluno('Carlos', 20, 8.5);</a:t>
-              </a:r>
-              <a:endParaRPr lang="en-US" sz="1300" dirty="0"/>
+                <a:rPr lang="en-US" sz="1200" kern="0" spc="-27" dirty="0">
+                  <a:solidFill>
+                    <a:srgbClr val="D73A49"/>
+                  </a:solidFill>
+                  <a:latin typeface="Consolas" pitchFamily="34" charset="0"/>
+                  <a:ea typeface="Consolas" pitchFamily="34" charset="-122"/>
+                  <a:cs typeface="Consolas" pitchFamily="34" charset="-120"/>
+                </a:rPr>
+                <a:t>}</a:t>
+              </a:r>
             </a:p>
           </p:txBody>
         </p:sp>
@@ -10810,7 +9746,7 @@
 </p:sld>
 </file>
 
-<file path=ppt/slides/slide9.xml><?xml version="1.0" encoding="utf-8"?>
+<file path=ppt/slides/slide8.xml><?xml version="1.0" encoding="utf-8"?>
 <p:sld xmlns:a="http://schemas.openxmlformats.org/drawingml/2006/main" xmlns:r="http://schemas.openxmlformats.org/officeDocument/2006/relationships" xmlns:p="http://schemas.openxmlformats.org/presentationml/2006/main">
   <p:cSld name="Slide 6">
     <p:spTree>
@@ -10835,7 +9771,7 @@
         </p:nvSpPr>
         <p:spPr>
           <a:xfrm>
-            <a:off x="661475" y="640060"/>
+            <a:off x="803156" y="861566"/>
             <a:ext cx="10868745" cy="443012"/>
           </a:xfrm>
           <a:prstGeom prst="rect">
@@ -10877,7 +9813,7 @@
         </p:nvSpPr>
         <p:spPr>
           <a:xfrm>
-            <a:off x="661475" y="1348780"/>
+            <a:off x="803156" y="1570286"/>
             <a:ext cx="5261439" cy="221456"/>
           </a:xfrm>
           <a:prstGeom prst="rect">
@@ -10911,70 +9847,90 @@
           </a:p>
         </p:txBody>
       </p:sp>
-      <p:sp>
-        <p:nvSpPr>
-          <p:cNvPr id="4" name="Shape 2"/>
-          <p:cNvSpPr/>
+      <p:grpSp>
+        <p:nvGrpSpPr>
+          <p:cNvPr id="18" name="Agrupar 17">
+            <a:extLst>
+              <a:ext uri="{FF2B5EF4-FFF2-40B4-BE49-F238E27FC236}">
+                <a16:creationId xmlns:a16="http://schemas.microsoft.com/office/drawing/2014/main" id="{CB8EE238-AEC3-4A85-8B6C-5EEAE3F4B620}"/>
+              </a:ext>
+            </a:extLst>
+          </p:cNvPr>
+          <p:cNvGrpSpPr/>
           <p:nvPr/>
-        </p:nvSpPr>
-        <p:spPr>
+        </p:nvGrpSpPr>
+        <p:grpSpPr>
           <a:xfrm>
-            <a:off x="661475" y="1689795"/>
-            <a:ext cx="5261439" cy="510183"/>
+            <a:off x="803156" y="1911301"/>
+            <a:ext cx="5700967" cy="510183"/>
+            <a:chOff x="661475" y="1689795"/>
+            <a:chExt cx="5700967" cy="510183"/>
           </a:xfrm>
-          <a:prstGeom prst="roundRect">
-            <a:avLst>
-              <a:gd name="adj" fmla="val 11670"/>
-            </a:avLst>
-          </a:prstGeom>
-          <a:solidFill>
-            <a:srgbClr val="F2F2F2"/>
-          </a:solidFill>
-          <a:ln/>
-        </p:spPr>
-      </p:sp>
-      <p:sp>
-        <p:nvSpPr>
-          <p:cNvPr id="5" name="Text 3"/>
-          <p:cNvSpPr/>
-          <p:nvPr/>
-        </p:nvSpPr>
-        <p:spPr>
-          <a:xfrm>
-            <a:off x="831532" y="1831479"/>
-            <a:ext cx="5530910" cy="226814"/>
-          </a:xfrm>
-          <a:prstGeom prst="rect">
-            <a:avLst/>
-          </a:prstGeom>
-          <a:noFill/>
-          <a:ln/>
-        </p:spPr>
-        <p:txBody>
-          <a:bodyPr wrap="none" lIns="0" tIns="0" rIns="0" bIns="0" rtlCol="0" anchor="t"/>
-          <a:lstStyle/>
-          <a:p>
-            <a:pPr marL="0" indent="0" algn="l">
-              <a:lnSpc>
-                <a:spcPct val="133000"/>
-              </a:lnSpc>
-              <a:buNone/>
-            </a:pPr>
-            <a:r>
-              <a:rPr lang="en-US" sz="1100" kern="0" spc="-22" dirty="0">
-                <a:solidFill>
-                  <a:srgbClr val="E36209"/>
-                </a:solidFill>
-                <a:latin typeface="Consolas" pitchFamily="34" charset="0"/>
-                <a:ea typeface="Consolas" pitchFamily="34" charset="-122"/>
-                <a:cs typeface="Consolas" pitchFamily="34" charset="-120"/>
-              </a:rPr>
-              <a:t>Aluno('Carlos', 20, 8.5);</a:t>
-            </a:r>
-            <a:endParaRPr lang="en-US" sz="1100" dirty="0"/>
-          </a:p>
-        </p:txBody>
-      </p:sp>
+        </p:grpSpPr>
+        <p:sp>
+          <p:nvSpPr>
+            <p:cNvPr id="4" name="Shape 2"/>
+            <p:cNvSpPr/>
+            <p:nvPr/>
+          </p:nvSpPr>
+          <p:spPr>
+            <a:xfrm>
+              <a:off x="661475" y="1689795"/>
+              <a:ext cx="5261439" cy="510183"/>
+            </a:xfrm>
+            <a:prstGeom prst="roundRect">
+              <a:avLst>
+                <a:gd name="adj" fmla="val 11670"/>
+              </a:avLst>
+            </a:prstGeom>
+            <a:solidFill>
+              <a:srgbClr val="F2F2F2"/>
+            </a:solidFill>
+            <a:ln/>
+          </p:spPr>
+        </p:sp>
+        <p:sp>
+          <p:nvSpPr>
+            <p:cNvPr id="5" name="Text 3"/>
+            <p:cNvSpPr/>
+            <p:nvPr/>
+          </p:nvSpPr>
+          <p:spPr>
+            <a:xfrm>
+              <a:off x="831532" y="1831479"/>
+              <a:ext cx="5530910" cy="226814"/>
+            </a:xfrm>
+            <a:prstGeom prst="rect">
+              <a:avLst/>
+            </a:prstGeom>
+            <a:noFill/>
+            <a:ln/>
+          </p:spPr>
+          <p:txBody>
+            <a:bodyPr wrap="none" lIns="0" tIns="0" rIns="0" bIns="0" rtlCol="0" anchor="t"/>
+            <a:lstStyle/>
+            <a:p>
+              <a:pPr>
+                <a:lnSpc>
+                  <a:spcPct val="133000"/>
+                </a:lnSpc>
+              </a:pPr>
+              <a:r>
+                <a:rPr lang="pt-BR" sz="1100" kern="0" spc="-22" dirty="0">
+                  <a:solidFill>
+                    <a:srgbClr val="E36209"/>
+                  </a:solidFill>
+                  <a:latin typeface="Consolas" pitchFamily="34" charset="0"/>
+                  <a:ea typeface="Consolas" pitchFamily="34" charset="-122"/>
+                  <a:cs typeface="Consolas" pitchFamily="34" charset="-120"/>
+                </a:rPr>
+                <a:t>Filme("Homem-Aranha: Um novo dia", 12, 145, "Ação")</a:t>
+              </a:r>
+              <a:endParaRPr lang="en-US" sz="1100" dirty="0"/>
+            </a:p>
+          </p:txBody>
+        </p:sp>
+      </p:grpSp>
       <p:sp>
         <p:nvSpPr>
           <p:cNvPr id="6" name="Text 4"/>
@@ -10983,7 +9939,7 @@
         </p:nvSpPr>
         <p:spPr>
           <a:xfrm>
-            <a:off x="661475" y="2319536"/>
+            <a:off x="803156" y="2541042"/>
             <a:ext cx="5871023" cy="198438"/>
           </a:xfrm>
           <a:prstGeom prst="rect">
@@ -11047,7 +10003,7 @@
         </p:nvSpPr>
         <p:spPr>
           <a:xfrm>
-            <a:off x="661475" y="2672953"/>
+            <a:off x="803156" y="2894459"/>
             <a:ext cx="5261439" cy="19050"/>
           </a:xfrm>
           <a:prstGeom prst="roundRect">
@@ -11071,7 +10027,7 @@
         </p:nvSpPr>
         <p:spPr>
           <a:xfrm>
-            <a:off x="661475" y="2846983"/>
+            <a:off x="803156" y="3068489"/>
             <a:ext cx="5261439" cy="221456"/>
           </a:xfrm>
           <a:prstGeom prst="rect">
@@ -11116,152 +10072,347 @@
           </a:p>
         </p:txBody>
       </p:sp>
-      <p:sp>
-        <p:nvSpPr>
-          <p:cNvPr id="9" name="Shape 7"/>
-          <p:cNvSpPr/>
+      <p:grpSp>
+        <p:nvGrpSpPr>
+          <p:cNvPr id="17" name="Agrupar 16">
+            <a:extLst>
+              <a:ext uri="{FF2B5EF4-FFF2-40B4-BE49-F238E27FC236}">
+                <a16:creationId xmlns:a16="http://schemas.microsoft.com/office/drawing/2014/main" id="{10F9DD25-C948-4070-9F9A-90E6C9B1FBCF}"/>
+              </a:ext>
+            </a:extLst>
+          </p:cNvPr>
+          <p:cNvGrpSpPr/>
           <p:nvPr/>
-        </p:nvSpPr>
-        <p:spPr>
+        </p:nvGrpSpPr>
+        <p:grpSpPr>
           <a:xfrm>
-            <a:off x="661475" y="3187998"/>
-            <a:ext cx="5261439" cy="1417439"/>
+            <a:off x="803156" y="3409504"/>
+            <a:ext cx="5261439" cy="1711026"/>
+            <a:chOff x="661475" y="3187998"/>
+            <a:chExt cx="5261439" cy="1417439"/>
           </a:xfrm>
-          <a:prstGeom prst="roundRect">
-            <a:avLst>
-              <a:gd name="adj" fmla="val 4201"/>
-            </a:avLst>
-          </a:prstGeom>
-          <a:solidFill>
-            <a:srgbClr val="F2F2F2"/>
-          </a:solidFill>
-          <a:ln/>
-        </p:spPr>
-      </p:sp>
-      <p:sp>
-        <p:nvSpPr>
-          <p:cNvPr id="10" name="Text 8"/>
-          <p:cNvSpPr/>
-          <p:nvPr/>
-        </p:nvSpPr>
-        <p:spPr>
-          <a:xfrm>
-            <a:off x="831532" y="3329682"/>
-            <a:ext cx="4921325" cy="1134070"/>
-          </a:xfrm>
-          <a:prstGeom prst="rect">
-            <a:avLst/>
-          </a:prstGeom>
-          <a:noFill/>
-          <a:ln/>
-        </p:spPr>
-        <p:txBody>
-          <a:bodyPr wrap="square" lIns="0" tIns="0" rIns="0" bIns="0" rtlCol="0" anchor="t">
-            <a:normAutofit/>
-          </a:bodyPr>
-          <a:lstStyle/>
-          <a:p>
-            <a:pPr marL="0" indent="0" algn="l">
-              <a:lnSpc>
-                <a:spcPct val="133000"/>
-              </a:lnSpc>
-              <a:buNone/>
-            </a:pPr>
-            <a:r>
-              <a:rPr lang="en-US" sz="1100" kern="0" spc="-22" dirty="0">
-                <a:solidFill>
-                  <a:srgbClr val="22863A"/>
-                </a:solidFill>
-                <a:latin typeface="Consolas" pitchFamily="34" charset="0"/>
-                <a:ea typeface="Consolas" pitchFamily="34" charset="-122"/>
-                <a:cs typeface="Consolas" pitchFamily="34" charset="-120"/>
-              </a:rPr>
-              <a:t>Aluno(</a:t>
-            </a:r>
-            <a:endParaRPr lang="en-US" sz="1100" dirty="0"/>
-          </a:p>
-          <a:p>
-            <a:pPr marL="0" indent="0" algn="l">
-              <a:lnSpc>
-                <a:spcPct val="133000"/>
-              </a:lnSpc>
-              <a:buNone/>
-            </a:pPr>
-            <a:r>
-              <a:rPr lang="en-US" sz="1100" kern="0" spc="-22" dirty="0">
-                <a:solidFill>
-                  <a:srgbClr val="22863A"/>
-                </a:solidFill>
-                <a:latin typeface="Consolas" pitchFamily="34" charset="0"/>
-                <a:ea typeface="Consolas" pitchFamily="34" charset="-122"/>
-                <a:cs typeface="Consolas" pitchFamily="34" charset="-120"/>
-              </a:rPr>
-              <a:t>  nome: 'Carlos',</a:t>
-            </a:r>
-            <a:endParaRPr lang="en-US" sz="1100" dirty="0"/>
-          </a:p>
-          <a:p>
-            <a:pPr marL="0" indent="0" algn="l">
-              <a:lnSpc>
-                <a:spcPct val="133000"/>
-              </a:lnSpc>
-              <a:buNone/>
-            </a:pPr>
-            <a:r>
-              <a:rPr lang="en-US" sz="1100" kern="0" spc="-22" dirty="0">
-                <a:solidFill>
-                  <a:srgbClr val="22863A"/>
-                </a:solidFill>
-                <a:latin typeface="Consolas" pitchFamily="34" charset="0"/>
-                <a:ea typeface="Consolas" pitchFamily="34" charset="-122"/>
-                <a:cs typeface="Consolas" pitchFamily="34" charset="-120"/>
-              </a:rPr>
-              <a:t>  idade: 20,</a:t>
-            </a:r>
-            <a:endParaRPr lang="en-US" sz="1100" dirty="0"/>
-          </a:p>
-          <a:p>
-            <a:pPr marL="0" indent="0" algn="l">
-              <a:lnSpc>
-                <a:spcPct val="133000"/>
-              </a:lnSpc>
-              <a:buNone/>
-            </a:pPr>
-            <a:r>
-              <a:rPr lang="en-US" sz="1100" kern="0" spc="-22" dirty="0">
-                <a:solidFill>
-                  <a:srgbClr val="22863A"/>
-                </a:solidFill>
-                <a:latin typeface="Consolas" pitchFamily="34" charset="0"/>
-                <a:ea typeface="Consolas" pitchFamily="34" charset="-122"/>
-                <a:cs typeface="Consolas" pitchFamily="34" charset="-120"/>
-              </a:rPr>
-              <a:t>  nota: 8.5,</a:t>
-            </a:r>
-            <a:endParaRPr lang="en-US" sz="1100" dirty="0"/>
-          </a:p>
-          <a:p>
-            <a:pPr marL="0" indent="0" algn="l">
-              <a:lnSpc>
-                <a:spcPct val="133000"/>
-              </a:lnSpc>
-              <a:buNone/>
-            </a:pPr>
-            <a:r>
-              <a:rPr lang="en-US" sz="1100" kern="0" spc="-22" dirty="0">
-                <a:solidFill>
-                  <a:srgbClr val="22863A"/>
-                </a:solidFill>
-                <a:latin typeface="Consolas" pitchFamily="34" charset="0"/>
-                <a:ea typeface="Consolas" pitchFamily="34" charset="-122"/>
-                <a:cs typeface="Consolas" pitchFamily="34" charset="-120"/>
-              </a:rPr>
-              <a:t>);</a:t>
-            </a:r>
-            <a:endParaRPr lang="en-US" sz="1100" dirty="0"/>
-          </a:p>
-        </p:txBody>
-      </p:sp>
+        </p:grpSpPr>
+        <p:sp>
+          <p:nvSpPr>
+            <p:cNvPr id="9" name="Shape 7"/>
+            <p:cNvSpPr/>
+            <p:nvPr/>
+          </p:nvSpPr>
+          <p:spPr>
+            <a:xfrm>
+              <a:off x="661475" y="3187998"/>
+              <a:ext cx="5261439" cy="1417439"/>
+            </a:xfrm>
+            <a:prstGeom prst="roundRect">
+              <a:avLst>
+                <a:gd name="adj" fmla="val 4201"/>
+              </a:avLst>
+            </a:prstGeom>
+            <a:solidFill>
+              <a:srgbClr val="F2F2F2"/>
+            </a:solidFill>
+            <a:ln/>
+          </p:spPr>
+        </p:sp>
+        <p:sp>
+          <p:nvSpPr>
+            <p:cNvPr id="10" name="Text 8"/>
+            <p:cNvSpPr/>
+            <p:nvPr/>
+          </p:nvSpPr>
+          <p:spPr>
+            <a:xfrm>
+              <a:off x="831532" y="3329682"/>
+              <a:ext cx="4921325" cy="1134070"/>
+            </a:xfrm>
+            <a:prstGeom prst="rect">
+              <a:avLst/>
+            </a:prstGeom>
+            <a:noFill/>
+            <a:ln/>
+          </p:spPr>
+          <p:txBody>
+            <a:bodyPr wrap="square" lIns="0" tIns="0" rIns="0" bIns="0" rtlCol="0" anchor="t">
+              <a:normAutofit/>
+            </a:bodyPr>
+            <a:lstStyle/>
+            <a:p>
+              <a:pPr marL="0" indent="0" algn="l">
+                <a:lnSpc>
+                  <a:spcPct val="133000"/>
+                </a:lnSpc>
+                <a:buNone/>
+              </a:pPr>
+              <a:r>
+                <a:rPr lang="en-US" sz="1100" kern="0" spc="-22" dirty="0" err="1">
+                  <a:solidFill>
+                    <a:srgbClr val="22863A"/>
+                  </a:solidFill>
+                  <a:latin typeface="Consolas" pitchFamily="34" charset="0"/>
+                  <a:ea typeface="Consolas" pitchFamily="34" charset="-122"/>
+                  <a:cs typeface="Consolas" pitchFamily="34" charset="-120"/>
+                </a:rPr>
+                <a:t>Filme</a:t>
+              </a:r>
+              <a:r>
+                <a:rPr lang="en-US" sz="1100" kern="0" spc="-22" dirty="0">
+                  <a:solidFill>
+                    <a:srgbClr val="22863A"/>
+                  </a:solidFill>
+                  <a:latin typeface="Consolas" pitchFamily="34" charset="0"/>
+                  <a:ea typeface="Consolas" pitchFamily="34" charset="-122"/>
+                  <a:cs typeface="Consolas" pitchFamily="34" charset="-120"/>
+                </a:rPr>
+                <a:t>(</a:t>
+              </a:r>
+              <a:endParaRPr lang="en-US" sz="1100" dirty="0"/>
+            </a:p>
+            <a:p>
+              <a:pPr>
+                <a:lnSpc>
+                  <a:spcPct val="133000"/>
+                </a:lnSpc>
+              </a:pPr>
+              <a:r>
+                <a:rPr lang="en-US" sz="1100" kern="0" spc="-22" dirty="0">
+                  <a:solidFill>
+                    <a:srgbClr val="22863A"/>
+                  </a:solidFill>
+                  <a:latin typeface="Consolas" pitchFamily="34" charset="0"/>
+                  <a:ea typeface="Consolas" pitchFamily="34" charset="-122"/>
+                  <a:cs typeface="Consolas" pitchFamily="34" charset="-120"/>
+                </a:rPr>
+                <a:t>  </a:t>
+              </a:r>
+              <a:r>
+                <a:rPr lang="en-US" sz="1100" kern="0" spc="-22" dirty="0" err="1">
+                  <a:solidFill>
+                    <a:srgbClr val="22863A"/>
+                  </a:solidFill>
+                  <a:latin typeface="Consolas" pitchFamily="34" charset="0"/>
+                  <a:ea typeface="Consolas" pitchFamily="34" charset="-122"/>
+                  <a:cs typeface="Consolas" pitchFamily="34" charset="-120"/>
+                </a:rPr>
+                <a:t>titulo</a:t>
+              </a:r>
+              <a:r>
+                <a:rPr lang="en-US" sz="1100" kern="0" spc="-22" dirty="0">
+                  <a:solidFill>
+                    <a:srgbClr val="22863A"/>
+                  </a:solidFill>
+                  <a:latin typeface="Consolas" pitchFamily="34" charset="0"/>
+                  <a:ea typeface="Consolas" pitchFamily="34" charset="-122"/>
+                  <a:cs typeface="Consolas" pitchFamily="34" charset="-120"/>
+                </a:rPr>
+                <a:t>: "</a:t>
+              </a:r>
+              <a:r>
+                <a:rPr lang="en-US" sz="1100" kern="0" spc="-22" dirty="0" err="1">
+                  <a:solidFill>
+                    <a:srgbClr val="22863A"/>
+                  </a:solidFill>
+                  <a:latin typeface="Consolas" pitchFamily="34" charset="0"/>
+                  <a:ea typeface="Consolas" pitchFamily="34" charset="-122"/>
+                  <a:cs typeface="Consolas" pitchFamily="34" charset="-120"/>
+                </a:rPr>
+                <a:t>Homem-Aranha</a:t>
+              </a:r>
+              <a:r>
+                <a:rPr lang="en-US" sz="1100" kern="0" spc="-22" dirty="0">
+                  <a:solidFill>
+                    <a:srgbClr val="22863A"/>
+                  </a:solidFill>
+                  <a:latin typeface="Consolas" pitchFamily="34" charset="0"/>
+                  <a:ea typeface="Consolas" pitchFamily="34" charset="-122"/>
+                  <a:cs typeface="Consolas" pitchFamily="34" charset="-120"/>
+                </a:rPr>
+                <a:t>: Um novo </a:t>
+              </a:r>
+              <a:r>
+                <a:rPr lang="en-US" sz="1100" kern="0" spc="-22" dirty="0" err="1">
+                  <a:solidFill>
+                    <a:srgbClr val="22863A"/>
+                  </a:solidFill>
+                  <a:latin typeface="Consolas" pitchFamily="34" charset="0"/>
+                  <a:ea typeface="Consolas" pitchFamily="34" charset="-122"/>
+                  <a:cs typeface="Consolas" pitchFamily="34" charset="-120"/>
+                </a:rPr>
+                <a:t>dia</a:t>
+              </a:r>
+              <a:r>
+                <a:rPr lang="en-US" sz="1100" kern="0" spc="-22" dirty="0">
+                  <a:solidFill>
+                    <a:srgbClr val="22863A"/>
+                  </a:solidFill>
+                  <a:latin typeface="Consolas" pitchFamily="34" charset="0"/>
+                  <a:ea typeface="Consolas" pitchFamily="34" charset="-122"/>
+                  <a:cs typeface="Consolas" pitchFamily="34" charset="-120"/>
+                </a:rPr>
+                <a:t>",</a:t>
+              </a:r>
+              <a:endParaRPr lang="en-US" sz="1100" dirty="0"/>
+            </a:p>
+            <a:p>
+              <a:pPr>
+                <a:lnSpc>
+                  <a:spcPct val="133000"/>
+                </a:lnSpc>
+              </a:pPr>
+              <a:r>
+                <a:rPr lang="en-US" sz="1100" kern="0" spc="-22" dirty="0">
+                  <a:solidFill>
+                    <a:srgbClr val="22863A"/>
+                  </a:solidFill>
+                  <a:latin typeface="Consolas" pitchFamily="34" charset="0"/>
+                  <a:ea typeface="Consolas" pitchFamily="34" charset="-122"/>
+                  <a:cs typeface="Consolas" pitchFamily="34" charset="-120"/>
+                </a:rPr>
+                <a:t>  </a:t>
+              </a:r>
+              <a:r>
+                <a:rPr lang="en-US" sz="1100" kern="0" spc="-22" dirty="0" err="1">
+                  <a:solidFill>
+                    <a:srgbClr val="22863A"/>
+                  </a:solidFill>
+                  <a:latin typeface="Consolas" pitchFamily="34" charset="0"/>
+                  <a:ea typeface="Consolas" pitchFamily="34" charset="-122"/>
+                  <a:cs typeface="Consolas" pitchFamily="34" charset="-120"/>
+                </a:rPr>
+                <a:t>genero</a:t>
+              </a:r>
+              <a:r>
+                <a:rPr lang="en-US" sz="1100" kern="0" spc="-22" dirty="0">
+                  <a:solidFill>
+                    <a:srgbClr val="22863A"/>
+                  </a:solidFill>
+                  <a:latin typeface="Consolas" pitchFamily="34" charset="0"/>
+                  <a:ea typeface="Consolas" pitchFamily="34" charset="-122"/>
+                  <a:cs typeface="Consolas" pitchFamily="34" charset="-120"/>
+                </a:rPr>
+                <a:t>: “</a:t>
+              </a:r>
+              <a:r>
+                <a:rPr lang="en-US" sz="1100" kern="0" spc="-22" dirty="0" err="1">
+                  <a:solidFill>
+                    <a:srgbClr val="22863A"/>
+                  </a:solidFill>
+                  <a:latin typeface="Consolas" pitchFamily="34" charset="0"/>
+                  <a:ea typeface="Consolas" pitchFamily="34" charset="-122"/>
+                  <a:cs typeface="Consolas" pitchFamily="34" charset="-120"/>
+                </a:rPr>
+                <a:t>Ação</a:t>
+              </a:r>
+              <a:r>
+                <a:rPr lang="en-US" sz="1100" kern="0" spc="-22" dirty="0">
+                  <a:solidFill>
+                    <a:srgbClr val="22863A"/>
+                  </a:solidFill>
+                  <a:latin typeface="Consolas" pitchFamily="34" charset="0"/>
+                  <a:ea typeface="Consolas" pitchFamily="34" charset="-122"/>
+                  <a:cs typeface="Consolas" pitchFamily="34" charset="-120"/>
+                </a:rPr>
+                <a:t>”,</a:t>
+              </a:r>
+              <a:endParaRPr lang="en-US" sz="1100" dirty="0"/>
+            </a:p>
+            <a:p>
+              <a:pPr>
+                <a:lnSpc>
+                  <a:spcPct val="133000"/>
+                </a:lnSpc>
+              </a:pPr>
+              <a:r>
+                <a:rPr lang="en-US" sz="1100" kern="0" spc="-22" dirty="0">
+                  <a:solidFill>
+                    <a:srgbClr val="22863A"/>
+                  </a:solidFill>
+                  <a:latin typeface="Consolas" pitchFamily="34" charset="0"/>
+                  <a:ea typeface="Consolas" pitchFamily="34" charset="-122"/>
+                  <a:cs typeface="Consolas" pitchFamily="34" charset="-120"/>
+                </a:rPr>
+                <a:t>  </a:t>
+              </a:r>
+              <a:r>
+                <a:rPr lang="en-US" sz="1100" kern="0" spc="-22" dirty="0" err="1">
+                  <a:solidFill>
+                    <a:srgbClr val="22863A"/>
+                  </a:solidFill>
+                  <a:latin typeface="Consolas" pitchFamily="34" charset="0"/>
+                  <a:ea typeface="Consolas" pitchFamily="34" charset="-122"/>
+                  <a:cs typeface="Consolas" pitchFamily="34" charset="-120"/>
+                </a:rPr>
+                <a:t>classificacao</a:t>
+              </a:r>
+              <a:r>
+                <a:rPr lang="en-US" sz="1100" kern="0" spc="-22" dirty="0">
+                  <a:solidFill>
+                    <a:srgbClr val="22863A"/>
+                  </a:solidFill>
+                  <a:latin typeface="Consolas" pitchFamily="34" charset="0"/>
+                  <a:ea typeface="Consolas" pitchFamily="34" charset="-122"/>
+                  <a:cs typeface="Consolas" pitchFamily="34" charset="-120"/>
+                </a:rPr>
+                <a:t>: 12,</a:t>
+              </a:r>
+            </a:p>
+            <a:p>
+              <a:pPr>
+                <a:lnSpc>
+                  <a:spcPct val="133000"/>
+                </a:lnSpc>
+              </a:pPr>
+              <a:r>
+                <a:rPr lang="en-US" sz="1100" kern="0" spc="-22" dirty="0">
+                  <a:solidFill>
+                    <a:srgbClr val="22863A"/>
+                  </a:solidFill>
+                  <a:latin typeface="Consolas" pitchFamily="34" charset="0"/>
+                </a:rPr>
+                <a:t>  </a:t>
+              </a:r>
+              <a:r>
+                <a:rPr lang="en-US" sz="1100" kern="0" spc="-22" dirty="0" err="1">
+                  <a:solidFill>
+                    <a:srgbClr val="22863A"/>
+                  </a:solidFill>
+                  <a:latin typeface="Consolas" pitchFamily="34" charset="0"/>
+                </a:rPr>
+                <a:t>duracao</a:t>
+              </a:r>
+              <a:r>
+                <a:rPr lang="en-US" sz="1100" kern="0" spc="-22" dirty="0">
+                  <a:solidFill>
+                    <a:srgbClr val="22863A"/>
+                  </a:solidFill>
+                  <a:latin typeface="Consolas" pitchFamily="34" charset="0"/>
+                </a:rPr>
+                <a:t>: 145</a:t>
+              </a:r>
+              <a:endParaRPr lang="en-US" sz="1100" dirty="0"/>
+            </a:p>
+            <a:p>
+              <a:pPr marL="0" indent="0" algn="l">
+                <a:lnSpc>
+                  <a:spcPct val="133000"/>
+                </a:lnSpc>
+                <a:buNone/>
+              </a:pPr>
+              <a:r>
+                <a:rPr lang="en-US" sz="1100" kern="0" spc="-22" dirty="0">
+                  <a:solidFill>
+                    <a:srgbClr val="22863A"/>
+                  </a:solidFill>
+                  <a:latin typeface="Consolas" pitchFamily="34" charset="0"/>
+                  <a:ea typeface="Consolas" pitchFamily="34" charset="-122"/>
+                  <a:cs typeface="Consolas" pitchFamily="34" charset="-120"/>
+                </a:rPr>
+                <a:t>);</a:t>
+              </a:r>
+              <a:endParaRPr lang="en-US" sz="1100" dirty="0"/>
+            </a:p>
+          </p:txBody>
+        </p:sp>
+      </p:grpSp>
       <p:sp>
         <p:nvSpPr>
           <p:cNvPr id="11" name="Text 9"/>
@@ -11270,7 +10421,7 @@
         </p:nvSpPr>
         <p:spPr>
           <a:xfrm>
-            <a:off x="661475" y="4724995"/>
+            <a:off x="803156" y="5275793"/>
             <a:ext cx="5871023" cy="198438"/>
           </a:xfrm>
           <a:prstGeom prst="rect">
@@ -11329,392 +10480,885 @@
           </a:p>
         </p:txBody>
       </p:sp>
-      <p:sp>
-        <p:nvSpPr>
-          <p:cNvPr id="12" name="Shape 10"/>
-          <p:cNvSpPr/>
+      <p:grpSp>
+        <p:nvGrpSpPr>
+          <p:cNvPr id="19" name="Agrupar 18">
+            <a:extLst>
+              <a:ext uri="{FF2B5EF4-FFF2-40B4-BE49-F238E27FC236}">
+                <a16:creationId xmlns:a16="http://schemas.microsoft.com/office/drawing/2014/main" id="{7A024263-5553-46C7-8201-23B5F4A36B11}"/>
+              </a:ext>
+            </a:extLst>
+          </p:cNvPr>
+          <p:cNvGrpSpPr/>
           <p:nvPr/>
-        </p:nvSpPr>
-        <p:spPr>
+        </p:nvGrpSpPr>
+        <p:grpSpPr>
           <a:xfrm>
-            <a:off x="6275131" y="1362075"/>
+            <a:off x="6416812" y="1583581"/>
             <a:ext cx="5261439" cy="4139208"/>
+            <a:chOff x="6275131" y="1362075"/>
+            <a:chExt cx="5261439" cy="4139208"/>
           </a:xfrm>
-          <a:prstGeom prst="roundRect">
-            <a:avLst>
-              <a:gd name="adj" fmla="val 1438"/>
-            </a:avLst>
-          </a:prstGeom>
-          <a:solidFill>
-            <a:srgbClr val="F2F2F2"/>
-          </a:solidFill>
-          <a:ln/>
-        </p:spPr>
-      </p:sp>
-      <p:sp>
-        <p:nvSpPr>
-          <p:cNvPr id="13" name="Text 11"/>
-          <p:cNvSpPr/>
-          <p:nvPr/>
-        </p:nvSpPr>
-        <p:spPr>
-          <a:xfrm>
-            <a:off x="6445188" y="1503759"/>
-            <a:ext cx="4921325" cy="3855839"/>
-          </a:xfrm>
-          <a:prstGeom prst="rect">
-            <a:avLst/>
-          </a:prstGeom>
-          <a:noFill/>
-          <a:ln/>
-        </p:spPr>
-        <p:txBody>
-          <a:bodyPr wrap="square" lIns="0" tIns="0" rIns="0" bIns="0" rtlCol="0" anchor="t">
-            <a:normAutofit/>
-          </a:bodyPr>
-          <a:lstStyle/>
-          <a:p>
-            <a:pPr marL="0" indent="0" algn="l">
-              <a:lnSpc>
-                <a:spcPct val="133000"/>
-              </a:lnSpc>
-              <a:buNone/>
-            </a:pPr>
-            <a:r>
-              <a:rPr lang="en-US" sz="1100" kern="0" spc="-22" dirty="0">
+        </p:grpSpPr>
+        <p:sp>
+          <p:nvSpPr>
+            <p:cNvPr id="12" name="Shape 10"/>
+            <p:cNvSpPr/>
+            <p:nvPr/>
+          </p:nvSpPr>
+          <p:spPr>
+            <a:xfrm>
+              <a:off x="6275131" y="1362075"/>
+              <a:ext cx="5261439" cy="4139208"/>
+            </a:xfrm>
+            <a:prstGeom prst="roundRect">
+              <a:avLst>
+                <a:gd name="adj" fmla="val 1438"/>
+              </a:avLst>
+            </a:prstGeom>
+            <a:solidFill>
+              <a:srgbClr val="F2F2F2"/>
+            </a:solidFill>
+            <a:ln/>
+          </p:spPr>
+        </p:sp>
+        <p:sp>
+          <p:nvSpPr>
+            <p:cNvPr id="13" name="Text 11"/>
+            <p:cNvSpPr/>
+            <p:nvPr/>
+          </p:nvSpPr>
+          <p:spPr>
+            <a:xfrm>
+              <a:off x="6445188" y="1503759"/>
+              <a:ext cx="4921325" cy="3855839"/>
+            </a:xfrm>
+            <a:prstGeom prst="rect">
+              <a:avLst/>
+            </a:prstGeom>
+            <a:noFill/>
+            <a:ln/>
+          </p:spPr>
+          <p:txBody>
+            <a:bodyPr wrap="square" lIns="0" tIns="0" rIns="0" bIns="0" rtlCol="0" anchor="t">
+              <a:normAutofit fontScale="92500" lnSpcReduction="20000"/>
+            </a:bodyPr>
+            <a:lstStyle/>
+            <a:p>
+              <a:pPr>
+                <a:lnSpc>
+                  <a:spcPct val="133000"/>
+                </a:lnSpc>
+              </a:pPr>
+              <a:r>
+                <a:rPr lang="en-US" sz="1100" kern="0" spc="-22" dirty="0">
+                  <a:solidFill>
+                    <a:srgbClr val="D73A49"/>
+                  </a:solidFill>
+                  <a:latin typeface="Consolas" pitchFamily="34" charset="0"/>
+                  <a:ea typeface="Consolas" pitchFamily="34" charset="-122"/>
+                  <a:cs typeface="Consolas" pitchFamily="34" charset="-120"/>
+                </a:rPr>
+                <a:t>void main() {</a:t>
+              </a:r>
+            </a:p>
+            <a:p>
+              <a:pPr>
+                <a:lnSpc>
+                  <a:spcPct val="133000"/>
+                </a:lnSpc>
+              </a:pPr>
+              <a:r>
+                <a:rPr lang="en-US" sz="1100" kern="0" spc="-22" dirty="0">
+                  <a:solidFill>
+                    <a:srgbClr val="D73A49"/>
+                  </a:solidFill>
+                  <a:latin typeface="Consolas" pitchFamily="34" charset="0"/>
+                  <a:ea typeface="Consolas" pitchFamily="34" charset="-122"/>
+                  <a:cs typeface="Consolas" pitchFamily="34" charset="-120"/>
+                </a:rPr>
+                <a:t>  </a:t>
+              </a:r>
+              <a:r>
+                <a:rPr lang="en-US" sz="1100" kern="0" spc="-22" dirty="0" err="1">
+                  <a:solidFill>
+                    <a:srgbClr val="D73A49"/>
+                  </a:solidFill>
+                  <a:latin typeface="Consolas" pitchFamily="34" charset="0"/>
+                  <a:ea typeface="Consolas" pitchFamily="34" charset="-122"/>
+                  <a:cs typeface="Consolas" pitchFamily="34" charset="-120"/>
+                </a:rPr>
+                <a:t>Filme</a:t>
+              </a:r>
+              <a:r>
+                <a:rPr lang="en-US" sz="1100" kern="0" spc="-22" dirty="0">
+                  <a:solidFill>
+                    <a:srgbClr val="D73A49"/>
+                  </a:solidFill>
+                  <a:latin typeface="Consolas" pitchFamily="34" charset="0"/>
+                  <a:ea typeface="Consolas" pitchFamily="34" charset="-122"/>
+                  <a:cs typeface="Consolas" pitchFamily="34" charset="-120"/>
+                </a:rPr>
+                <a:t> </a:t>
+              </a:r>
+              <a:r>
+                <a:rPr lang="en-US" sz="1100" kern="0" spc="-22" dirty="0" err="1">
+                  <a:solidFill>
+                    <a:srgbClr val="D73A49"/>
+                  </a:solidFill>
+                  <a:latin typeface="Consolas" pitchFamily="34" charset="0"/>
+                  <a:ea typeface="Consolas" pitchFamily="34" charset="-122"/>
+                  <a:cs typeface="Consolas" pitchFamily="34" charset="-120"/>
+                </a:rPr>
+                <a:t>filme</a:t>
+              </a:r>
+              <a:r>
+                <a:rPr lang="en-US" sz="1100" kern="0" spc="-22" dirty="0">
+                  <a:solidFill>
+                    <a:srgbClr val="D73A49"/>
+                  </a:solidFill>
+                  <a:latin typeface="Consolas" pitchFamily="34" charset="0"/>
+                  <a:ea typeface="Consolas" pitchFamily="34" charset="-122"/>
+                  <a:cs typeface="Consolas" pitchFamily="34" charset="-120"/>
+                </a:rPr>
+                <a:t> = </a:t>
+              </a:r>
+              <a:r>
+                <a:rPr lang="en-US" sz="1100" kern="0" spc="-22" dirty="0" err="1">
+                  <a:solidFill>
+                    <a:srgbClr val="D73A49"/>
+                  </a:solidFill>
+                  <a:latin typeface="Consolas" pitchFamily="34" charset="0"/>
+                  <a:ea typeface="Consolas" pitchFamily="34" charset="-122"/>
+                  <a:cs typeface="Consolas" pitchFamily="34" charset="-120"/>
+                </a:rPr>
+                <a:t>Filme</a:t>
+              </a:r>
+              <a:r>
+                <a:rPr lang="en-US" sz="1100" kern="0" spc="-22" dirty="0">
+                  <a:solidFill>
+                    <a:srgbClr val="D73A49"/>
+                  </a:solidFill>
+                  <a:latin typeface="Consolas" pitchFamily="34" charset="0"/>
+                  <a:ea typeface="Consolas" pitchFamily="34" charset="-122"/>
+                  <a:cs typeface="Consolas" pitchFamily="34" charset="-120"/>
+                </a:rPr>
+                <a:t>(</a:t>
+              </a:r>
+            </a:p>
+            <a:p>
+              <a:pPr>
+                <a:lnSpc>
+                  <a:spcPct val="133000"/>
+                </a:lnSpc>
+              </a:pPr>
+              <a:r>
+                <a:rPr lang="en-US" sz="1100" kern="0" spc="-22" dirty="0">
+                  <a:solidFill>
+                    <a:srgbClr val="D73A49"/>
+                  </a:solidFill>
+                  <a:latin typeface="Consolas" pitchFamily="34" charset="0"/>
+                  <a:ea typeface="Consolas" pitchFamily="34" charset="-122"/>
+                  <a:cs typeface="Consolas" pitchFamily="34" charset="-120"/>
+                </a:rPr>
+                <a:t>    </a:t>
+              </a:r>
+              <a:r>
+                <a:rPr lang="en-US" sz="1100" kern="0" spc="-22" dirty="0" err="1">
+                  <a:solidFill>
+                    <a:srgbClr val="D73A49"/>
+                  </a:solidFill>
+                  <a:latin typeface="Consolas" pitchFamily="34" charset="0"/>
+                  <a:ea typeface="Consolas" pitchFamily="34" charset="-122"/>
+                  <a:cs typeface="Consolas" pitchFamily="34" charset="-120"/>
+                </a:rPr>
+                <a:t>titulo</a:t>
+              </a:r>
+              <a:r>
+                <a:rPr lang="en-US" sz="1100" kern="0" spc="-22" dirty="0">
+                  <a:solidFill>
+                    <a:srgbClr val="D73A49"/>
+                  </a:solidFill>
+                  <a:latin typeface="Consolas" pitchFamily="34" charset="0"/>
+                  <a:ea typeface="Consolas" pitchFamily="34" charset="-122"/>
+                  <a:cs typeface="Consolas" pitchFamily="34" charset="-120"/>
+                </a:rPr>
+                <a:t>: "</a:t>
+              </a:r>
+              <a:r>
+                <a:rPr lang="en-US" sz="1100" kern="0" spc="-22" dirty="0" err="1">
+                  <a:solidFill>
+                    <a:srgbClr val="D73A49"/>
+                  </a:solidFill>
+                  <a:latin typeface="Consolas" pitchFamily="34" charset="0"/>
+                  <a:ea typeface="Consolas" pitchFamily="34" charset="-122"/>
+                  <a:cs typeface="Consolas" pitchFamily="34" charset="-120"/>
+                </a:rPr>
+                <a:t>Homem-Aranha</a:t>
+              </a:r>
+              <a:r>
+                <a:rPr lang="en-US" sz="1100" kern="0" spc="-22" dirty="0">
+                  <a:solidFill>
+                    <a:srgbClr val="D73A49"/>
+                  </a:solidFill>
+                  <a:latin typeface="Consolas" pitchFamily="34" charset="0"/>
+                  <a:ea typeface="Consolas" pitchFamily="34" charset="-122"/>
+                  <a:cs typeface="Consolas" pitchFamily="34" charset="-120"/>
+                </a:rPr>
+                <a:t>: Um novo </a:t>
+              </a:r>
+              <a:r>
+                <a:rPr lang="en-US" sz="1100" kern="0" spc="-22" dirty="0" err="1">
+                  <a:solidFill>
+                    <a:srgbClr val="D73A49"/>
+                  </a:solidFill>
+                  <a:latin typeface="Consolas" pitchFamily="34" charset="0"/>
+                  <a:ea typeface="Consolas" pitchFamily="34" charset="-122"/>
+                  <a:cs typeface="Consolas" pitchFamily="34" charset="-120"/>
+                </a:rPr>
+                <a:t>dia</a:t>
+              </a:r>
+              <a:r>
+                <a:rPr lang="en-US" sz="1100" kern="0" spc="-22" dirty="0">
+                  <a:solidFill>
+                    <a:srgbClr val="D73A49"/>
+                  </a:solidFill>
+                  <a:latin typeface="Consolas" pitchFamily="34" charset="0"/>
+                  <a:ea typeface="Consolas" pitchFamily="34" charset="-122"/>
+                  <a:cs typeface="Consolas" pitchFamily="34" charset="-120"/>
+                </a:rPr>
+                <a:t>",</a:t>
+              </a:r>
+            </a:p>
+            <a:p>
+              <a:pPr>
+                <a:lnSpc>
+                  <a:spcPct val="133000"/>
+                </a:lnSpc>
+              </a:pPr>
+              <a:r>
+                <a:rPr lang="en-US" sz="1100" kern="0" spc="-22" dirty="0">
+                  <a:solidFill>
+                    <a:srgbClr val="D73A49"/>
+                  </a:solidFill>
+                  <a:latin typeface="Consolas" pitchFamily="34" charset="0"/>
+                  <a:ea typeface="Consolas" pitchFamily="34" charset="-122"/>
+                  <a:cs typeface="Consolas" pitchFamily="34" charset="-120"/>
+                </a:rPr>
+                <a:t>    </a:t>
+              </a:r>
+              <a:r>
+                <a:rPr lang="en-US" sz="1100" kern="0" spc="-22" dirty="0" err="1">
+                  <a:solidFill>
+                    <a:srgbClr val="D73A49"/>
+                  </a:solidFill>
+                  <a:latin typeface="Consolas" pitchFamily="34" charset="0"/>
+                  <a:ea typeface="Consolas" pitchFamily="34" charset="-122"/>
+                  <a:cs typeface="Consolas" pitchFamily="34" charset="-120"/>
+                </a:rPr>
+                <a:t>genero</a:t>
+              </a:r>
+              <a:r>
+                <a:rPr lang="en-US" sz="1100" kern="0" spc="-22" dirty="0">
+                  <a:solidFill>
+                    <a:srgbClr val="D73A49"/>
+                  </a:solidFill>
+                  <a:latin typeface="Consolas" pitchFamily="34" charset="0"/>
+                  <a:ea typeface="Consolas" pitchFamily="34" charset="-122"/>
+                  <a:cs typeface="Consolas" pitchFamily="34" charset="-120"/>
+                </a:rPr>
+                <a:t>: "</a:t>
+              </a:r>
+              <a:r>
+                <a:rPr lang="en-US" sz="1100" kern="0" spc="-22" dirty="0" err="1">
+                  <a:solidFill>
+                    <a:srgbClr val="D73A49"/>
+                  </a:solidFill>
+                  <a:latin typeface="Consolas" pitchFamily="34" charset="0"/>
+                  <a:ea typeface="Consolas" pitchFamily="34" charset="-122"/>
+                  <a:cs typeface="Consolas" pitchFamily="34" charset="-120"/>
+                </a:rPr>
+                <a:t>Ação</a:t>
+              </a:r>
+              <a:r>
+                <a:rPr lang="en-US" sz="1100" kern="0" spc="-22" dirty="0">
+                  <a:solidFill>
+                    <a:srgbClr val="D73A49"/>
+                  </a:solidFill>
+                  <a:latin typeface="Consolas" pitchFamily="34" charset="0"/>
+                  <a:ea typeface="Consolas" pitchFamily="34" charset="-122"/>
+                  <a:cs typeface="Consolas" pitchFamily="34" charset="-120"/>
+                </a:rPr>
+                <a:t>",</a:t>
+              </a:r>
+            </a:p>
+            <a:p>
+              <a:pPr>
+                <a:lnSpc>
+                  <a:spcPct val="133000"/>
+                </a:lnSpc>
+              </a:pPr>
+              <a:r>
+                <a:rPr lang="en-US" sz="1100" kern="0" spc="-22" dirty="0">
+                  <a:solidFill>
+                    <a:srgbClr val="D73A49"/>
+                  </a:solidFill>
+                  <a:latin typeface="Consolas" pitchFamily="34" charset="0"/>
+                  <a:ea typeface="Consolas" pitchFamily="34" charset="-122"/>
+                  <a:cs typeface="Consolas" pitchFamily="34" charset="-120"/>
+                </a:rPr>
+                <a:t>    </a:t>
+              </a:r>
+              <a:r>
+                <a:rPr lang="en-US" sz="1100" kern="0" spc="-22" dirty="0" err="1">
+                  <a:solidFill>
+                    <a:srgbClr val="D73A49"/>
+                  </a:solidFill>
+                  <a:latin typeface="Consolas" pitchFamily="34" charset="0"/>
+                  <a:ea typeface="Consolas" pitchFamily="34" charset="-122"/>
+                  <a:cs typeface="Consolas" pitchFamily="34" charset="-120"/>
+                </a:rPr>
+                <a:t>classificacao</a:t>
+              </a:r>
+              <a:r>
+                <a:rPr lang="en-US" sz="1100" kern="0" spc="-22" dirty="0">
+                  <a:solidFill>
+                    <a:srgbClr val="D73A49"/>
+                  </a:solidFill>
+                  <a:latin typeface="Consolas" pitchFamily="34" charset="0"/>
+                  <a:ea typeface="Consolas" pitchFamily="34" charset="-122"/>
+                  <a:cs typeface="Consolas" pitchFamily="34" charset="-120"/>
+                </a:rPr>
+                <a:t>: 12,</a:t>
+              </a:r>
+            </a:p>
+            <a:p>
+              <a:pPr>
+                <a:lnSpc>
+                  <a:spcPct val="133000"/>
+                </a:lnSpc>
+              </a:pPr>
+              <a:r>
+                <a:rPr lang="en-US" sz="1100" kern="0" spc="-22" dirty="0">
+                  <a:solidFill>
+                    <a:srgbClr val="D73A49"/>
+                  </a:solidFill>
+                  <a:latin typeface="Consolas" pitchFamily="34" charset="0"/>
+                  <a:ea typeface="Consolas" pitchFamily="34" charset="-122"/>
+                  <a:cs typeface="Consolas" pitchFamily="34" charset="-120"/>
+                </a:rPr>
+                <a:t>    </a:t>
+              </a:r>
+              <a:r>
+                <a:rPr lang="en-US" sz="1100" kern="0" spc="-22" dirty="0" err="1">
+                  <a:solidFill>
+                    <a:srgbClr val="D73A49"/>
+                  </a:solidFill>
+                  <a:latin typeface="Consolas" pitchFamily="34" charset="0"/>
+                  <a:ea typeface="Consolas" pitchFamily="34" charset="-122"/>
+                  <a:cs typeface="Consolas" pitchFamily="34" charset="-120"/>
+                </a:rPr>
+                <a:t>duracao</a:t>
+              </a:r>
+              <a:r>
+                <a:rPr lang="en-US" sz="1100" kern="0" spc="-22" dirty="0">
+                  <a:solidFill>
+                    <a:srgbClr val="D73A49"/>
+                  </a:solidFill>
+                  <a:latin typeface="Consolas" pitchFamily="34" charset="0"/>
+                  <a:ea typeface="Consolas" pitchFamily="34" charset="-122"/>
+                  <a:cs typeface="Consolas" pitchFamily="34" charset="-120"/>
+                </a:rPr>
+                <a:t>: 145</a:t>
+              </a:r>
+            </a:p>
+            <a:p>
+              <a:pPr>
+                <a:lnSpc>
+                  <a:spcPct val="133000"/>
+                </a:lnSpc>
+              </a:pPr>
+              <a:r>
+                <a:rPr lang="en-US" sz="1100" kern="0" spc="-22" dirty="0">
+                  <a:solidFill>
+                    <a:srgbClr val="D73A49"/>
+                  </a:solidFill>
+                  <a:latin typeface="Consolas" pitchFamily="34" charset="0"/>
+                  <a:ea typeface="Consolas" pitchFamily="34" charset="-122"/>
+                  <a:cs typeface="Consolas" pitchFamily="34" charset="-120"/>
+                </a:rPr>
+                <a:t>  );</a:t>
+              </a:r>
+            </a:p>
+            <a:p>
+              <a:pPr>
+                <a:lnSpc>
+                  <a:spcPct val="133000"/>
+                </a:lnSpc>
+              </a:pPr>
+              <a:r>
+                <a:rPr lang="en-US" sz="1100" kern="0" spc="-22" dirty="0">
+                  <a:solidFill>
+                    <a:srgbClr val="D73A49"/>
+                  </a:solidFill>
+                  <a:latin typeface="Consolas" pitchFamily="34" charset="0"/>
+                  <a:ea typeface="Consolas" pitchFamily="34" charset="-122"/>
+                  <a:cs typeface="Consolas" pitchFamily="34" charset="-120"/>
+                </a:rPr>
+                <a:t>}</a:t>
+              </a:r>
+            </a:p>
+            <a:p>
+              <a:pPr>
+                <a:lnSpc>
+                  <a:spcPct val="133000"/>
+                </a:lnSpc>
+              </a:pPr>
+              <a:r>
+                <a:rPr lang="en-US" sz="1100" kern="0" spc="-22" dirty="0">
+                  <a:solidFill>
+                    <a:srgbClr val="D73A49"/>
+                  </a:solidFill>
+                  <a:latin typeface="Consolas" pitchFamily="34" charset="0"/>
+                  <a:ea typeface="Consolas" pitchFamily="34" charset="-122"/>
+                  <a:cs typeface="Consolas" pitchFamily="34" charset="-120"/>
+                </a:rPr>
+                <a:t>class </a:t>
+              </a:r>
+              <a:r>
+                <a:rPr lang="en-US" sz="1100" kern="0" spc="-22" dirty="0" err="1">
+                  <a:solidFill>
+                    <a:srgbClr val="D73A49"/>
+                  </a:solidFill>
+                  <a:latin typeface="Consolas" pitchFamily="34" charset="0"/>
+                  <a:ea typeface="Consolas" pitchFamily="34" charset="-122"/>
+                  <a:cs typeface="Consolas" pitchFamily="34" charset="-120"/>
+                </a:rPr>
+                <a:t>Filme</a:t>
+              </a:r>
+              <a:r>
+                <a:rPr lang="en-US" sz="1100" kern="0" spc="-22" dirty="0">
+                  <a:solidFill>
+                    <a:srgbClr val="D73A49"/>
+                  </a:solidFill>
+                  <a:latin typeface="Consolas" pitchFamily="34" charset="0"/>
+                  <a:ea typeface="Consolas" pitchFamily="34" charset="-122"/>
+                  <a:cs typeface="Consolas" pitchFamily="34" charset="-120"/>
+                </a:rPr>
+                <a:t> {</a:t>
+              </a:r>
+            </a:p>
+            <a:p>
+              <a:pPr>
+                <a:lnSpc>
+                  <a:spcPct val="133000"/>
+                </a:lnSpc>
+              </a:pPr>
+              <a:r>
+                <a:rPr lang="en-US" sz="1100" kern="0" spc="-22" dirty="0">
+                  <a:solidFill>
+                    <a:srgbClr val="D73A49"/>
+                  </a:solidFill>
+                  <a:latin typeface="Consolas" pitchFamily="34" charset="0"/>
+                  <a:ea typeface="Consolas" pitchFamily="34" charset="-122"/>
+                  <a:cs typeface="Consolas" pitchFamily="34" charset="-120"/>
+                </a:rPr>
+                <a:t>  String </a:t>
+              </a:r>
+              <a:r>
+                <a:rPr lang="en-US" sz="1100" kern="0" spc="-22" dirty="0" err="1">
+                  <a:solidFill>
+                    <a:srgbClr val="D73A49"/>
+                  </a:solidFill>
+                  <a:latin typeface="Consolas" pitchFamily="34" charset="0"/>
+                  <a:ea typeface="Consolas" pitchFamily="34" charset="-122"/>
+                  <a:cs typeface="Consolas" pitchFamily="34" charset="-120"/>
+                </a:rPr>
+                <a:t>titulo</a:t>
+              </a:r>
+              <a:r>
+                <a:rPr lang="en-US" sz="1100" kern="0" spc="-22" dirty="0">
+                  <a:solidFill>
+                    <a:srgbClr val="D73A49"/>
+                  </a:solidFill>
+                  <a:latin typeface="Consolas" pitchFamily="34" charset="0"/>
+                  <a:ea typeface="Consolas" pitchFamily="34" charset="-122"/>
+                  <a:cs typeface="Consolas" pitchFamily="34" charset="-120"/>
+                </a:rPr>
+                <a:t>;</a:t>
+              </a:r>
+            </a:p>
+            <a:p>
+              <a:pPr>
+                <a:lnSpc>
+                  <a:spcPct val="133000"/>
+                </a:lnSpc>
+              </a:pPr>
+              <a:r>
+                <a:rPr lang="en-US" sz="1100" kern="0" spc="-22" dirty="0">
+                  <a:solidFill>
+                    <a:srgbClr val="D73A49"/>
+                  </a:solidFill>
+                  <a:latin typeface="Consolas" pitchFamily="34" charset="0"/>
+                  <a:ea typeface="Consolas" pitchFamily="34" charset="-122"/>
+                  <a:cs typeface="Consolas" pitchFamily="34" charset="-120"/>
+                </a:rPr>
+                <a:t>  String </a:t>
+              </a:r>
+              <a:r>
+                <a:rPr lang="en-US" sz="1100" kern="0" spc="-22" dirty="0" err="1">
+                  <a:solidFill>
+                    <a:srgbClr val="D73A49"/>
+                  </a:solidFill>
+                  <a:latin typeface="Consolas" pitchFamily="34" charset="0"/>
+                  <a:ea typeface="Consolas" pitchFamily="34" charset="-122"/>
+                  <a:cs typeface="Consolas" pitchFamily="34" charset="-120"/>
+                </a:rPr>
+                <a:t>genero</a:t>
+              </a:r>
+              <a:r>
+                <a:rPr lang="en-US" sz="1100" kern="0" spc="-22" dirty="0">
+                  <a:solidFill>
+                    <a:srgbClr val="D73A49"/>
+                  </a:solidFill>
+                  <a:latin typeface="Consolas" pitchFamily="34" charset="0"/>
+                  <a:ea typeface="Consolas" pitchFamily="34" charset="-122"/>
+                  <a:cs typeface="Consolas" pitchFamily="34" charset="-120"/>
+                </a:rPr>
+                <a:t>;</a:t>
+              </a:r>
+            </a:p>
+            <a:p>
+              <a:pPr>
+                <a:lnSpc>
+                  <a:spcPct val="133000"/>
+                </a:lnSpc>
+              </a:pPr>
+              <a:r>
+                <a:rPr lang="en-US" sz="1100" kern="0" spc="-22" dirty="0">
+                  <a:solidFill>
+                    <a:srgbClr val="D73A49"/>
+                  </a:solidFill>
+                  <a:latin typeface="Consolas" pitchFamily="34" charset="0"/>
+                  <a:ea typeface="Consolas" pitchFamily="34" charset="-122"/>
+                  <a:cs typeface="Consolas" pitchFamily="34" charset="-120"/>
+                </a:rPr>
+                <a:t>  int </a:t>
+              </a:r>
+              <a:r>
+                <a:rPr lang="en-US" sz="1100" kern="0" spc="-22" dirty="0" err="1">
+                  <a:solidFill>
+                    <a:srgbClr val="D73A49"/>
+                  </a:solidFill>
+                  <a:latin typeface="Consolas" pitchFamily="34" charset="0"/>
+                  <a:ea typeface="Consolas" pitchFamily="34" charset="-122"/>
+                  <a:cs typeface="Consolas" pitchFamily="34" charset="-120"/>
+                </a:rPr>
+                <a:t>classificacao</a:t>
+              </a:r>
+              <a:r>
+                <a:rPr lang="en-US" sz="1100" kern="0" spc="-22" dirty="0">
+                  <a:solidFill>
+                    <a:srgbClr val="D73A49"/>
+                  </a:solidFill>
+                  <a:latin typeface="Consolas" pitchFamily="34" charset="0"/>
+                  <a:ea typeface="Consolas" pitchFamily="34" charset="-122"/>
+                  <a:cs typeface="Consolas" pitchFamily="34" charset="-120"/>
+                </a:rPr>
+                <a:t>;</a:t>
+              </a:r>
+            </a:p>
+            <a:p>
+              <a:pPr>
+                <a:lnSpc>
+                  <a:spcPct val="133000"/>
+                </a:lnSpc>
+              </a:pPr>
+              <a:r>
+                <a:rPr lang="en-US" sz="1100" kern="0" spc="-22" dirty="0">
+                  <a:solidFill>
+                    <a:srgbClr val="D73A49"/>
+                  </a:solidFill>
+                  <a:latin typeface="Consolas" pitchFamily="34" charset="0"/>
+                  <a:ea typeface="Consolas" pitchFamily="34" charset="-122"/>
+                  <a:cs typeface="Consolas" pitchFamily="34" charset="-120"/>
+                </a:rPr>
+                <a:t>  int </a:t>
+              </a:r>
+              <a:r>
+                <a:rPr lang="en-US" sz="1100" kern="0" spc="-22" dirty="0" err="1">
+                  <a:solidFill>
+                    <a:srgbClr val="D73A49"/>
+                  </a:solidFill>
+                  <a:latin typeface="Consolas" pitchFamily="34" charset="0"/>
+                  <a:ea typeface="Consolas" pitchFamily="34" charset="-122"/>
+                  <a:cs typeface="Consolas" pitchFamily="34" charset="-120"/>
+                </a:rPr>
+                <a:t>duracao</a:t>
+              </a:r>
+              <a:r>
+                <a:rPr lang="en-US" sz="1100" kern="0" spc="-22" dirty="0">
+                  <a:solidFill>
+                    <a:srgbClr val="D73A49"/>
+                  </a:solidFill>
+                  <a:latin typeface="Consolas" pitchFamily="34" charset="0"/>
+                  <a:ea typeface="Consolas" pitchFamily="34" charset="-122"/>
+                  <a:cs typeface="Consolas" pitchFamily="34" charset="-120"/>
+                </a:rPr>
+                <a:t>;</a:t>
+              </a:r>
+            </a:p>
+            <a:p>
+              <a:pPr>
+                <a:lnSpc>
+                  <a:spcPct val="133000"/>
+                </a:lnSpc>
+              </a:pPr>
+              <a:endParaRPr lang="en-US" sz="1100" kern="0" spc="-22" dirty="0">
                 <a:solidFill>
                   <a:srgbClr val="D73A49"/>
                 </a:solidFill>
                 <a:latin typeface="Consolas" pitchFamily="34" charset="0"/>
                 <a:ea typeface="Consolas" pitchFamily="34" charset="-122"/>
                 <a:cs typeface="Consolas" pitchFamily="34" charset="-120"/>
-              </a:rPr>
-              <a:t>class Aluno {</a:t>
-            </a:r>
-            <a:endParaRPr lang="en-US" sz="1100" dirty="0"/>
-          </a:p>
-          <a:p>
-            <a:pPr marL="0" indent="0" algn="l">
-              <a:lnSpc>
-                <a:spcPct val="133000"/>
-              </a:lnSpc>
-              <a:buNone/>
-            </a:pPr>
-            <a:r>
-              <a:rPr lang="en-US" sz="1100" kern="0" spc="-22" dirty="0">
+              </a:endParaRPr>
+            </a:p>
+            <a:p>
+              <a:pPr>
+                <a:lnSpc>
+                  <a:spcPct val="133000"/>
+                </a:lnSpc>
+              </a:pPr>
+              <a:r>
+                <a:rPr lang="en-US" sz="1100" kern="0" spc="-22" dirty="0">
+                  <a:solidFill>
+                    <a:srgbClr val="D73A49"/>
+                  </a:solidFill>
+                  <a:latin typeface="Consolas" pitchFamily="34" charset="0"/>
+                  <a:ea typeface="Consolas" pitchFamily="34" charset="-122"/>
+                  <a:cs typeface="Consolas" pitchFamily="34" charset="-120"/>
+                </a:rPr>
+                <a:t>  </a:t>
+              </a:r>
+              <a:r>
+                <a:rPr lang="en-US" sz="1100" kern="0" spc="-22" dirty="0" err="1">
+                  <a:solidFill>
+                    <a:srgbClr val="D73A49"/>
+                  </a:solidFill>
+                  <a:latin typeface="Consolas" pitchFamily="34" charset="0"/>
+                  <a:ea typeface="Consolas" pitchFamily="34" charset="-122"/>
+                  <a:cs typeface="Consolas" pitchFamily="34" charset="-120"/>
+                </a:rPr>
+                <a:t>Filme</a:t>
+              </a:r>
+              <a:r>
+                <a:rPr lang="en-US" sz="1100" kern="0" spc="-22" dirty="0">
+                  <a:solidFill>
+                    <a:srgbClr val="D73A49"/>
+                  </a:solidFill>
+                  <a:latin typeface="Consolas" pitchFamily="34" charset="0"/>
+                  <a:ea typeface="Consolas" pitchFamily="34" charset="-122"/>
+                  <a:cs typeface="Consolas" pitchFamily="34" charset="-120"/>
+                </a:rPr>
+                <a:t>({</a:t>
+              </a:r>
+            </a:p>
+            <a:p>
+              <a:pPr>
+                <a:lnSpc>
+                  <a:spcPct val="133000"/>
+                </a:lnSpc>
+              </a:pPr>
+              <a:r>
+                <a:rPr lang="en-US" sz="1100" kern="0" spc="-22" dirty="0">
+                  <a:solidFill>
+                    <a:srgbClr val="D73A49"/>
+                  </a:solidFill>
+                  <a:latin typeface="Consolas" pitchFamily="34" charset="0"/>
+                  <a:ea typeface="Consolas" pitchFamily="34" charset="-122"/>
+                  <a:cs typeface="Consolas" pitchFamily="34" charset="-120"/>
+                </a:rPr>
+                <a:t>    required </a:t>
+              </a:r>
+              <a:r>
+                <a:rPr lang="en-US" sz="1100" kern="0" spc="-22" dirty="0" err="1">
+                  <a:solidFill>
+                    <a:srgbClr val="D73A49"/>
+                  </a:solidFill>
+                  <a:latin typeface="Consolas" pitchFamily="34" charset="0"/>
+                  <a:ea typeface="Consolas" pitchFamily="34" charset="-122"/>
+                  <a:cs typeface="Consolas" pitchFamily="34" charset="-120"/>
+                </a:rPr>
+                <a:t>this.titulo</a:t>
+              </a:r>
+              <a:r>
+                <a:rPr lang="en-US" sz="1100" kern="0" spc="-22" dirty="0">
+                  <a:solidFill>
+                    <a:srgbClr val="D73A49"/>
+                  </a:solidFill>
+                  <a:latin typeface="Consolas" pitchFamily="34" charset="0"/>
+                  <a:ea typeface="Consolas" pitchFamily="34" charset="-122"/>
+                  <a:cs typeface="Consolas" pitchFamily="34" charset="-120"/>
+                </a:rPr>
+                <a:t>,</a:t>
+              </a:r>
+            </a:p>
+            <a:p>
+              <a:pPr>
+                <a:lnSpc>
+                  <a:spcPct val="133000"/>
+                </a:lnSpc>
+              </a:pPr>
+              <a:r>
+                <a:rPr lang="en-US" sz="1100" kern="0" spc="-22" dirty="0">
+                  <a:solidFill>
+                    <a:srgbClr val="D73A49"/>
+                  </a:solidFill>
+                  <a:latin typeface="Consolas" pitchFamily="34" charset="0"/>
+                  <a:ea typeface="Consolas" pitchFamily="34" charset="-122"/>
+                  <a:cs typeface="Consolas" pitchFamily="34" charset="-120"/>
+                </a:rPr>
+                <a:t>    required </a:t>
+              </a:r>
+              <a:r>
+                <a:rPr lang="en-US" sz="1100" kern="0" spc="-22" dirty="0" err="1">
+                  <a:solidFill>
+                    <a:srgbClr val="D73A49"/>
+                  </a:solidFill>
+                  <a:latin typeface="Consolas" pitchFamily="34" charset="0"/>
+                  <a:ea typeface="Consolas" pitchFamily="34" charset="-122"/>
+                  <a:cs typeface="Consolas" pitchFamily="34" charset="-120"/>
+                </a:rPr>
+                <a:t>this.classificacao</a:t>
+              </a:r>
+              <a:r>
+                <a:rPr lang="en-US" sz="1100" kern="0" spc="-22" dirty="0">
+                  <a:solidFill>
+                    <a:srgbClr val="D73A49"/>
+                  </a:solidFill>
+                  <a:latin typeface="Consolas" pitchFamily="34" charset="0"/>
+                  <a:ea typeface="Consolas" pitchFamily="34" charset="-122"/>
+                  <a:cs typeface="Consolas" pitchFamily="34" charset="-120"/>
+                </a:rPr>
+                <a:t>,</a:t>
+              </a:r>
+            </a:p>
+            <a:p>
+              <a:pPr>
+                <a:lnSpc>
+                  <a:spcPct val="133000"/>
+                </a:lnSpc>
+              </a:pPr>
+              <a:r>
+                <a:rPr lang="en-US" sz="1100" kern="0" spc="-22" dirty="0">
+                  <a:solidFill>
+                    <a:srgbClr val="D73A49"/>
+                  </a:solidFill>
+                  <a:latin typeface="Consolas" pitchFamily="34" charset="0"/>
+                  <a:ea typeface="Consolas" pitchFamily="34" charset="-122"/>
+                  <a:cs typeface="Consolas" pitchFamily="34" charset="-120"/>
+                </a:rPr>
+                <a:t>    required </a:t>
+              </a:r>
+              <a:r>
+                <a:rPr lang="en-US" sz="1100" kern="0" spc="-22" dirty="0" err="1">
+                  <a:solidFill>
+                    <a:srgbClr val="D73A49"/>
+                  </a:solidFill>
+                  <a:latin typeface="Consolas" pitchFamily="34" charset="0"/>
+                  <a:ea typeface="Consolas" pitchFamily="34" charset="-122"/>
+                  <a:cs typeface="Consolas" pitchFamily="34" charset="-120"/>
+                </a:rPr>
+                <a:t>this.duracao</a:t>
+              </a:r>
+              <a:r>
+                <a:rPr lang="en-US" sz="1100" kern="0" spc="-22" dirty="0">
+                  <a:solidFill>
+                    <a:srgbClr val="D73A49"/>
+                  </a:solidFill>
+                  <a:latin typeface="Consolas" pitchFamily="34" charset="0"/>
+                  <a:ea typeface="Consolas" pitchFamily="34" charset="-122"/>
+                  <a:cs typeface="Consolas" pitchFamily="34" charset="-120"/>
+                </a:rPr>
+                <a:t>,</a:t>
+              </a:r>
+            </a:p>
+            <a:p>
+              <a:pPr>
+                <a:lnSpc>
+                  <a:spcPct val="133000"/>
+                </a:lnSpc>
+              </a:pPr>
+              <a:r>
+                <a:rPr lang="en-US" sz="1100" kern="0" spc="-22" dirty="0">
+                  <a:solidFill>
+                    <a:srgbClr val="D73A49"/>
+                  </a:solidFill>
+                  <a:latin typeface="Consolas" pitchFamily="34" charset="0"/>
+                  <a:ea typeface="Consolas" pitchFamily="34" charset="-122"/>
+                  <a:cs typeface="Consolas" pitchFamily="34" charset="-120"/>
+                </a:rPr>
+                <a:t>    required </a:t>
+              </a:r>
+              <a:r>
+                <a:rPr lang="en-US" sz="1100" kern="0" spc="-22" dirty="0" err="1">
+                  <a:solidFill>
+                    <a:srgbClr val="D73A49"/>
+                  </a:solidFill>
+                  <a:latin typeface="Consolas" pitchFamily="34" charset="0"/>
+                  <a:ea typeface="Consolas" pitchFamily="34" charset="-122"/>
+                  <a:cs typeface="Consolas" pitchFamily="34" charset="-120"/>
+                </a:rPr>
+                <a:t>this.genero</a:t>
+              </a:r>
+              <a:endParaRPr lang="en-US" sz="1100" kern="0" spc="-22" dirty="0">
                 <a:solidFill>
                   <a:srgbClr val="D73A49"/>
                 </a:solidFill>
                 <a:latin typeface="Consolas" pitchFamily="34" charset="0"/>
                 <a:ea typeface="Consolas" pitchFamily="34" charset="-122"/>
                 <a:cs typeface="Consolas" pitchFamily="34" charset="-120"/>
-              </a:rPr>
-              <a:t>  String nome;</a:t>
-            </a:r>
-            <a:endParaRPr lang="en-US" sz="1100" dirty="0"/>
-          </a:p>
-          <a:p>
-            <a:pPr marL="0" indent="0" algn="l">
-              <a:lnSpc>
-                <a:spcPct val="133000"/>
-              </a:lnSpc>
-              <a:buNone/>
-            </a:pPr>
-            <a:r>
-              <a:rPr lang="en-US" sz="1100" kern="0" spc="-22" dirty="0">
-                <a:solidFill>
-                  <a:srgbClr val="D73A49"/>
-                </a:solidFill>
-                <a:latin typeface="Consolas" pitchFamily="34" charset="0"/>
-                <a:ea typeface="Consolas" pitchFamily="34" charset="-122"/>
-                <a:cs typeface="Consolas" pitchFamily="34" charset="-120"/>
-              </a:rPr>
-              <a:t>  int idade;</a:t>
-            </a:r>
-            <a:endParaRPr lang="en-US" sz="1100" dirty="0"/>
-          </a:p>
-          <a:p>
-            <a:pPr marL="0" indent="0" algn="l">
-              <a:lnSpc>
-                <a:spcPct val="133000"/>
-              </a:lnSpc>
-              <a:buNone/>
-            </a:pPr>
-            <a:r>
-              <a:rPr lang="en-US" sz="1100" kern="0" spc="-22" dirty="0">
-                <a:solidFill>
-                  <a:srgbClr val="D73A49"/>
-                </a:solidFill>
-                <a:latin typeface="Consolas" pitchFamily="34" charset="0"/>
-                <a:ea typeface="Consolas" pitchFamily="34" charset="-122"/>
-                <a:cs typeface="Consolas" pitchFamily="34" charset="-120"/>
-              </a:rPr>
-              <a:t>  double nota;</a:t>
-            </a:r>
-            <a:endParaRPr lang="en-US" sz="1100" dirty="0"/>
-          </a:p>
-          <a:p>
-            <a:pPr marL="0" indent="0" algn="l">
-              <a:lnSpc>
-                <a:spcPct val="133000"/>
-              </a:lnSpc>
-              <a:buNone/>
-            </a:pPr>
-            <a:endParaRPr lang="en-US" sz="1100" dirty="0"/>
-          </a:p>
-          <a:p>
-            <a:pPr marL="0" indent="0" algn="l">
-              <a:lnSpc>
-                <a:spcPct val="133000"/>
-              </a:lnSpc>
-              <a:buNone/>
-            </a:pPr>
-            <a:r>
-              <a:rPr lang="en-US" sz="1100" kern="0" spc="-22" dirty="0">
-                <a:solidFill>
-                  <a:srgbClr val="D73A49"/>
-                </a:solidFill>
-                <a:latin typeface="Consolas" pitchFamily="34" charset="0"/>
-                <a:ea typeface="Consolas" pitchFamily="34" charset="-122"/>
-                <a:cs typeface="Consolas" pitchFamily="34" charset="-120"/>
-              </a:rPr>
-              <a:t>  Aluno({</a:t>
-            </a:r>
-            <a:endParaRPr lang="en-US" sz="1100" dirty="0"/>
-          </a:p>
-          <a:p>
-            <a:pPr marL="0" indent="0" algn="l">
-              <a:lnSpc>
-                <a:spcPct val="133000"/>
-              </a:lnSpc>
-              <a:buNone/>
-            </a:pPr>
-            <a:r>
-              <a:rPr lang="en-US" sz="1100" kern="0" spc="-22" dirty="0">
-                <a:solidFill>
-                  <a:srgbClr val="D73A49"/>
-                </a:solidFill>
-                <a:latin typeface="Consolas" pitchFamily="34" charset="0"/>
-                <a:ea typeface="Consolas" pitchFamily="34" charset="-122"/>
-                <a:cs typeface="Consolas" pitchFamily="34" charset="-120"/>
-              </a:rPr>
-              <a:t>    required this.nome,</a:t>
-            </a:r>
-            <a:endParaRPr lang="en-US" sz="1100" dirty="0"/>
-          </a:p>
-          <a:p>
-            <a:pPr marL="0" indent="0" algn="l">
-              <a:lnSpc>
-                <a:spcPct val="133000"/>
-              </a:lnSpc>
-              <a:buNone/>
-            </a:pPr>
-            <a:r>
-              <a:rPr lang="en-US" sz="1100" kern="0" spc="-22" dirty="0">
-                <a:solidFill>
-                  <a:srgbClr val="D73A49"/>
-                </a:solidFill>
-                <a:latin typeface="Consolas" pitchFamily="34" charset="0"/>
-                <a:ea typeface="Consolas" pitchFamily="34" charset="-122"/>
-                <a:cs typeface="Consolas" pitchFamily="34" charset="-120"/>
-              </a:rPr>
-              <a:t>    required this.idade,</a:t>
-            </a:r>
-            <a:endParaRPr lang="en-US" sz="1100" dirty="0"/>
-          </a:p>
-          <a:p>
-            <a:pPr marL="0" indent="0" algn="l">
-              <a:lnSpc>
-                <a:spcPct val="133000"/>
-              </a:lnSpc>
-              <a:buNone/>
-            </a:pPr>
-            <a:r>
-              <a:rPr lang="en-US" sz="1100" kern="0" spc="-22" dirty="0">
-                <a:solidFill>
-                  <a:srgbClr val="D73A49"/>
-                </a:solidFill>
-                <a:latin typeface="Consolas" pitchFamily="34" charset="0"/>
-                <a:ea typeface="Consolas" pitchFamily="34" charset="-122"/>
-                <a:cs typeface="Consolas" pitchFamily="34" charset="-120"/>
-              </a:rPr>
-              <a:t>    required this.nota,</a:t>
-            </a:r>
-            <a:endParaRPr lang="en-US" sz="1100" dirty="0"/>
-          </a:p>
-          <a:p>
-            <a:pPr marL="0" indent="0" algn="l">
-              <a:lnSpc>
-                <a:spcPct val="133000"/>
-              </a:lnSpc>
-              <a:buNone/>
-            </a:pPr>
-            <a:r>
-              <a:rPr lang="en-US" sz="1100" kern="0" spc="-22" dirty="0">
-                <a:solidFill>
-                  <a:srgbClr val="D73A49"/>
-                </a:solidFill>
-                <a:latin typeface="Consolas" pitchFamily="34" charset="0"/>
-                <a:ea typeface="Consolas" pitchFamily="34" charset="-122"/>
-                <a:cs typeface="Consolas" pitchFamily="34" charset="-120"/>
-              </a:rPr>
-              <a:t>  });</a:t>
-            </a:r>
-            <a:endParaRPr lang="en-US" sz="1100" dirty="0"/>
-          </a:p>
-          <a:p>
-            <a:pPr marL="0" indent="0" algn="l">
-              <a:lnSpc>
-                <a:spcPct val="133000"/>
-              </a:lnSpc>
-              <a:buNone/>
-            </a:pPr>
-            <a:r>
-              <a:rPr lang="en-US" sz="1100" kern="0" spc="-22" dirty="0">
-                <a:solidFill>
-                  <a:srgbClr val="D73A49"/>
-                </a:solidFill>
-                <a:latin typeface="Consolas" pitchFamily="34" charset="0"/>
-                <a:ea typeface="Consolas" pitchFamily="34" charset="-122"/>
-                <a:cs typeface="Consolas" pitchFamily="34" charset="-120"/>
-              </a:rPr>
-              <a:t>}</a:t>
-            </a:r>
-            <a:endParaRPr lang="en-US" sz="1100" dirty="0"/>
-          </a:p>
-          <a:p>
-            <a:pPr marL="0" indent="0" algn="l">
-              <a:lnSpc>
-                <a:spcPct val="133000"/>
-              </a:lnSpc>
-              <a:buNone/>
-            </a:pPr>
-            <a:endParaRPr lang="en-US" sz="1100" dirty="0"/>
-          </a:p>
-          <a:p>
-            <a:pPr marL="0" indent="0" algn="l">
-              <a:lnSpc>
-                <a:spcPct val="133000"/>
-              </a:lnSpc>
-              <a:buNone/>
-            </a:pPr>
-            <a:r>
-              <a:rPr lang="en-US" sz="1100" kern="0" spc="-22" dirty="0">
-                <a:solidFill>
-                  <a:srgbClr val="D73A49"/>
-                </a:solidFill>
-                <a:latin typeface="Consolas" pitchFamily="34" charset="0"/>
-                <a:ea typeface="Consolas" pitchFamily="34" charset="-122"/>
-                <a:cs typeface="Consolas" pitchFamily="34" charset="-120"/>
-              </a:rPr>
-              <a:t>var aluno = Aluno(</a:t>
-            </a:r>
-            <a:endParaRPr lang="en-US" sz="1100" dirty="0"/>
-          </a:p>
-          <a:p>
-            <a:pPr marL="0" indent="0" algn="l">
-              <a:lnSpc>
-                <a:spcPct val="133000"/>
-              </a:lnSpc>
-              <a:buNone/>
-            </a:pPr>
-            <a:r>
-              <a:rPr lang="en-US" sz="1100" kern="0" spc="-22" dirty="0">
-                <a:solidFill>
-                  <a:srgbClr val="D73A49"/>
-                </a:solidFill>
-                <a:latin typeface="Consolas" pitchFamily="34" charset="0"/>
-                <a:ea typeface="Consolas" pitchFamily="34" charset="-122"/>
-                <a:cs typeface="Consolas" pitchFamily="34" charset="-120"/>
-              </a:rPr>
-              <a:t>  nome: 'Carlos',</a:t>
-            </a:r>
-            <a:endParaRPr lang="en-US" sz="1100" dirty="0"/>
-          </a:p>
-          <a:p>
-            <a:pPr marL="0" indent="0" algn="l">
-              <a:lnSpc>
-                <a:spcPct val="133000"/>
-              </a:lnSpc>
-              <a:buNone/>
-            </a:pPr>
-            <a:r>
-              <a:rPr lang="en-US" sz="1100" kern="0" spc="-22" dirty="0">
-                <a:solidFill>
-                  <a:srgbClr val="D73A49"/>
-                </a:solidFill>
-                <a:latin typeface="Consolas" pitchFamily="34" charset="0"/>
-                <a:ea typeface="Consolas" pitchFamily="34" charset="-122"/>
-                <a:cs typeface="Consolas" pitchFamily="34" charset="-120"/>
-              </a:rPr>
-              <a:t>  idade: 20,</a:t>
-            </a:r>
-            <a:endParaRPr lang="en-US" sz="1100" dirty="0"/>
-          </a:p>
-          <a:p>
-            <a:pPr marL="0" indent="0" algn="l">
-              <a:lnSpc>
-                <a:spcPct val="133000"/>
-              </a:lnSpc>
-              <a:buNone/>
-            </a:pPr>
-            <a:r>
-              <a:rPr lang="en-US" sz="1100" kern="0" spc="-22" dirty="0">
-                <a:solidFill>
-                  <a:srgbClr val="D73A49"/>
-                </a:solidFill>
-                <a:latin typeface="Consolas" pitchFamily="34" charset="0"/>
-                <a:ea typeface="Consolas" pitchFamily="34" charset="-122"/>
-                <a:cs typeface="Consolas" pitchFamily="34" charset="-120"/>
-              </a:rPr>
-              <a:t>  nota: 8.5,</a:t>
-            </a:r>
-            <a:endParaRPr lang="en-US" sz="1100" dirty="0"/>
-          </a:p>
-          <a:p>
-            <a:pPr marL="0" indent="0" algn="l">
-              <a:lnSpc>
-                <a:spcPct val="133000"/>
-              </a:lnSpc>
-              <a:buNone/>
-            </a:pPr>
-            <a:r>
-              <a:rPr lang="en-US" sz="1100" kern="0" spc="-22" dirty="0">
-                <a:solidFill>
-                  <a:srgbClr val="D73A49"/>
-                </a:solidFill>
-                <a:latin typeface="Consolas" pitchFamily="34" charset="0"/>
-                <a:ea typeface="Consolas" pitchFamily="34" charset="-122"/>
-                <a:cs typeface="Consolas" pitchFamily="34" charset="-120"/>
-              </a:rPr>
-              <a:t>);</a:t>
-            </a:r>
-            <a:endParaRPr lang="en-US" sz="1100" dirty="0"/>
-          </a:p>
-        </p:txBody>
-      </p:sp>
-      <p:sp>
-        <p:nvSpPr>
-          <p:cNvPr id="14" name="Shape 12"/>
-          <p:cNvSpPr/>
-          <p:nvPr/>
-        </p:nvSpPr>
-        <p:spPr>
-          <a:xfrm>
-            <a:off x="661475" y="5740400"/>
-            <a:ext cx="10868745" cy="477540"/>
-          </a:xfrm>
-          <a:prstGeom prst="roundRect">
-            <a:avLst>
-              <a:gd name="adj" fmla="val 12468"/>
-            </a:avLst>
-          </a:prstGeom>
-          <a:solidFill>
-            <a:srgbClr val="B6D6FC"/>
-          </a:solidFill>
-          <a:ln/>
-        </p:spPr>
-      </p:sp>
+              </a:endParaRPr>
+            </a:p>
+            <a:p>
+              <a:pPr>
+                <a:lnSpc>
+                  <a:spcPct val="133000"/>
+                </a:lnSpc>
+              </a:pPr>
+              <a:r>
+                <a:rPr lang="en-US" sz="1100" kern="0" spc="-22" dirty="0">
+                  <a:solidFill>
+                    <a:srgbClr val="D73A49"/>
+                  </a:solidFill>
+                  <a:latin typeface="Consolas" pitchFamily="34" charset="0"/>
+                  <a:ea typeface="Consolas" pitchFamily="34" charset="-122"/>
+                  <a:cs typeface="Consolas" pitchFamily="34" charset="-120"/>
+                </a:rPr>
+                <a:t>    });</a:t>
+              </a:r>
+            </a:p>
+            <a:p>
+              <a:pPr>
+                <a:lnSpc>
+                  <a:spcPct val="133000"/>
+                </a:lnSpc>
+              </a:pPr>
+              <a:r>
+                <a:rPr lang="en-US" sz="1100" kern="0" spc="-22" dirty="0">
+                  <a:solidFill>
+                    <a:srgbClr val="D73A49"/>
+                  </a:solidFill>
+                  <a:latin typeface="Consolas" pitchFamily="34" charset="0"/>
+                  <a:ea typeface="Consolas" pitchFamily="34" charset="-122"/>
+                  <a:cs typeface="Consolas" pitchFamily="34" charset="-120"/>
+                </a:rPr>
+                <a:t>}</a:t>
+              </a:r>
+            </a:p>
+          </p:txBody>
+        </p:sp>
+      </p:grpSp>
       <p:pic>
         <p:nvPicPr>
           <p:cNvPr id="15" name="Image 0" descr="preencoded.png"/>
@@ -11731,7 +11375,7 @@
         </p:blipFill>
         <p:spPr>
           <a:xfrm>
-            <a:off x="803156" y="5897761"/>
+            <a:off x="944837" y="6119267"/>
             <a:ext cx="177200" cy="141684"/>
           </a:xfrm>
           <a:prstGeom prst="rect">
@@ -11739,48 +11383,91 @@
           </a:prstGeom>
         </p:spPr>
       </p:pic>
-      <p:sp>
-        <p:nvSpPr>
-          <p:cNvPr id="16" name="Text 13"/>
-          <p:cNvSpPr/>
+      <p:grpSp>
+        <p:nvGrpSpPr>
+          <p:cNvPr id="20" name="Agrupar 19">
+            <a:extLst>
+              <a:ext uri="{FF2B5EF4-FFF2-40B4-BE49-F238E27FC236}">
+                <a16:creationId xmlns:a16="http://schemas.microsoft.com/office/drawing/2014/main" id="{15916BF1-C7EF-4AAC-A821-0291B34BE5FB}"/>
+              </a:ext>
+            </a:extLst>
+          </p:cNvPr>
+          <p:cNvGrpSpPr/>
           <p:nvPr/>
-        </p:nvSpPr>
-        <p:spPr>
+        </p:nvGrpSpPr>
+        <p:grpSpPr>
           <a:xfrm>
-            <a:off x="1122037" y="5882084"/>
-            <a:ext cx="10876087" cy="204788"/>
+            <a:off x="803156" y="5961906"/>
+            <a:ext cx="11336649" cy="477540"/>
+            <a:chOff x="661475" y="5740400"/>
+            <a:chExt cx="11336649" cy="477540"/>
           </a:xfrm>
-          <a:prstGeom prst="rect">
-            <a:avLst/>
-          </a:prstGeom>
-          <a:noFill/>
-          <a:ln/>
-        </p:spPr>
-        <p:txBody>
-          <a:bodyPr wrap="none" lIns="0" tIns="0" rIns="0" bIns="0" rtlCol="0" anchor="t"/>
-          <a:lstStyle/>
-          <a:p>
-            <a:pPr marL="0" indent="0" algn="l">
-              <a:lnSpc>
-                <a:spcPct val="117000"/>
-              </a:lnSpc>
-              <a:buNone/>
-            </a:pPr>
-            <a:r>
-              <a:rPr lang="en-US" sz="1100" kern="0" spc="-22" dirty="0">
-                <a:solidFill>
-                  <a:srgbClr val="000000"/>
-                </a:solidFill>
-                <a:latin typeface="Inter" pitchFamily="34" charset="0"/>
-                <a:ea typeface="Inter" pitchFamily="34" charset="-122"/>
-                <a:cs typeface="Inter" pitchFamily="34" charset="-120"/>
-              </a:rPr>
-              <a:t>💬 Em Flutter, quase todos os widgets usam parâmetros nomeados. Adotar essa prática agora facilita muito o aprendizado futuro!</a:t>
-            </a:r>
-            <a:endParaRPr lang="en-US" sz="1100" dirty="0"/>
-          </a:p>
-        </p:txBody>
-      </p:sp>
+        </p:grpSpPr>
+        <p:sp>
+          <p:nvSpPr>
+            <p:cNvPr id="14" name="Shape 12"/>
+            <p:cNvSpPr/>
+            <p:nvPr/>
+          </p:nvSpPr>
+          <p:spPr>
+            <a:xfrm>
+              <a:off x="661475" y="5740400"/>
+              <a:ext cx="10868745" cy="477540"/>
+            </a:xfrm>
+            <a:prstGeom prst="roundRect">
+              <a:avLst>
+                <a:gd name="adj" fmla="val 12468"/>
+              </a:avLst>
+            </a:prstGeom>
+            <a:solidFill>
+              <a:srgbClr val="B6D6FC"/>
+            </a:solidFill>
+            <a:ln/>
+          </p:spPr>
+        </p:sp>
+        <p:sp>
+          <p:nvSpPr>
+            <p:cNvPr id="16" name="Text 13"/>
+            <p:cNvSpPr/>
+            <p:nvPr/>
+          </p:nvSpPr>
+          <p:spPr>
+            <a:xfrm>
+              <a:off x="1122037" y="5882084"/>
+              <a:ext cx="10876087" cy="204788"/>
+            </a:xfrm>
+            <a:prstGeom prst="rect">
+              <a:avLst/>
+            </a:prstGeom>
+            <a:noFill/>
+            <a:ln/>
+          </p:spPr>
+          <p:txBody>
+            <a:bodyPr wrap="none" lIns="0" tIns="0" rIns="0" bIns="0" rtlCol="0" anchor="t"/>
+            <a:lstStyle/>
+            <a:p>
+              <a:pPr marL="0" indent="0" algn="l">
+                <a:lnSpc>
+                  <a:spcPct val="117000"/>
+                </a:lnSpc>
+                <a:buNone/>
+              </a:pPr>
+              <a:r>
+                <a:rPr lang="en-US" sz="1100" kern="0" spc="-22" dirty="0">
+                  <a:solidFill>
+                    <a:srgbClr val="000000"/>
+                  </a:solidFill>
+                  <a:latin typeface="Inter" pitchFamily="34" charset="0"/>
+                  <a:ea typeface="Inter" pitchFamily="34" charset="-122"/>
+                  <a:cs typeface="Inter" pitchFamily="34" charset="-120"/>
+                </a:rPr>
+                <a:t>💬 Em Flutter, quase todos os widgets usam parâmetros nomeados. Adotar essa prática agora facilita muito o aprendizado futuro!</a:t>
+              </a:r>
+              <a:endParaRPr lang="en-US" sz="1100" dirty="0"/>
+            </a:p>
+          </p:txBody>
+        </p:sp>
+      </p:grpSp>
     </p:spTree>
   </p:cSld>
   <p:clrMapOvr>

--- a/Desenvolvimento de Aplicações/Pedro/Aula 03 - Introdução a Programação Orientada a Objetos/Introdução a POO.pptx
+++ b/Desenvolvimento de Aplicações/Pedro/Aula 03 - Introdução a Programação Orientada a Objetos/Introdução a POO.pptx
@@ -5,7 +5,7 @@
     <p:sldMasterId id="2147483651" r:id="rId1"/>
   </p:sldMasterIdLst>
   <p:notesMasterIdLst>
-    <p:notesMasterId r:id="rId10"/>
+    <p:notesMasterId r:id="rId11"/>
   </p:notesMasterIdLst>
   <p:sldIdLst>
     <p:sldId id="256" r:id="rId2"/>
@@ -16,36 +16,25 @@
     <p:sldId id="265" r:id="rId7"/>
     <p:sldId id="260" r:id="rId8"/>
     <p:sldId id="261" r:id="rId9"/>
+    <p:sldId id="268" r:id="rId10"/>
   </p:sldIdLst>
   <p:sldSz cx="12192000" cy="6858000"/>
   <p:notesSz cx="6858000" cy="12192000"/>
   <p:embeddedFontLst>
     <p:embeddedFont>
-      <p:font typeface="Calibri" panose="020F0502020204030204" pitchFamily="34" charset="0"/>
-      <p:regular r:id="rId11"/>
-      <p:bold r:id="rId12"/>
-      <p:italic r:id="rId13"/>
-      <p:boldItalic r:id="rId14"/>
-    </p:embeddedFont>
-    <p:embeddedFont>
-      <p:font typeface="Calibri Light" panose="020F0302020204030204" pitchFamily="34" charset="0"/>
-      <p:regular r:id="rId15"/>
-      <p:italic r:id="rId16"/>
-    </p:embeddedFont>
-    <p:embeddedFont>
       <p:font typeface="Consolas" panose="020B0609020204030204" pitchFamily="49" charset="0"/>
-      <p:regular r:id="rId17"/>
-      <p:bold r:id="rId18"/>
-      <p:italic r:id="rId19"/>
-      <p:boldItalic r:id="rId20"/>
+      <p:regular r:id="rId12"/>
+      <p:bold r:id="rId13"/>
+      <p:italic r:id="rId14"/>
+      <p:boldItalic r:id="rId15"/>
     </p:embeddedFont>
     <p:embeddedFont>
       <p:font typeface="Inter" panose="020B0604020202020204" charset="0"/>
-      <p:regular r:id="rId21"/>
+      <p:regular r:id="rId16"/>
     </p:embeddedFont>
     <p:embeddedFont>
       <p:font typeface="Inter Bold" panose="020B0604020202020204" charset="0"/>
-      <p:regular r:id="rId22"/>
+      <p:regular r:id="rId17"/>
     </p:embeddedFont>
   </p:embeddedFontLst>
   <p:defaultTextStyle>
@@ -4008,7 +3997,7 @@
       </a:lvl9pPr>
     </p:otherStyle>
   </p:txStyles>
-  <p:extLst mod="1">
+  <p:extLst>
     <p:ext uri="{27BBF7A9-308A-43DC-89C8-2F10F3537804}">
       <p15:sldGuideLst xmlns:p15="http://schemas.microsoft.com/office/powerpoint/2012/main"/>
     </p:ext>
@@ -4098,6 +4087,13 @@
             </a:solidFill>
             <a:ln/>
           </p:spPr>
+          <p:txBody>
+            <a:bodyPr/>
+            <a:lstStyle/>
+            <a:p>
+              <a:endParaRPr lang="pt-BR"/>
+            </a:p>
+          </p:txBody>
         </p:sp>
         <p:sp>
           <p:nvSpPr>
@@ -4378,6 +4374,13 @@
             </a:solidFill>
             <a:ln/>
           </p:spPr>
+          <p:txBody>
+            <a:bodyPr/>
+            <a:lstStyle/>
+            <a:p>
+              <a:endParaRPr lang="pt-BR"/>
+            </a:p>
+          </p:txBody>
         </p:sp>
         <p:sp>
           <p:nvSpPr>
@@ -4545,6 +4548,13 @@
             </a:solidFill>
             <a:ln/>
           </p:spPr>
+          <p:txBody>
+            <a:bodyPr/>
+            <a:lstStyle/>
+            <a:p>
+              <a:endParaRPr lang="pt-BR"/>
+            </a:p>
+          </p:txBody>
         </p:sp>
         <p:sp>
           <p:nvSpPr>
@@ -4712,6 +4722,13 @@
             </a:solidFill>
             <a:ln/>
           </p:spPr>
+          <p:txBody>
+            <a:bodyPr/>
+            <a:lstStyle/>
+            <a:p>
+              <a:endParaRPr lang="pt-BR"/>
+            </a:p>
+          </p:txBody>
         </p:sp>
         <p:sp>
           <p:nvSpPr>
@@ -5018,6 +5035,13 @@
             </a:solidFill>
             <a:ln/>
           </p:spPr>
+          <p:txBody>
+            <a:bodyPr/>
+            <a:lstStyle/>
+            <a:p>
+              <a:endParaRPr lang="pt-BR"/>
+            </a:p>
+          </p:txBody>
         </p:sp>
         <p:sp>
           <p:nvSpPr>
@@ -5152,6 +5176,13 @@
             </a:solidFill>
             <a:ln/>
           </p:spPr>
+          <p:txBody>
+            <a:bodyPr/>
+            <a:lstStyle/>
+            <a:p>
+              <a:endParaRPr lang="pt-BR"/>
+            </a:p>
+          </p:txBody>
         </p:sp>
         <p:sp>
           <p:nvSpPr>
@@ -5495,6 +5526,13 @@
             </a:solidFill>
             <a:ln/>
           </p:spPr>
+          <p:txBody>
+            <a:bodyPr/>
+            <a:lstStyle/>
+            <a:p>
+              <a:endParaRPr lang="pt-BR"/>
+            </a:p>
+          </p:txBody>
         </p:sp>
         <p:sp>
           <p:nvSpPr>
@@ -6245,6 +6283,13 @@
               </a:solidFill>
               <a:ln/>
             </p:spPr>
+            <p:txBody>
+              <a:bodyPr/>
+              <a:lstStyle/>
+              <a:p>
+                <a:endParaRPr lang="pt-BR"/>
+              </a:p>
+            </p:txBody>
           </p:sp>
           <p:sp>
             <p:nvSpPr>
@@ -6606,6 +6651,13 @@
               </a:solidFill>
               <a:ln/>
             </p:spPr>
+            <p:txBody>
+              <a:bodyPr/>
+              <a:lstStyle/>
+              <a:p>
+                <a:endParaRPr lang="pt-BR"/>
+              </a:p>
+            </p:txBody>
           </p:sp>
           <p:sp>
             <p:nvSpPr>
@@ -7033,6 +7085,13 @@
             </a:solidFill>
             <a:ln/>
           </p:spPr>
+          <p:txBody>
+            <a:bodyPr/>
+            <a:lstStyle/>
+            <a:p>
+              <a:endParaRPr lang="pt-BR"/>
+            </a:p>
+          </p:txBody>
         </p:sp>
         <p:sp>
           <p:nvSpPr>
@@ -7499,6 +7558,13 @@
             </a:solidFill>
             <a:ln/>
           </p:spPr>
+          <p:txBody>
+            <a:bodyPr/>
+            <a:lstStyle/>
+            <a:p>
+              <a:endParaRPr lang="pt-BR"/>
+            </a:p>
+          </p:txBody>
         </p:sp>
         <p:sp>
           <p:nvSpPr>
@@ -9120,6 +9186,13 @@
             </a:solidFill>
             <a:ln/>
           </p:spPr>
+          <p:txBody>
+            <a:bodyPr/>
+            <a:lstStyle/>
+            <a:p>
+              <a:endParaRPr lang="pt-BR"/>
+            </a:p>
+          </p:txBody>
         </p:sp>
         <p:sp>
           <p:nvSpPr>
@@ -9888,6 +9961,13 @@
             </a:solidFill>
             <a:ln/>
           </p:spPr>
+          <p:txBody>
+            <a:bodyPr/>
+            <a:lstStyle/>
+            <a:p>
+              <a:endParaRPr lang="pt-BR"/>
+            </a:p>
+          </p:txBody>
         </p:sp>
         <p:sp>
           <p:nvSpPr>
@@ -10018,6 +10098,13 @@
           </a:solidFill>
           <a:ln/>
         </p:spPr>
+        <p:txBody>
+          <a:bodyPr/>
+          <a:lstStyle/>
+          <a:p>
+            <a:endParaRPr lang="pt-BR"/>
+          </a:p>
+        </p:txBody>
       </p:sp>
       <p:sp>
         <p:nvSpPr>
@@ -10113,6 +10200,13 @@
             </a:solidFill>
             <a:ln/>
           </p:spPr>
+          <p:txBody>
+            <a:bodyPr/>
+            <a:lstStyle/>
+            <a:p>
+              <a:endParaRPr lang="pt-BR"/>
+            </a:p>
+          </p:txBody>
         </p:sp>
         <p:sp>
           <p:nvSpPr>
@@ -10521,6 +10615,13 @@
             </a:solidFill>
             <a:ln/>
           </p:spPr>
+          <p:txBody>
+            <a:bodyPr/>
+            <a:lstStyle/>
+            <a:p>
+              <a:endParaRPr lang="pt-BR"/>
+            </a:p>
+          </p:txBody>
         </p:sp>
         <p:sp>
           <p:nvSpPr>
@@ -11424,6 +11525,13 @@
             </a:solidFill>
             <a:ln/>
           </p:spPr>
+          <p:txBody>
+            <a:bodyPr/>
+            <a:lstStyle/>
+            <a:p>
+              <a:endParaRPr lang="pt-BR"/>
+            </a:p>
+          </p:txBody>
         </p:sp>
         <p:sp>
           <p:nvSpPr>
@@ -11469,6 +11577,89 @@
         </p:sp>
       </p:grpSp>
     </p:spTree>
+  </p:cSld>
+  <p:clrMapOvr>
+    <a:masterClrMapping/>
+  </p:clrMapOvr>
+</p:sld>
+</file>
+
+<file path=ppt/slides/slide9.xml><?xml version="1.0" encoding="utf-8"?>
+<p:sld xmlns:a="http://schemas.openxmlformats.org/drawingml/2006/main" xmlns:r="http://schemas.openxmlformats.org/officeDocument/2006/relationships" xmlns:p="http://schemas.openxmlformats.org/presentationml/2006/main">
+  <p:cSld>
+    <p:spTree>
+      <p:nvGrpSpPr>
+        <p:cNvPr id="1" name=""/>
+        <p:cNvGrpSpPr/>
+        <p:nvPr/>
+      </p:nvGrpSpPr>
+      <p:grpSpPr>
+        <a:xfrm>
+          <a:off x="0" y="0"/>
+          <a:ext cx="0" cy="0"/>
+          <a:chOff x="0" y="0"/>
+          <a:chExt cx="0" cy="0"/>
+        </a:xfrm>
+      </p:grpSpPr>
+      <p:sp>
+        <p:nvSpPr>
+          <p:cNvPr id="2" name="Título 1">
+            <a:extLst>
+              <a:ext uri="{FF2B5EF4-FFF2-40B4-BE49-F238E27FC236}">
+                <a16:creationId xmlns:a16="http://schemas.microsoft.com/office/drawing/2014/main" id="{F96C3C13-C0B5-86FE-559D-5E1BF51E17B1}"/>
+              </a:ext>
+            </a:extLst>
+          </p:cNvPr>
+          <p:cNvSpPr>
+            <a:spLocks noGrp="1"/>
+          </p:cNvSpPr>
+          <p:nvPr>
+            <p:ph type="title"/>
+          </p:nvPr>
+        </p:nvSpPr>
+        <p:spPr/>
+        <p:txBody>
+          <a:bodyPr/>
+          <a:lstStyle/>
+          <a:p>
+            <a:r>
+              <a:rPr lang="pt-BR" dirty="0"/>
+              <a:t>Desafio</a:t>
+            </a:r>
+          </a:p>
+        </p:txBody>
+      </p:sp>
+      <p:sp>
+        <p:nvSpPr>
+          <p:cNvPr id="3" name="Espaço Reservado para Conteúdo 2">
+            <a:extLst>
+              <a:ext uri="{FF2B5EF4-FFF2-40B4-BE49-F238E27FC236}">
+                <a16:creationId xmlns:a16="http://schemas.microsoft.com/office/drawing/2014/main" id="{9C0EF66C-FE7C-1147-C4D4-BD3E4920CA96}"/>
+              </a:ext>
+            </a:extLst>
+          </p:cNvPr>
+          <p:cNvSpPr>
+            <a:spLocks noGrp="1"/>
+          </p:cNvSpPr>
+          <p:nvPr>
+            <p:ph idx="1"/>
+          </p:nvPr>
+        </p:nvSpPr>
+        <p:spPr/>
+        <p:txBody>
+          <a:bodyPr/>
+          <a:lstStyle/>
+          <a:p>
+            <a:endParaRPr lang="pt-BR"/>
+          </a:p>
+        </p:txBody>
+      </p:sp>
+    </p:spTree>
+    <p:extLst>
+      <p:ext uri="{BB962C8B-B14F-4D97-AF65-F5344CB8AC3E}">
+        <p14:creationId xmlns:p14="http://schemas.microsoft.com/office/powerpoint/2010/main" val="3880193892"/>
+      </p:ext>
+    </p:extLst>
   </p:cSld>
   <p:clrMapOvr>
     <a:masterClrMapping/>

--- a/Desenvolvimento de Aplicações/Pedro/Aula 03 - Introdução a Programação Orientada a Objetos/Introdução a POO.pptx
+++ b/Desenvolvimento de Aplicações/Pedro/Aula 03 - Introdução a Programação Orientada a Objetos/Introdução a POO.pptx
@@ -16,7 +16,7 @@
     <p:sldId id="265" r:id="rId7"/>
     <p:sldId id="260" r:id="rId8"/>
     <p:sldId id="261" r:id="rId9"/>
-    <p:sldId id="268" r:id="rId10"/>
+    <p:sldId id="266" r:id="rId10"/>
   </p:sldIdLst>
   <p:sldSz cx="12192000" cy="6858000"/>
   <p:notesSz cx="6858000" cy="12192000"/>
@@ -1339,6 +1339,194 @@
 </p:sldLayout>
 </file>
 
+<file path=ppt/slideLayouts/slideLayout13.xml><?xml version="1.0" encoding="utf-8"?>
+<p:sldLayout xmlns:a="http://schemas.openxmlformats.org/drawingml/2006/main" xmlns:r="http://schemas.openxmlformats.org/officeDocument/2006/relationships" xmlns:p="http://schemas.openxmlformats.org/presentationml/2006/main" userDrawn="1">
+  <p:cSld name="1_Título e Conteúdo">
+    <p:spTree>
+      <p:nvGrpSpPr>
+        <p:cNvPr id="1" name=""/>
+        <p:cNvGrpSpPr/>
+        <p:nvPr/>
+      </p:nvGrpSpPr>
+      <p:grpSpPr>
+        <a:xfrm>
+          <a:off x="0" y="0"/>
+          <a:ext cx="0" cy="0"/>
+          <a:chOff x="0" y="0"/>
+          <a:chExt cx="0" cy="0"/>
+        </a:xfrm>
+      </p:grpSpPr>
+      <p:sp>
+        <p:nvSpPr>
+          <p:cNvPr id="3" name="Espaço Reservado para Conteúdo 2">
+            <a:extLst>
+              <a:ext uri="{FF2B5EF4-FFF2-40B4-BE49-F238E27FC236}">
+                <a16:creationId xmlns:a16="http://schemas.microsoft.com/office/drawing/2014/main" id="{B92EB726-D575-4374-ABD5-7364C993F3F6}"/>
+              </a:ext>
+            </a:extLst>
+          </p:cNvPr>
+          <p:cNvSpPr>
+            <a:spLocks noGrp="1"/>
+          </p:cNvSpPr>
+          <p:nvPr>
+            <p:ph idx="1"/>
+          </p:nvPr>
+        </p:nvSpPr>
+        <p:spPr>
+          <a:xfrm>
+            <a:off x="833519" y="1825625"/>
+            <a:ext cx="10760065" cy="4351338"/>
+          </a:xfrm>
+          <a:prstGeom prst="rect">
+            <a:avLst/>
+          </a:prstGeom>
+        </p:spPr>
+        <p:txBody>
+          <a:bodyPr/>
+          <a:lstStyle>
+            <a:lvl1pPr>
+              <a:lnSpc>
+                <a:spcPct val="150000"/>
+              </a:lnSpc>
+              <a:defRPr>
+                <a:latin typeface="Times New Roman" panose="02020603050405020304" pitchFamily="18" charset="0"/>
+                <a:cs typeface="Times New Roman" panose="02020603050405020304" pitchFamily="18" charset="0"/>
+              </a:defRPr>
+            </a:lvl1pPr>
+            <a:lvl2pPr>
+              <a:lnSpc>
+                <a:spcPct val="150000"/>
+              </a:lnSpc>
+              <a:defRPr>
+                <a:latin typeface="Times New Roman" panose="02020603050405020304" pitchFamily="18" charset="0"/>
+                <a:cs typeface="Times New Roman" panose="02020603050405020304" pitchFamily="18" charset="0"/>
+              </a:defRPr>
+            </a:lvl2pPr>
+            <a:lvl3pPr>
+              <a:lnSpc>
+                <a:spcPct val="150000"/>
+              </a:lnSpc>
+              <a:defRPr>
+                <a:latin typeface="Times New Roman" panose="02020603050405020304" pitchFamily="18" charset="0"/>
+                <a:cs typeface="Times New Roman" panose="02020603050405020304" pitchFamily="18" charset="0"/>
+              </a:defRPr>
+            </a:lvl3pPr>
+            <a:lvl4pPr>
+              <a:lnSpc>
+                <a:spcPct val="150000"/>
+              </a:lnSpc>
+              <a:defRPr>
+                <a:latin typeface="Times New Roman" panose="02020603050405020304" pitchFamily="18" charset="0"/>
+                <a:cs typeface="Times New Roman" panose="02020603050405020304" pitchFamily="18" charset="0"/>
+              </a:defRPr>
+            </a:lvl4pPr>
+            <a:lvl5pPr>
+              <a:lnSpc>
+                <a:spcPct val="150000"/>
+              </a:lnSpc>
+              <a:defRPr>
+                <a:latin typeface="Times New Roman" panose="02020603050405020304" pitchFamily="18" charset="0"/>
+                <a:cs typeface="Times New Roman" panose="02020603050405020304" pitchFamily="18" charset="0"/>
+              </a:defRPr>
+            </a:lvl5pPr>
+          </a:lstStyle>
+          <a:p>
+            <a:pPr lvl="0"/>
+            <a:r>
+              <a:rPr lang="pt-BR" dirty="0"/>
+              <a:t>Editar estilos de texto Mestre</a:t>
+            </a:r>
+          </a:p>
+          <a:p>
+            <a:pPr lvl="1"/>
+            <a:r>
+              <a:rPr lang="pt-BR" dirty="0"/>
+              <a:t>Segundo nível</a:t>
+            </a:r>
+          </a:p>
+          <a:p>
+            <a:pPr lvl="2"/>
+            <a:r>
+              <a:rPr lang="pt-BR" dirty="0"/>
+              <a:t>Terceiro nível</a:t>
+            </a:r>
+          </a:p>
+          <a:p>
+            <a:pPr lvl="3"/>
+            <a:r>
+              <a:rPr lang="pt-BR" dirty="0"/>
+              <a:t>Quarto nível</a:t>
+            </a:r>
+          </a:p>
+          <a:p>
+            <a:pPr lvl="4"/>
+            <a:r>
+              <a:rPr lang="pt-BR" dirty="0"/>
+              <a:t>Quinto nível</a:t>
+            </a:r>
+          </a:p>
+        </p:txBody>
+      </p:sp>
+      <p:sp>
+        <p:nvSpPr>
+          <p:cNvPr id="7" name="Holder 2">
+            <a:extLst>
+              <a:ext uri="{FF2B5EF4-FFF2-40B4-BE49-F238E27FC236}">
+                <a16:creationId xmlns:a16="http://schemas.microsoft.com/office/drawing/2014/main" id="{D772D076-3AF2-4DC9-AC57-19C5A1F31AE9}"/>
+              </a:ext>
+            </a:extLst>
+          </p:cNvPr>
+          <p:cNvSpPr>
+            <a:spLocks noGrp="1"/>
+          </p:cNvSpPr>
+          <p:nvPr>
+            <p:ph type="title"/>
+          </p:nvPr>
+        </p:nvSpPr>
+        <p:spPr>
+          <a:xfrm>
+            <a:off x="833520" y="817526"/>
+            <a:ext cx="8360355" cy="525090"/>
+          </a:xfrm>
+          <a:prstGeom prst="rect">
+            <a:avLst/>
+          </a:prstGeom>
+        </p:spPr>
+        <p:txBody>
+          <a:bodyPr lIns="0" tIns="0" rIns="0" bIns="0"/>
+          <a:lstStyle>
+            <a:lvl1pPr algn="just">
+              <a:defRPr sz="2600" b="0" i="0">
+                <a:solidFill>
+                  <a:srgbClr val="1A1A1A"/>
+                </a:solidFill>
+                <a:latin typeface="Times New Roman" panose="02020603050405020304" pitchFamily="18" charset="0"/>
+                <a:cs typeface="Times New Roman" panose="02020603050405020304" pitchFamily="18" charset="0"/>
+              </a:defRPr>
+            </a:lvl1pPr>
+          </a:lstStyle>
+          <a:p>
+            <a:r>
+              <a:rPr lang="pt-BR" dirty="0"/>
+              <a:t>Clique para editar o título Mestre</a:t>
+            </a:r>
+            <a:endParaRPr dirty="0"/>
+          </a:p>
+        </p:txBody>
+      </p:sp>
+    </p:spTree>
+    <p:extLst>
+      <p:ext uri="{BB962C8B-B14F-4D97-AF65-F5344CB8AC3E}">
+        <p14:creationId xmlns:p14="http://schemas.microsoft.com/office/powerpoint/2010/main" val="1100792133"/>
+      </p:ext>
+    </p:extLst>
+  </p:cSld>
+  <p:clrMapOvr>
+    <a:masterClrMapping/>
+  </p:clrMapOvr>
+</p:sldLayout>
+</file>
+
 <file path=ppt/slideLayouts/slideLayout2.xml><?xml version="1.0" encoding="utf-8"?>
 <p:sldLayout xmlns:a="http://schemas.openxmlformats.org/drawingml/2006/main" xmlns:r="http://schemas.openxmlformats.org/officeDocument/2006/relationships" xmlns:p="http://schemas.openxmlformats.org/presentationml/2006/main" type="obj" preserve="1">
   <p:cSld name="Título e Conteúdo">
@@ -3608,7 +3796,7 @@
           <p:nvPr/>
         </p:nvPicPr>
         <p:blipFill>
-          <a:blip r:embed="rId14"/>
+          <a:blip r:embed="rId15"/>
           <a:stretch>
             <a:fillRect/>
           </a:stretch>
@@ -3646,7 +3834,7 @@
           <p:nvPr/>
         </p:nvPicPr>
         <p:blipFill>
-          <a:blip r:embed="rId14"/>
+          <a:blip r:embed="rId15"/>
           <a:stretch>
             <a:fillRect/>
           </a:stretch>
@@ -3679,7 +3867,7 @@
           <p:nvPr/>
         </p:nvPicPr>
         <p:blipFill>
-          <a:blip r:embed="rId15"/>
+          <a:blip r:embed="rId16"/>
           <a:stretch>
             <a:fillRect/>
           </a:stretch>
@@ -3715,6 +3903,7 @@
     <p:sldLayoutId id="2147483661" r:id="rId10"/>
     <p:sldLayoutId id="2147483662" r:id="rId11"/>
     <p:sldLayoutId id="2147483663" r:id="rId12"/>
+    <p:sldLayoutId id="2147483664" r:id="rId13"/>
   </p:sldLayoutIdLst>
   <p:hf sldNum="0" hdr="0" ftr="0" dt="0"/>
   <p:txStyles>
@@ -11603,10 +11792,46 @@
       </p:grpSpPr>
       <p:sp>
         <p:nvSpPr>
-          <p:cNvPr id="2" name="Título 1">
+          <p:cNvPr id="2" name="Espaço Reservado para Conteúdo 1">
             <a:extLst>
               <a:ext uri="{FF2B5EF4-FFF2-40B4-BE49-F238E27FC236}">
-                <a16:creationId xmlns:a16="http://schemas.microsoft.com/office/drawing/2014/main" id="{F96C3C13-C0B5-86FE-559D-5E1BF51E17B1}"/>
+                <a16:creationId xmlns:a16="http://schemas.microsoft.com/office/drawing/2014/main" id="{8D416F3E-1ACC-40F0-8CA5-01D73970806C}"/>
+              </a:ext>
+            </a:extLst>
+          </p:cNvPr>
+          <p:cNvSpPr>
+            <a:spLocks noGrp="1"/>
+          </p:cNvSpPr>
+          <p:nvPr>
+            <p:ph idx="1"/>
+          </p:nvPr>
+        </p:nvSpPr>
+        <p:spPr>
+          <a:xfrm>
+            <a:off x="833519" y="1825625"/>
+            <a:ext cx="10760065" cy="1323018"/>
+          </a:xfrm>
+        </p:spPr>
+        <p:txBody>
+          <a:bodyPr/>
+          <a:lstStyle/>
+          <a:p>
+            <a:pPr marL="0" indent="0">
+              <a:buNone/>
+            </a:pPr>
+            <a:r>
+              <a:rPr lang="pt-BR" sz="2000" dirty="0"/>
+              <a:t>Neste desafio, você deverá responder a questões teóricas sobre os principais conceitos de Programação Orientada a Objetos (POO) em Dart, demonstrando sua compreensão sobre classes, objetos, atributos, estado e construtores.</a:t>
+            </a:r>
+          </a:p>
+        </p:txBody>
+      </p:sp>
+      <p:sp>
+        <p:nvSpPr>
+          <p:cNvPr id="3" name="Título 2">
+            <a:extLst>
+              <a:ext uri="{FF2B5EF4-FFF2-40B4-BE49-F238E27FC236}">
+                <a16:creationId xmlns:a16="http://schemas.microsoft.com/office/drawing/2014/main" id="{62A0E100-C50A-460D-8D94-133D7060159B}"/>
               </a:ext>
             </a:extLst>
           </p:cNvPr>
@@ -11617,47 +11842,353 @@
             <p:ph type="title"/>
           </p:nvPr>
         </p:nvSpPr>
-        <p:spPr/>
+        <p:spPr>
+          <a:xfrm>
+            <a:off x="833519" y="877911"/>
+            <a:ext cx="8360355" cy="424678"/>
+          </a:xfrm>
+        </p:spPr>
         <p:txBody>
           <a:bodyPr/>
           <a:lstStyle/>
           <a:p>
             <a:r>
               <a:rPr lang="pt-BR" dirty="0"/>
-              <a:t>Desafio</a:t>
+              <a:t>Laboratório: Introdução à POO Com Dart</a:t>
             </a:r>
           </a:p>
         </p:txBody>
       </p:sp>
       <p:sp>
         <p:nvSpPr>
-          <p:cNvPr id="3" name="Espaço Reservado para Conteúdo 2">
+          <p:cNvPr id="4" name="Text Placeholder 3">
             <a:extLst>
               <a:ext uri="{FF2B5EF4-FFF2-40B4-BE49-F238E27FC236}">
-                <a16:creationId xmlns:a16="http://schemas.microsoft.com/office/drawing/2014/main" id="{9C0EF66C-FE7C-1147-C4D4-BD3E4920CA96}"/>
+                <a16:creationId xmlns:a16="http://schemas.microsoft.com/office/drawing/2014/main" id="{1213DBE8-BE5E-4A3D-A444-5A8A26478A08}"/>
               </a:ext>
             </a:extLst>
           </p:cNvPr>
-          <p:cNvSpPr>
-            <a:spLocks noGrp="1"/>
+          <p:cNvSpPr txBox="1">
+            <a:spLocks/>
           </p:cNvSpPr>
-          <p:nvPr>
-            <p:ph idx="1"/>
-          </p:nvPr>
+          <p:nvPr/>
         </p:nvSpPr>
-        <p:spPr/>
+        <p:spPr>
+          <a:xfrm>
+            <a:off x="974035" y="3698314"/>
+            <a:ext cx="10243929" cy="2342755"/>
+          </a:xfrm>
+          <a:prstGeom prst="rect">
+            <a:avLst/>
+          </a:prstGeom>
+          <a:ln w="28575">
+            <a:solidFill>
+              <a:srgbClr val="043073"/>
+            </a:solidFill>
+          </a:ln>
+        </p:spPr>
         <p:txBody>
-          <a:bodyPr/>
-          <a:lstStyle/>
-          <a:p>
-            <a:endParaRPr lang="pt-BR"/>
+          <a:bodyPr lIns="91440" tIns="45720" rIns="91440" bIns="45720" anchor="t"/>
+          <a:lstStyle>
+            <a:lvl1pPr marL="0" marR="0" indent="0" algn="l" defTabSz="914367" rtl="0" eaLnBrk="1" fontAlgn="auto" latinLnBrk="0" hangingPunct="1">
+              <a:lnSpc>
+                <a:spcPct val="100000"/>
+              </a:lnSpc>
+              <a:spcBef>
+                <a:spcPts val="0"/>
+              </a:spcBef>
+              <a:spcAft>
+                <a:spcPts val="0"/>
+              </a:spcAft>
+              <a:buClrTx/>
+              <a:buSzPct val="90000"/>
+              <a:buFont typeface="Wingdings" panose="05000000000000000000" pitchFamily="2" charset="2"/>
+              <a:buNone/>
+              <a:tabLst/>
+              <a:defRPr sz="2353" kern="1200" spc="-49" baseline="0">
+                <a:solidFill>
+                  <a:srgbClr val="000000"/>
+                </a:solidFill>
+                <a:latin typeface="+mj-lt"/>
+                <a:ea typeface="+mn-ea"/>
+                <a:cs typeface="+mn-cs"/>
+              </a:defRPr>
+            </a:lvl1pPr>
+            <a:lvl2pPr marL="0" marR="0" indent="0" algn="l" defTabSz="914367" rtl="0" eaLnBrk="1" fontAlgn="auto" latinLnBrk="0" hangingPunct="1">
+              <a:lnSpc>
+                <a:spcPct val="100000"/>
+              </a:lnSpc>
+              <a:spcBef>
+                <a:spcPts val="392"/>
+              </a:spcBef>
+              <a:spcAft>
+                <a:spcPts val="588"/>
+              </a:spcAft>
+              <a:buClrTx/>
+              <a:buSzPct val="90000"/>
+              <a:buFontTx/>
+              <a:buNone/>
+              <a:tabLst/>
+              <a:defRPr sz="2000" kern="1200" spc="0" baseline="0">
+                <a:solidFill>
+                  <a:schemeClr val="tx1"/>
+                </a:solidFill>
+                <a:latin typeface="+mn-lt"/>
+                <a:ea typeface="+mn-ea"/>
+                <a:cs typeface="+mn-cs"/>
+              </a:defRPr>
+            </a:lvl2pPr>
+            <a:lvl3pPr marL="0" marR="0" indent="0" algn="l" defTabSz="914367" rtl="0" eaLnBrk="1" fontAlgn="auto" latinLnBrk="0" hangingPunct="1">
+              <a:lnSpc>
+                <a:spcPct val="100000"/>
+              </a:lnSpc>
+              <a:spcBef>
+                <a:spcPts val="392"/>
+              </a:spcBef>
+              <a:spcAft>
+                <a:spcPts val="588"/>
+              </a:spcAft>
+              <a:buClrTx/>
+              <a:buSzPct val="90000"/>
+              <a:buFont typeface="Wingdings" panose="05000000000000000000" pitchFamily="2" charset="2"/>
+              <a:buNone/>
+              <a:tabLst/>
+              <a:defRPr sz="1600" kern="1200" spc="0" baseline="0">
+                <a:solidFill>
+                  <a:schemeClr val="tx1"/>
+                </a:solidFill>
+                <a:latin typeface="+mj-lt"/>
+                <a:ea typeface="+mn-ea"/>
+                <a:cs typeface="+mn-cs"/>
+              </a:defRPr>
+            </a:lvl3pPr>
+            <a:lvl4pPr marL="0" marR="0" indent="0" algn="l" defTabSz="914367" rtl="0" eaLnBrk="1" fontAlgn="auto" latinLnBrk="0" hangingPunct="1">
+              <a:lnSpc>
+                <a:spcPct val="100000"/>
+              </a:lnSpc>
+              <a:spcBef>
+                <a:spcPts val="392"/>
+              </a:spcBef>
+              <a:spcAft>
+                <a:spcPts val="588"/>
+              </a:spcAft>
+              <a:buClrTx/>
+              <a:buSzPct val="90000"/>
+              <a:buFont typeface="Wingdings" panose="05000000000000000000" pitchFamily="2" charset="2"/>
+              <a:buNone/>
+              <a:tabLst/>
+              <a:defRPr sz="1600" kern="1200" spc="0" baseline="0">
+                <a:solidFill>
+                  <a:schemeClr val="tx1"/>
+                </a:solidFill>
+                <a:latin typeface="+mn-lt"/>
+                <a:ea typeface="+mn-ea"/>
+                <a:cs typeface="+mn-cs"/>
+              </a:defRPr>
+            </a:lvl4pPr>
+            <a:lvl5pPr marL="0" marR="0" indent="0" algn="l" defTabSz="914367" rtl="0" eaLnBrk="1" fontAlgn="auto" latinLnBrk="0" hangingPunct="1">
+              <a:lnSpc>
+                <a:spcPct val="100000"/>
+              </a:lnSpc>
+              <a:spcBef>
+                <a:spcPts val="392"/>
+              </a:spcBef>
+              <a:spcAft>
+                <a:spcPts val="588"/>
+              </a:spcAft>
+              <a:buClrTx/>
+              <a:buSzPct val="90000"/>
+              <a:buFont typeface="Wingdings" panose="05000000000000000000" pitchFamily="2" charset="2"/>
+              <a:buNone/>
+              <a:tabLst/>
+              <a:defRPr sz="1200" b="1" kern="1200" spc="0" baseline="0">
+                <a:solidFill>
+                  <a:schemeClr val="tx1"/>
+                </a:solidFill>
+                <a:latin typeface="+mn-lt"/>
+                <a:ea typeface="+mn-ea"/>
+                <a:cs typeface="+mn-cs"/>
+              </a:defRPr>
+            </a:lvl5pPr>
+            <a:lvl6pPr marL="2285916" indent="0" algn="l" defTabSz="914367" rtl="0" eaLnBrk="1" latinLnBrk="0" hangingPunct="1">
+              <a:spcBef>
+                <a:spcPct val="20000"/>
+              </a:spcBef>
+              <a:buFont typeface="Arial" pitchFamily="34" charset="0"/>
+              <a:buNone/>
+              <a:defRPr sz="1961" kern="1200">
+                <a:solidFill>
+                  <a:schemeClr val="tx1"/>
+                </a:solidFill>
+                <a:latin typeface="+mn-lt"/>
+                <a:ea typeface="+mn-ea"/>
+                <a:cs typeface="+mn-cs"/>
+              </a:defRPr>
+            </a:lvl6pPr>
+            <a:lvl7pPr marL="0" indent="0" algn="l" defTabSz="914367" rtl="0" eaLnBrk="1" latinLnBrk="0" hangingPunct="1">
+              <a:lnSpc>
+                <a:spcPct val="100000"/>
+              </a:lnSpc>
+              <a:spcBef>
+                <a:spcPts val="392"/>
+              </a:spcBef>
+              <a:spcAft>
+                <a:spcPts val="588"/>
+              </a:spcAft>
+              <a:buFont typeface="Arial" pitchFamily="34" charset="0"/>
+              <a:buNone/>
+              <a:defRPr sz="1200" kern="1200">
+                <a:solidFill>
+                  <a:schemeClr val="tx1"/>
+                </a:solidFill>
+                <a:latin typeface="+mn-lt"/>
+                <a:ea typeface="+mn-ea"/>
+                <a:cs typeface="+mn-cs"/>
+              </a:defRPr>
+            </a:lvl7pPr>
+            <a:lvl8pPr marL="3428877" indent="-228592" algn="l" defTabSz="914367" rtl="0" eaLnBrk="1" latinLnBrk="0" hangingPunct="1">
+              <a:spcBef>
+                <a:spcPct val="20000"/>
+              </a:spcBef>
+              <a:buFont typeface="Arial" pitchFamily="34" charset="0"/>
+              <a:buChar char="•"/>
+              <a:defRPr sz="1961" kern="1200">
+                <a:solidFill>
+                  <a:schemeClr val="tx1"/>
+                </a:solidFill>
+                <a:latin typeface="+mn-lt"/>
+                <a:ea typeface="+mn-ea"/>
+                <a:cs typeface="+mn-cs"/>
+              </a:defRPr>
+            </a:lvl8pPr>
+            <a:lvl9pPr marL="3886061" indent="-228592" algn="l" defTabSz="914367" rtl="0" eaLnBrk="1" latinLnBrk="0" hangingPunct="1">
+              <a:spcBef>
+                <a:spcPct val="20000"/>
+              </a:spcBef>
+              <a:buFont typeface="Arial" pitchFamily="34" charset="0"/>
+              <a:buChar char="•"/>
+              <a:defRPr sz="1961" kern="1200">
+                <a:solidFill>
+                  <a:schemeClr val="tx1"/>
+                </a:solidFill>
+                <a:latin typeface="+mn-lt"/>
+                <a:ea typeface="+mn-ea"/>
+                <a:cs typeface="+mn-cs"/>
+              </a:defRPr>
+            </a:lvl9pPr>
+          </a:lstStyle>
+          <a:p>
+            <a:pPr marL="457200" indent="-457200" algn="just" defTabSz="914400">
+              <a:buAutoNum type="arabicPeriod"/>
+              <a:defRPr sz="2400" kern="0">
+                <a:latin typeface="Segoe UI"/>
+                <a:cs typeface="Segoe UI"/>
+              </a:defRPr>
+            </a:pPr>
+            <a:r>
+              <a:rPr lang="pt-BR" sz="2400" dirty="0">
+                <a:latin typeface="Times New Roman" panose="02020603050405020304" pitchFamily="18" charset="0"/>
+                <a:cs typeface="Times New Roman" panose="02020603050405020304" pitchFamily="18" charset="0"/>
+              </a:rPr>
+              <a:t>Para acessar a página do exercício </a:t>
+            </a:r>
+            <a:r>
+              <a:rPr lang="pt-BR" sz="2400" dirty="0">
+                <a:latin typeface="Times New Roman" panose="02020603050405020304" pitchFamily="18" charset="0"/>
+                <a:cs typeface="Times New Roman" panose="02020603050405020304" pitchFamily="18" charset="0"/>
+                <a:hlinkClick r:id="rId2"/>
+              </a:rPr>
+              <a:t>Clique Aqui</a:t>
+            </a:r>
+            <a:endParaRPr lang="pt-BR" sz="2400" dirty="0">
+              <a:latin typeface="Times New Roman" panose="02020603050405020304" pitchFamily="18" charset="0"/>
+              <a:cs typeface="Times New Roman" panose="02020603050405020304" pitchFamily="18" charset="0"/>
+            </a:endParaRPr>
+          </a:p>
+          <a:p>
+            <a:pPr marL="457200" indent="-457200" algn="just" defTabSz="914400">
+              <a:buAutoNum type="arabicPeriod"/>
+              <a:defRPr sz="2400" kern="0">
+                <a:latin typeface="Segoe UI"/>
+                <a:cs typeface="Segoe UI"/>
+              </a:defRPr>
+            </a:pPr>
+            <a:endParaRPr lang="pt-BR" sz="1800" dirty="0">
+              <a:latin typeface="Times New Roman" panose="02020603050405020304" pitchFamily="18" charset="0"/>
+              <a:cs typeface="Times New Roman" panose="02020603050405020304" pitchFamily="18" charset="0"/>
+            </a:endParaRPr>
+          </a:p>
+          <a:p>
+            <a:pPr marL="457200" indent="-457200" algn="just" defTabSz="914400">
+              <a:buFont typeface="Wingdings" panose="05000000000000000000" pitchFamily="2" charset="2"/>
+              <a:buAutoNum type="arabicPeriod"/>
+              <a:defRPr sz="2400" kern="0">
+                <a:latin typeface="Segoe UI"/>
+                <a:cs typeface="Segoe UI"/>
+              </a:defRPr>
+            </a:pPr>
+            <a:r>
+              <a:rPr lang="pt-BR" sz="2400" dirty="0">
+                <a:latin typeface="Times New Roman" panose="02020603050405020304" pitchFamily="18" charset="0"/>
+                <a:cs typeface="Times New Roman" panose="02020603050405020304" pitchFamily="18" charset="0"/>
+              </a:rPr>
+              <a:t>Siga as instruções para concluir o exercício</a:t>
+            </a:r>
+            <a:endParaRPr lang="pt-BR" sz="2400" kern="0" dirty="0">
+              <a:latin typeface="Times New Roman" panose="02020603050405020304" pitchFamily="18" charset="0"/>
+              <a:ea typeface="+mj-lt"/>
+              <a:cs typeface="Times New Roman" panose="02020603050405020304" pitchFamily="18" charset="0"/>
+            </a:endParaRPr>
+          </a:p>
+          <a:p>
+            <a:pPr marL="457200" indent="-457200" defTabSz="914400">
+              <a:buAutoNum type="arabicPeriod"/>
+              <a:defRPr sz="2400" kern="0">
+                <a:latin typeface="Segoe UI"/>
+                <a:cs typeface="Segoe UI"/>
+              </a:defRPr>
+            </a:pPr>
+            <a:endParaRPr sz="1800" dirty="0">
+              <a:latin typeface="Times New Roman" panose="02020603050405020304" pitchFamily="18" charset="0"/>
+              <a:cs typeface="Times New Roman" panose="02020603050405020304" pitchFamily="18" charset="0"/>
+            </a:endParaRPr>
           </a:p>
         </p:txBody>
       </p:sp>
+      <p:pic>
+        <p:nvPicPr>
+          <p:cNvPr id="6" name="Imagem 5" descr="Gráfico, Gráfico de pizza&#10;&#10;O conteúdo gerado por IA pode estar incorreto.">
+            <a:extLst>
+              <a:ext uri="{FF2B5EF4-FFF2-40B4-BE49-F238E27FC236}">
+                <a16:creationId xmlns:a16="http://schemas.microsoft.com/office/drawing/2014/main" id="{583C1E38-FDCF-6210-593A-90021D65B16E}"/>
+              </a:ext>
+            </a:extLst>
+          </p:cNvPr>
+          <p:cNvPicPr>
+            <a:picLocks noChangeAspect="1"/>
+          </p:cNvPicPr>
+          <p:nvPr/>
+        </p:nvPicPr>
+        <p:blipFill>
+          <a:blip r:embed="rId3"/>
+          <a:stretch>
+            <a:fillRect/>
+          </a:stretch>
+        </p:blipFill>
+        <p:spPr>
+          <a:xfrm>
+            <a:off x="10033350" y="4869691"/>
+            <a:ext cx="1119924" cy="1119924"/>
+          </a:xfrm>
+          <a:prstGeom prst="rect">
+            <a:avLst/>
+          </a:prstGeom>
+        </p:spPr>
+      </p:pic>
     </p:spTree>
     <p:extLst>
       <p:ext uri="{BB962C8B-B14F-4D97-AF65-F5344CB8AC3E}">
-        <p14:creationId xmlns:p14="http://schemas.microsoft.com/office/powerpoint/2010/main" val="3880193892"/>
+        <p14:creationId xmlns:p14="http://schemas.microsoft.com/office/powerpoint/2010/main" val="2455044244"/>
       </p:ext>
     </p:extLst>
   </p:cSld>
